--- a/examples/templates/target_001.template.pptx
+++ b/examples/templates/target_001.template.pptx
@@ -52,7 +52,7 @@
         <p:spPr>
           <a:xfrm>
             <a:off x="755640" y="428760"/>
-            <a:ext cx="13602960" cy="1780920"/>
+            <a:ext cx="13602240" cy="1780200"/>
           </a:xfrm>
           <a:prstGeom prst="rect">
             <a:avLst/>
@@ -67,14 +67,14 @@
             <a:noAutofit/>
           </a:bodyPr>
           <a:p>
-            <a:pPr indent="0">
+            <a:pPr indent="0" algn="ctr">
               <a:buNone/>
             </a:pPr>
-            <a:endParaRPr b="0" lang="en-US" sz="2900" spc="-1" strike="noStrike">
+            <a:endParaRPr b="0" lang="en-US" sz="4400" spc="-1" strike="noStrike">
               <a:solidFill>
-                <a:schemeClr val="dk1"/>
+                <a:srgbClr val="000000"/>
               </a:solidFill>
-              <a:latin typeface="Calibri"/>
+              <a:latin typeface="Arial"/>
             </a:endParaRPr>
           </a:p>
         </p:txBody>
@@ -92,7 +92,7 @@
         <p:spPr>
           <a:xfrm>
             <a:off x="755640" y="2494080"/>
-            <a:ext cx="13602960" cy="7054560"/>
+            <a:ext cx="13602240" cy="7053840"/>
           </a:xfrm>
           <a:prstGeom prst="rect">
             <a:avLst/>
@@ -126,7 +126,7 @@
             <a:spLocks noGrp="1"/>
           </p:cNvSpPr>
           <p:nvPr>
-            <p:ph type="ftr" idx="2"/>
+            <p:ph type="ftr" idx="1"/>
           </p:nvPr>
         </p:nvSpPr>
         <p:spPr/>
@@ -146,14 +146,14 @@
             <a:spLocks noGrp="1"/>
           </p:cNvSpPr>
           <p:nvPr>
-            <p:ph type="sldNum" idx="3"/>
+            <p:ph type="sldNum" idx="2"/>
           </p:nvPr>
         </p:nvSpPr>
         <p:spPr/>
         <p:txBody>
           <a:bodyPr/>
           <a:p>
-            <a:fld id="{A5B2BB0B-F3B6-4DE2-8C8E-4FAA64A4B0C9}" type="slidenum">
+            <a:fld id="{BFC134F5-A9FB-4BDC-8934-FB9A0E24FFB3}" type="slidenum">
               <a:t>&lt;#&gt;</a:t>
             </a:fld>
           </a:p>
@@ -166,7 +166,7 @@
             <a:spLocks noGrp="1"/>
           </p:cNvSpPr>
           <p:nvPr>
-            <p:ph type="dt" idx="1"/>
+            <p:ph type="dt" idx="3"/>
           </p:nvPr>
         </p:nvSpPr>
         <p:spPr/>
@@ -209,7 +209,7 @@
             <a:spLocks noGrp="1"/>
           </p:cNvSpPr>
           <p:nvPr>
-            <p:ph type="ftr" idx="29"/>
+            <p:ph type="ftr" idx="28"/>
           </p:nvPr>
         </p:nvSpPr>
         <p:spPr/>
@@ -229,14 +229,14 @@
             <a:spLocks noGrp="1"/>
           </p:cNvSpPr>
           <p:nvPr>
-            <p:ph type="sldNum" idx="30"/>
+            <p:ph type="sldNum" idx="29"/>
           </p:nvPr>
         </p:nvSpPr>
         <p:spPr/>
         <p:txBody>
           <a:bodyPr/>
           <a:p>
-            <a:fld id="{8D0808B9-D846-46A5-A5F0-B9B2F735C1FF}" type="slidenum">
+            <a:fld id="{E8CF4DDE-51CC-46E4-98B3-765A7835772A}" type="slidenum">
               <a:t>&lt;#&gt;</a:t>
             </a:fld>
           </a:p>
@@ -249,7 +249,7 @@
             <a:spLocks noGrp="1"/>
           </p:cNvSpPr>
           <p:nvPr>
-            <p:ph type="dt" idx="28"/>
+            <p:ph type="dt" idx="30"/>
           </p:nvPr>
         </p:nvSpPr>
         <p:spPr/>
@@ -292,7 +292,7 @@
             <a:spLocks noGrp="1"/>
           </p:cNvSpPr>
           <p:nvPr>
-            <p:ph type="ftr" idx="32"/>
+            <p:ph type="ftr" idx="31"/>
           </p:nvPr>
         </p:nvSpPr>
         <p:spPr/>
@@ -312,14 +312,14 @@
             <a:spLocks noGrp="1"/>
           </p:cNvSpPr>
           <p:nvPr>
-            <p:ph type="sldNum" idx="33"/>
+            <p:ph type="sldNum" idx="32"/>
           </p:nvPr>
         </p:nvSpPr>
         <p:spPr/>
         <p:txBody>
           <a:bodyPr/>
           <a:p>
-            <a:fld id="{D32C3AB6-CA53-4B7B-B721-08EB7931FE1A}" type="slidenum">
+            <a:fld id="{3E3039F1-E8A4-42B2-8C8E-9DEA31355B74}" type="slidenum">
               <a:t>&lt;#&gt;</a:t>
             </a:fld>
           </a:p>
@@ -332,7 +332,7 @@
             <a:spLocks noGrp="1"/>
           </p:cNvSpPr>
           <p:nvPr>
-            <p:ph type="dt" idx="31"/>
+            <p:ph type="dt" idx="33"/>
           </p:nvPr>
         </p:nvSpPr>
         <p:spPr/>
@@ -375,7 +375,7 @@
             <a:spLocks noGrp="1"/>
           </p:cNvSpPr>
           <p:nvPr>
-            <p:ph type="ftr" idx="5"/>
+            <p:ph type="ftr" idx="4"/>
           </p:nvPr>
         </p:nvSpPr>
         <p:spPr/>
@@ -395,14 +395,14 @@
             <a:spLocks noGrp="1"/>
           </p:cNvSpPr>
           <p:nvPr>
-            <p:ph type="sldNum" idx="6"/>
+            <p:ph type="sldNum" idx="5"/>
           </p:nvPr>
         </p:nvSpPr>
         <p:spPr/>
         <p:txBody>
           <a:bodyPr/>
           <a:p>
-            <a:fld id="{0B3743FE-2186-446A-8ACA-42423C875137}" type="slidenum">
+            <a:fld id="{1D5CA52B-6C33-44B8-AD22-9D22649EBE4C}" type="slidenum">
               <a:t>&lt;#&gt;</a:t>
             </a:fld>
           </a:p>
@@ -415,7 +415,7 @@
             <a:spLocks noGrp="1"/>
           </p:cNvSpPr>
           <p:nvPr>
-            <p:ph type="dt" idx="4"/>
+            <p:ph type="dt" idx="6"/>
           </p:nvPr>
         </p:nvSpPr>
         <p:spPr/>
@@ -458,7 +458,7 @@
             <a:spLocks noGrp="1"/>
           </p:cNvSpPr>
           <p:nvPr>
-            <p:ph type="ftr" idx="8"/>
+            <p:ph type="ftr" idx="7"/>
           </p:nvPr>
         </p:nvSpPr>
         <p:spPr/>
@@ -478,14 +478,14 @@
             <a:spLocks noGrp="1"/>
           </p:cNvSpPr>
           <p:nvPr>
-            <p:ph type="sldNum" idx="9"/>
+            <p:ph type="sldNum" idx="8"/>
           </p:nvPr>
         </p:nvSpPr>
         <p:spPr/>
         <p:txBody>
           <a:bodyPr/>
           <a:p>
-            <a:fld id="{809F8FFB-76F5-43D7-BA06-2F7C57263C45}" type="slidenum">
+            <a:fld id="{C8935E19-1DAB-45EC-8749-42CC651E5DDD}" type="slidenum">
               <a:t>&lt;#&gt;</a:t>
             </a:fld>
           </a:p>
@@ -498,7 +498,7 @@
             <a:spLocks noGrp="1"/>
           </p:cNvSpPr>
           <p:nvPr>
-            <p:ph type="dt" idx="7"/>
+            <p:ph type="dt" idx="9"/>
           </p:nvPr>
         </p:nvSpPr>
         <p:spPr/>
@@ -536,7 +536,7 @@
       </p:grpSpPr>
       <p:sp>
         <p:nvSpPr>
-          <p:cNvPr id="21" name="PlaceHolder 1"/>
+          <p:cNvPr id="17" name="PlaceHolder 1"/>
           <p:cNvSpPr>
             <a:spLocks noGrp="1"/>
           </p:cNvSpPr>
@@ -547,7 +547,7 @@
         <p:spPr>
           <a:xfrm>
             <a:off x="755640" y="428760"/>
-            <a:ext cx="13602960" cy="1780920"/>
+            <a:ext cx="13602240" cy="1780200"/>
           </a:xfrm>
           <a:prstGeom prst="rect">
             <a:avLst/>
@@ -562,21 +562,21 @@
             <a:noAutofit/>
           </a:bodyPr>
           <a:p>
-            <a:pPr indent="0">
+            <a:pPr indent="0" algn="ctr">
               <a:buNone/>
             </a:pPr>
-            <a:endParaRPr b="0" lang="en-US" sz="2900" spc="-1" strike="noStrike">
+            <a:endParaRPr b="0" lang="en-US" sz="4400" spc="-1" strike="noStrike">
               <a:solidFill>
-                <a:schemeClr val="dk1"/>
+                <a:srgbClr val="000000"/>
               </a:solidFill>
-              <a:latin typeface="Calibri"/>
+              <a:latin typeface="Arial"/>
             </a:endParaRPr>
           </a:p>
         </p:txBody>
       </p:sp>
       <p:sp>
         <p:nvSpPr>
-          <p:cNvPr id="22" name="PlaceHolder 2"/>
+          <p:cNvPr id="18" name="PlaceHolder 2"/>
           <p:cNvSpPr>
             <a:spLocks noGrp="1"/>
           </p:cNvSpPr>
@@ -587,7 +587,7 @@
         <p:spPr>
           <a:xfrm>
             <a:off x="755640" y="2494080"/>
-            <a:ext cx="13602960" cy="7054560"/>
+            <a:ext cx="13602240" cy="7053840"/>
           </a:xfrm>
           <a:prstGeom prst="rect">
             <a:avLst/>
@@ -608,11 +608,11 @@
               </a:spcBef>
               <a:buNone/>
             </a:pPr>
-            <a:endParaRPr b="0" lang="en-US" sz="5200" spc="-1" strike="noStrike">
+            <a:endParaRPr b="0" lang="en-US" sz="3200" spc="-1" strike="noStrike">
               <a:solidFill>
-                <a:schemeClr val="dk1"/>
+                <a:srgbClr val="000000"/>
               </a:solidFill>
-              <a:latin typeface="Calibri"/>
+              <a:latin typeface="Arial"/>
             </a:endParaRPr>
           </a:p>
         </p:txBody>
@@ -624,7 +624,7 @@
             <a:spLocks noGrp="1"/>
           </p:cNvSpPr>
           <p:nvPr>
-            <p:ph type="ftr" idx="11"/>
+            <p:ph type="ftr" idx="10"/>
           </p:nvPr>
         </p:nvSpPr>
         <p:spPr/>
@@ -644,14 +644,14 @@
             <a:spLocks noGrp="1"/>
           </p:cNvSpPr>
           <p:nvPr>
-            <p:ph type="sldNum" idx="12"/>
+            <p:ph type="sldNum" idx="11"/>
           </p:nvPr>
         </p:nvSpPr>
         <p:spPr/>
         <p:txBody>
           <a:bodyPr/>
           <a:p>
-            <a:fld id="{045312DC-E7D4-4E33-B378-27427537C130}" type="slidenum">
+            <a:fld id="{D8358618-7A0B-4590-843A-A0CA8D8244F1}" type="slidenum">
               <a:t>&lt;#&gt;</a:t>
             </a:fld>
           </a:p>
@@ -664,7 +664,7 @@
             <a:spLocks noGrp="1"/>
           </p:cNvSpPr>
           <p:nvPr>
-            <p:ph type="dt" idx="10"/>
+            <p:ph type="dt" idx="12"/>
           </p:nvPr>
         </p:nvSpPr>
         <p:spPr/>
@@ -707,7 +707,7 @@
             <a:spLocks noGrp="1"/>
           </p:cNvSpPr>
           <p:nvPr>
-            <p:ph type="ftr" idx="14"/>
+            <p:ph type="ftr" idx="13"/>
           </p:nvPr>
         </p:nvSpPr>
         <p:spPr/>
@@ -727,14 +727,14 @@
             <a:spLocks noGrp="1"/>
           </p:cNvSpPr>
           <p:nvPr>
-            <p:ph type="sldNum" idx="15"/>
+            <p:ph type="sldNum" idx="14"/>
           </p:nvPr>
         </p:nvSpPr>
         <p:spPr/>
         <p:txBody>
           <a:bodyPr/>
           <a:p>
-            <a:fld id="{5F2F3AF0-0BAA-4D1F-979B-A80075A59361}" type="slidenum">
+            <a:fld id="{59C2C1BD-2A19-45A3-ACC8-55DBA920EC99}" type="slidenum">
               <a:t>&lt;#&gt;</a:t>
             </a:fld>
           </a:p>
@@ -747,7 +747,7 @@
             <a:spLocks noGrp="1"/>
           </p:cNvSpPr>
           <p:nvPr>
-            <p:ph type="dt" idx="13"/>
+            <p:ph type="dt" idx="15"/>
           </p:nvPr>
         </p:nvSpPr>
         <p:spPr/>
@@ -785,7 +785,7 @@
       </p:grpSpPr>
       <p:sp>
         <p:nvSpPr>
-          <p:cNvPr id="34" name="PlaceHolder 1"/>
+          <p:cNvPr id="28" name="PlaceHolder 1"/>
           <p:cNvSpPr>
             <a:spLocks noGrp="1"/>
           </p:cNvSpPr>
@@ -796,7 +796,7 @@
         <p:spPr>
           <a:xfrm>
             <a:off x="755640" y="428760"/>
-            <a:ext cx="13602960" cy="1780920"/>
+            <a:ext cx="13602240" cy="1780200"/>
           </a:xfrm>
           <a:prstGeom prst="rect">
             <a:avLst/>
@@ -811,21 +811,21 @@
             <a:noAutofit/>
           </a:bodyPr>
           <a:p>
-            <a:pPr indent="0">
+            <a:pPr indent="0" algn="ctr">
               <a:buNone/>
             </a:pPr>
-            <a:endParaRPr b="0" lang="en-US" sz="2900" spc="-1" strike="noStrike">
+            <a:endParaRPr b="0" lang="en-US" sz="4400" spc="-1" strike="noStrike">
               <a:solidFill>
-                <a:schemeClr val="dk1"/>
+                <a:srgbClr val="000000"/>
               </a:solidFill>
-              <a:latin typeface="Calibri"/>
+              <a:latin typeface="Arial"/>
             </a:endParaRPr>
           </a:p>
         </p:txBody>
       </p:sp>
       <p:sp>
         <p:nvSpPr>
-          <p:cNvPr id="35" name="PlaceHolder 2"/>
+          <p:cNvPr id="29" name="PlaceHolder 2"/>
           <p:cNvSpPr>
             <a:spLocks noGrp="1"/>
           </p:cNvSpPr>
@@ -836,7 +836,7 @@
         <p:spPr>
           <a:xfrm>
             <a:off x="755640" y="2494080"/>
-            <a:ext cx="6638040" cy="7054560"/>
+            <a:ext cx="6637680" cy="7053840"/>
           </a:xfrm>
           <a:prstGeom prst="rect">
             <a:avLst/>
@@ -857,18 +857,18 @@
               </a:spcBef>
               <a:buNone/>
             </a:pPr>
-            <a:endParaRPr b="0" lang="en-US" sz="5200" spc="-1" strike="noStrike">
+            <a:endParaRPr b="0" lang="en-US" sz="3200" spc="-1" strike="noStrike">
               <a:solidFill>
-                <a:schemeClr val="dk1"/>
+                <a:srgbClr val="000000"/>
               </a:solidFill>
-              <a:latin typeface="Calibri"/>
+              <a:latin typeface="Arial"/>
             </a:endParaRPr>
           </a:p>
         </p:txBody>
       </p:sp>
       <p:sp>
         <p:nvSpPr>
-          <p:cNvPr id="36" name="PlaceHolder 3"/>
+          <p:cNvPr id="30" name="PlaceHolder 3"/>
           <p:cNvSpPr>
             <a:spLocks noGrp="1"/>
           </p:cNvSpPr>
@@ -878,8 +878,8 @@
         </p:nvSpPr>
         <p:spPr>
           <a:xfrm>
-            <a:off x="7725960" y="2494080"/>
-            <a:ext cx="6638040" cy="7054560"/>
+            <a:off x="7725600" y="2494080"/>
+            <a:ext cx="6637680" cy="7053840"/>
           </a:xfrm>
           <a:prstGeom prst="rect">
             <a:avLst/>
@@ -900,11 +900,11 @@
               </a:spcBef>
               <a:buNone/>
             </a:pPr>
-            <a:endParaRPr b="0" lang="en-US" sz="5200" spc="-1" strike="noStrike">
+            <a:endParaRPr b="0" lang="en-US" sz="3200" spc="-1" strike="noStrike">
               <a:solidFill>
-                <a:schemeClr val="dk1"/>
+                <a:srgbClr val="000000"/>
               </a:solidFill>
-              <a:latin typeface="Calibri"/>
+              <a:latin typeface="Arial"/>
             </a:endParaRPr>
           </a:p>
         </p:txBody>
@@ -916,7 +916,7 @@
             <a:spLocks noGrp="1"/>
           </p:cNvSpPr>
           <p:nvPr>
-            <p:ph type="ftr" idx="17"/>
+            <p:ph type="ftr" idx="16"/>
           </p:nvPr>
         </p:nvSpPr>
         <p:spPr/>
@@ -936,14 +936,14 @@
             <a:spLocks noGrp="1"/>
           </p:cNvSpPr>
           <p:nvPr>
-            <p:ph type="sldNum" idx="18"/>
+            <p:ph type="sldNum" idx="17"/>
           </p:nvPr>
         </p:nvSpPr>
         <p:spPr/>
         <p:txBody>
           <a:bodyPr/>
           <a:p>
-            <a:fld id="{DD205A05-819F-4ED9-B7AB-1A179B561A1F}" type="slidenum">
+            <a:fld id="{649FEBE3-EF06-4A33-9AF9-09DDF486B94A}" type="slidenum">
               <a:t>&lt;#&gt;</a:t>
             </a:fld>
           </a:p>
@@ -956,7 +956,7 @@
             <a:spLocks noGrp="1"/>
           </p:cNvSpPr>
           <p:nvPr>
-            <p:ph type="dt" idx="16"/>
+            <p:ph type="dt" idx="18"/>
           </p:nvPr>
         </p:nvSpPr>
         <p:spPr/>
@@ -999,7 +999,7 @@
             <a:spLocks noGrp="1"/>
           </p:cNvSpPr>
           <p:nvPr>
-            <p:ph type="ftr" idx="20"/>
+            <p:ph type="ftr" idx="19"/>
           </p:nvPr>
         </p:nvSpPr>
         <p:spPr/>
@@ -1019,14 +1019,14 @@
             <a:spLocks noGrp="1"/>
           </p:cNvSpPr>
           <p:nvPr>
-            <p:ph type="sldNum" idx="21"/>
+            <p:ph type="sldNum" idx="20"/>
           </p:nvPr>
         </p:nvSpPr>
         <p:spPr/>
         <p:txBody>
           <a:bodyPr/>
           <a:p>
-            <a:fld id="{F385AE2E-DECF-4C27-9DAA-749467C212B6}" type="slidenum">
+            <a:fld id="{8D508012-B509-44BA-9E09-0754F1613377}" type="slidenum">
               <a:t>&lt;#&gt;</a:t>
             </a:fld>
           </a:p>
@@ -1039,7 +1039,7 @@
             <a:spLocks noGrp="1"/>
           </p:cNvSpPr>
           <p:nvPr>
-            <p:ph type="dt" idx="19"/>
+            <p:ph type="dt" idx="21"/>
           </p:nvPr>
         </p:nvSpPr>
         <p:spPr/>
@@ -1077,7 +1077,7 @@
       </p:grpSpPr>
       <p:sp>
         <p:nvSpPr>
-          <p:cNvPr id="49" name="PlaceHolder 1"/>
+          <p:cNvPr id="38" name="PlaceHolder 1"/>
           <p:cNvSpPr>
             <a:spLocks noGrp="1"/>
           </p:cNvSpPr>
@@ -1088,7 +1088,7 @@
         <p:spPr>
           <a:xfrm>
             <a:off x="755640" y="428760"/>
-            <a:ext cx="13602960" cy="1780920"/>
+            <a:ext cx="13602240" cy="1780200"/>
           </a:xfrm>
           <a:prstGeom prst="rect">
             <a:avLst/>
@@ -1103,14 +1103,14 @@
             <a:noAutofit/>
           </a:bodyPr>
           <a:p>
-            <a:pPr indent="0">
+            <a:pPr indent="0" algn="ctr">
               <a:buNone/>
             </a:pPr>
-            <a:endParaRPr b="0" lang="en-US" sz="2900" spc="-1" strike="noStrike">
+            <a:endParaRPr b="0" lang="en-US" sz="4400" spc="-1" strike="noStrike">
               <a:solidFill>
-                <a:schemeClr val="dk1"/>
+                <a:srgbClr val="000000"/>
               </a:solidFill>
-              <a:latin typeface="Calibri"/>
+              <a:latin typeface="Arial"/>
             </a:endParaRPr>
           </a:p>
         </p:txBody>
@@ -1122,7 +1122,7 @@
             <a:spLocks noGrp="1"/>
           </p:cNvSpPr>
           <p:nvPr>
-            <p:ph type="ftr" idx="23"/>
+            <p:ph type="ftr" idx="22"/>
           </p:nvPr>
         </p:nvSpPr>
         <p:spPr/>
@@ -1142,14 +1142,14 @@
             <a:spLocks noGrp="1"/>
           </p:cNvSpPr>
           <p:nvPr>
-            <p:ph type="sldNum" idx="24"/>
+            <p:ph type="sldNum" idx="23"/>
           </p:nvPr>
         </p:nvSpPr>
         <p:spPr/>
         <p:txBody>
           <a:bodyPr/>
           <a:p>
-            <a:fld id="{4D29F321-74F5-434E-8D48-174565D92D19}" type="slidenum">
+            <a:fld id="{7990F319-156B-4694-B611-206CB54A5FDB}" type="slidenum">
               <a:t>&lt;#&gt;</a:t>
             </a:fld>
           </a:p>
@@ -1162,7 +1162,7 @@
             <a:spLocks noGrp="1"/>
           </p:cNvSpPr>
           <p:nvPr>
-            <p:ph type="dt" idx="22"/>
+            <p:ph type="dt" idx="24"/>
           </p:nvPr>
         </p:nvSpPr>
         <p:spPr/>
@@ -1205,7 +1205,7 @@
             <a:spLocks noGrp="1"/>
           </p:cNvSpPr>
           <p:nvPr>
-            <p:ph type="ftr" idx="26"/>
+            <p:ph type="ftr" idx="25"/>
           </p:nvPr>
         </p:nvSpPr>
         <p:spPr/>
@@ -1225,14 +1225,14 @@
             <a:spLocks noGrp="1"/>
           </p:cNvSpPr>
           <p:nvPr>
-            <p:ph type="sldNum" idx="27"/>
+            <p:ph type="sldNum" idx="26"/>
           </p:nvPr>
         </p:nvSpPr>
         <p:spPr/>
         <p:txBody>
           <a:bodyPr/>
           <a:p>
-            <a:fld id="{EB328290-C27A-4682-AD5F-101BBB52BDFA}" type="slidenum">
+            <a:fld id="{C658CDF1-9074-4823-AF1C-41F620C5D553}" type="slidenum">
               <a:t>&lt;#&gt;</a:t>
             </a:fld>
           </a:p>
@@ -1245,7 +1245,7 @@
             <a:spLocks noGrp="1"/>
           </p:cNvSpPr>
           <p:nvPr>
-            <p:ph type="dt" idx="25"/>
+            <p:ph type="dt" idx="27"/>
           </p:nvPr>
         </p:nvSpPr>
         <p:spPr/>
@@ -1300,8 +1300,8 @@
         </p:nvSpPr>
         <p:spPr>
           <a:xfrm>
-            <a:off x="1133640" y="3320280"/>
-            <a:ext cx="12846960" cy="2290680"/>
+            <a:off x="755640" y="428760"/>
+            <a:ext cx="13602240" cy="1780200"/>
           </a:xfrm>
           <a:prstGeom prst="rect">
             <a:avLst/>
@@ -1312,30 +1312,27 @@
           </a:ln>
         </p:spPr>
         <p:txBody>
-          <a:bodyPr numCol="1" spcCol="0" lIns="147600" rIns="147600" tIns="73800" bIns="73800" anchor="ctr">
+          <a:bodyPr numCol="1" spcCol="0" lIns="0" rIns="0" tIns="0" bIns="0" anchor="ctr">
             <a:noAutofit/>
           </a:bodyPr>
           <a:p>
-            <a:pPr indent="0" algn="ctr" defTabSz="1473120">
-              <a:lnSpc>
-                <a:spcPct val="100000"/>
-              </a:lnSpc>
+            <a:pPr indent="0">
               <a:buNone/>
             </a:pPr>
             <a:r>
-              <a:rPr b="0" lang="en-US" sz="7100" spc="-1" strike="noStrike">
-                <a:solidFill>
-                  <a:schemeClr val="dk1"/>
-                </a:solidFill>
-                <a:latin typeface="Calibri"/>
+              <a:rPr b="0" lang="en-US" sz="1800" spc="-1" strike="noStrike">
+                <a:solidFill>
+                  <a:srgbClr val="000000"/>
+                </a:solidFill>
+                <a:latin typeface="Arial"/>
               </a:rPr>
-              <a:t>Click to edit Master title style</a:t>
-            </a:r>
-            <a:endParaRPr b="0" lang="en-US" sz="7100" spc="-1" strike="noStrike">
+              <a:t>Click to edit the title text format</a:t>
+            </a:r>
+            <a:endParaRPr b="0" lang="en-US" sz="1800" spc="-1" strike="noStrike">
               <a:solidFill>
-                <a:schemeClr val="dk1"/>
+                <a:srgbClr val="000000"/>
               </a:solidFill>
-              <a:latin typeface="Calibri"/>
+              <a:latin typeface="Arial"/>
             </a:endParaRPr>
           </a:p>
         </p:txBody>
@@ -1347,13 +1344,13 @@
             <a:spLocks noGrp="1"/>
           </p:cNvSpPr>
           <p:nvPr>
-            <p:ph type="dt" idx="1"/>
+            <p:ph type="ftr" idx="1"/>
           </p:nvPr>
         </p:nvSpPr>
         <p:spPr>
           <a:xfrm>
-            <a:off x="755640" y="9906120"/>
-            <a:ext cx="3526920" cy="569520"/>
+            <a:off x="5164200" y="9906120"/>
+            <a:ext cx="4785120" cy="568800"/>
           </a:xfrm>
           <a:prstGeom prst="rect">
             <a:avLst/>
@@ -1368,40 +1365,42 @@
             <a:noAutofit/>
           </a:bodyPr>
           <a:lstStyle>
-            <a:lvl1pPr indent="0" defTabSz="1474200">
+            <a:lvl1pPr indent="0" algn="ctr">
               <a:lnSpc>
                 <a:spcPct val="100000"/>
               </a:lnSpc>
               <a:buNone/>
-              <a:defRPr b="0" lang="en-US" sz="2000" spc="-1" strike="noStrike">
-                <a:solidFill>
-                  <a:schemeClr val="dk1">
-                    <a:tint val="75000"/>
-                  </a:schemeClr>
-                </a:solidFill>
-                <a:latin typeface="Calibri"/>
+              <a:tabLst>
+                <a:tab algn="l" pos="0"/>
+              </a:tabLst>
+              <a:defRPr b="0" lang="en-US" sz="1400" spc="-1" strike="noStrike">
+                <a:solidFill>
+                  <a:srgbClr val="000000"/>
+                </a:solidFill>
+                <a:latin typeface="Times New Roman"/>
               </a:defRPr>
             </a:lvl1pPr>
           </a:lstStyle>
           <a:p>
-            <a:pPr indent="0" defTabSz="1474200">
+            <a:pPr indent="0" algn="ctr">
               <a:lnSpc>
                 <a:spcPct val="100000"/>
               </a:lnSpc>
               <a:buNone/>
+              <a:tabLst>
+                <a:tab algn="l" pos="0"/>
+              </a:tabLst>
             </a:pPr>
             <a:r>
-              <a:rPr b="0" lang="en-US" sz="2000" spc="-1" strike="noStrike">
-                <a:solidFill>
-                  <a:schemeClr val="dk1">
-                    <a:tint val="75000"/>
-                  </a:schemeClr>
-                </a:solidFill>
-                <a:latin typeface="Calibri"/>
+              <a:rPr b="0" lang="en-US" sz="1400" spc="-1" strike="noStrike">
+                <a:solidFill>
+                  <a:srgbClr val="000000"/>
+                </a:solidFill>
+                <a:latin typeface="Times New Roman"/>
               </a:rPr>
-              <a:t>&lt;date/time&gt;</a:t>
-            </a:r>
-            <a:endParaRPr b="0" lang="en-US" sz="2000" spc="-1" strike="noStrike">
+              <a:t>&lt;footer&gt;</a:t>
+            </a:r>
+            <a:endParaRPr b="0" lang="en-US" sz="1400" spc="-1" strike="noStrike">
               <a:solidFill>
                 <a:srgbClr val="000000"/>
               </a:solidFill>
@@ -1417,13 +1416,13 @@
             <a:spLocks noGrp="1"/>
           </p:cNvSpPr>
           <p:nvPr>
-            <p:ph type="ftr" idx="2"/>
+            <p:ph type="sldNum" idx="2"/>
           </p:nvPr>
         </p:nvSpPr>
         <p:spPr>
           <a:xfrm>
-            <a:off x="5164200" y="9906120"/>
-            <a:ext cx="4785840" cy="569520"/>
+            <a:off x="10831680" y="9906120"/>
+            <a:ext cx="3526200" cy="568800"/>
           </a:xfrm>
           <a:prstGeom prst="rect">
             <a:avLst/>
@@ -1434,34 +1433,46 @@
           </a:ln>
         </p:spPr>
         <p:txBody>
-          <a:bodyPr lIns="147600" rIns="147600" tIns="73800" bIns="73800" anchor="ctr">
+          <a:bodyPr numCol="1" spcCol="0" lIns="147600" rIns="147600" tIns="73800" bIns="73800" anchor="ctr">
             <a:noAutofit/>
           </a:bodyPr>
           <a:lstStyle>
-            <a:lvl1pPr indent="0" algn="ctr">
-              <a:buNone/>
-              <a:defRPr b="0" lang="en-US" sz="1400" spc="-1" strike="noStrike">
-                <a:solidFill>
-                  <a:srgbClr val="000000"/>
-                </a:solidFill>
-                <a:latin typeface="Times New Roman"/>
+            <a:lvl1pPr indent="0" algn="r" defTabSz="1473120">
+              <a:lnSpc>
+                <a:spcPct val="100000"/>
+              </a:lnSpc>
+              <a:buNone/>
+              <a:tabLst>
+                <a:tab algn="l" pos="0"/>
+              </a:tabLst>
+              <a:defRPr b="0" lang="en-US" sz="2000" spc="-1" strike="noStrike">
+                <a:solidFill>
+                  <a:srgbClr val="898989"/>
+                </a:solidFill>
+                <a:latin typeface="Calibri"/>
               </a:defRPr>
             </a:lvl1pPr>
           </a:lstStyle>
           <a:p>
-            <a:pPr indent="0" algn="ctr">
-              <a:buNone/>
+            <a:pPr indent="0" algn="r" defTabSz="1473120">
+              <a:lnSpc>
+                <a:spcPct val="100000"/>
+              </a:lnSpc>
+              <a:buNone/>
+              <a:tabLst>
+                <a:tab algn="l" pos="0"/>
+              </a:tabLst>
             </a:pPr>
-            <a:r>
-              <a:rPr b="0" lang="en-US" sz="1400" spc="-1" strike="noStrike">
-                <a:solidFill>
-                  <a:srgbClr val="000000"/>
-                </a:solidFill>
-                <a:latin typeface="Times New Roman"/>
+            <a:fld id="{A1480CA0-FB22-4EEF-9001-92CA4DD427F7}" type="slidenum">
+              <a:rPr b="0" lang="en-US" sz="2000" spc="-1" strike="noStrike">
+                <a:solidFill>
+                  <a:srgbClr val="898989"/>
+                </a:solidFill>
+                <a:latin typeface="Calibri"/>
               </a:rPr>
-              <a:t>&lt;footer&gt;</a:t>
-            </a:r>
-            <a:endParaRPr b="0" lang="en-US" sz="1400" spc="-1" strike="noStrike">
+              <a:t>&lt;number&gt;</a:t>
+            </a:fld>
+            <a:endParaRPr b="0" lang="en-US" sz="2000" spc="-1" strike="noStrike">
               <a:solidFill>
                 <a:srgbClr val="000000"/>
               </a:solidFill>
@@ -1477,13 +1488,13 @@
             <a:spLocks noGrp="1"/>
           </p:cNvSpPr>
           <p:nvPr>
-            <p:ph type="sldNum" idx="3"/>
+            <p:ph type="dt" idx="3"/>
           </p:nvPr>
         </p:nvSpPr>
         <p:spPr>
           <a:xfrm>
-            <a:off x="10831680" y="9906120"/>
-            <a:ext cx="3526920" cy="569520"/>
+            <a:off x="755640" y="9906120"/>
+            <a:ext cx="3526200" cy="568800"/>
           </a:xfrm>
           <a:prstGeom prst="rect">
             <a:avLst/>
@@ -1494,40 +1505,34 @@
           </a:ln>
         </p:spPr>
         <p:txBody>
-          <a:bodyPr numCol="1" spcCol="0" lIns="147600" rIns="147600" tIns="73800" bIns="73800" anchor="ctr">
+          <a:bodyPr lIns="147600" rIns="147600" tIns="73800" bIns="73800" anchor="ctr">
             <a:noAutofit/>
           </a:bodyPr>
           <a:lstStyle>
-            <a:lvl1pPr indent="0" algn="r" defTabSz="1473120">
-              <a:lnSpc>
-                <a:spcPct val="100000"/>
-              </a:lnSpc>
-              <a:buNone/>
-              <a:defRPr b="0" lang="en-US" sz="2000" spc="-1" strike="noStrike">
-                <a:solidFill>
-                  <a:srgbClr val="898989"/>
-                </a:solidFill>
-                <a:latin typeface="Calibri"/>
+            <a:lvl1pPr indent="0">
+              <a:buNone/>
+              <a:defRPr b="0" lang="en-US" sz="1400" spc="-1" strike="noStrike">
+                <a:solidFill>
+                  <a:srgbClr val="000000"/>
+                </a:solidFill>
+                <a:latin typeface="Times New Roman"/>
               </a:defRPr>
             </a:lvl1pPr>
           </a:lstStyle>
           <a:p>
-            <a:pPr indent="0" algn="r" defTabSz="1473120">
-              <a:lnSpc>
-                <a:spcPct val="100000"/>
-              </a:lnSpc>
+            <a:pPr indent="0">
               <a:buNone/>
             </a:pPr>
-            <a:fld id="{7B77D9F7-EE26-463E-A5AB-E7C7DF7B44DF}" type="slidenum">
-              <a:rPr b="0" lang="en-US" sz="2000" spc="-1" strike="noStrike">
-                <a:solidFill>
-                  <a:srgbClr val="898989"/>
-                </a:solidFill>
-                <a:latin typeface="Calibri"/>
+            <a:r>
+              <a:rPr b="0" lang="en-US" sz="1400" spc="-1" strike="noStrike">
+                <a:solidFill>
+                  <a:srgbClr val="000000"/>
+                </a:solidFill>
+                <a:latin typeface="Times New Roman"/>
               </a:rPr>
-              <a:t>&lt;number&gt;</a:t>
-            </a:fld>
-            <a:endParaRPr b="0" lang="en-US" sz="2000" spc="-1" strike="noStrike">
+              <a:t>&lt;date/time&gt;</a:t>
+            </a:r>
+            <a:endParaRPr b="0" lang="en-US" sz="1400" spc="-1" strike="noStrike">
               <a:solidFill>
                 <a:srgbClr val="000000"/>
               </a:solidFill>
@@ -1571,18 +1576,18 @@
       </p:grpSpPr>
       <p:sp>
         <p:nvSpPr>
-          <p:cNvPr id="53" name="PlaceHolder 1"/>
-          <p:cNvSpPr>
-            <a:spLocks noGrp="1"/>
-          </p:cNvSpPr>
-          <p:nvPr>
-            <p:ph type="title"/>
+          <p:cNvPr id="42" name="PlaceHolder 1"/>
+          <p:cNvSpPr>
+            <a:spLocks noGrp="1"/>
+          </p:cNvSpPr>
+          <p:nvPr>
+            <p:ph type="ftr" idx="28"/>
           </p:nvPr>
         </p:nvSpPr>
         <p:spPr>
           <a:xfrm>
-            <a:off x="755640" y="425520"/>
-            <a:ext cx="4972320" cy="1810800"/>
+            <a:off x="5164200" y="9906120"/>
+            <a:ext cx="4785120" cy="568800"/>
           </a:xfrm>
           <a:prstGeom prst="rect">
             <a:avLst/>
@@ -1593,48 +1598,68 @@
           </a:ln>
         </p:spPr>
         <p:txBody>
-          <a:bodyPr numCol="1" spcCol="0" lIns="147600" rIns="147600" tIns="73800" bIns="73800" anchor="b">
+          <a:bodyPr lIns="147600" rIns="147600" tIns="73800" bIns="73800" anchor="ctr">
             <a:noAutofit/>
           </a:bodyPr>
-          <a:p>
-            <a:pPr indent="0" defTabSz="1473120">
+          <a:lstStyle>
+            <a:lvl1pPr indent="0" algn="ctr">
               <a:lnSpc>
                 <a:spcPct val="100000"/>
               </a:lnSpc>
               <a:buNone/>
+              <a:tabLst>
+                <a:tab algn="l" pos="0"/>
+              </a:tabLst>
+              <a:defRPr b="0" lang="en-US" sz="1400" spc="-1" strike="noStrike">
+                <a:solidFill>
+                  <a:srgbClr val="000000"/>
+                </a:solidFill>
+                <a:latin typeface="Times New Roman"/>
+              </a:defRPr>
+            </a:lvl1pPr>
+          </a:lstStyle>
+          <a:p>
+            <a:pPr indent="0" algn="ctr">
+              <a:lnSpc>
+                <a:spcPct val="100000"/>
+              </a:lnSpc>
+              <a:buNone/>
+              <a:tabLst>
+                <a:tab algn="l" pos="0"/>
+              </a:tabLst>
             </a:pPr>
             <a:r>
-              <a:rPr b="1" lang="en-US" sz="3200" spc="-1" strike="noStrike">
-                <a:solidFill>
-                  <a:schemeClr val="dk1"/>
-                </a:solidFill>
-                <a:latin typeface="Calibri"/>
+              <a:rPr b="0" lang="en-US" sz="1400" spc="-1" strike="noStrike">
+                <a:solidFill>
+                  <a:srgbClr val="000000"/>
+                </a:solidFill>
+                <a:latin typeface="Times New Roman"/>
               </a:rPr>
-              <a:t>Click to edit Master title style</a:t>
-            </a:r>
-            <a:endParaRPr b="0" lang="en-US" sz="3200" spc="-1" strike="noStrike">
+              <a:t>&lt;footer&gt;</a:t>
+            </a:r>
+            <a:endParaRPr b="0" lang="en-US" sz="1400" spc="-1" strike="noStrike">
               <a:solidFill>
-                <a:schemeClr val="dk1"/>
+                <a:srgbClr val="000000"/>
               </a:solidFill>
-              <a:latin typeface="Calibri"/>
+              <a:latin typeface="Times New Roman"/>
             </a:endParaRPr>
           </a:p>
         </p:txBody>
       </p:sp>
       <p:sp>
         <p:nvSpPr>
-          <p:cNvPr id="54" name="PlaceHolder 2"/>
-          <p:cNvSpPr>
-            <a:spLocks noGrp="1"/>
-          </p:cNvSpPr>
-          <p:nvPr>
-            <p:ph type="body"/>
+          <p:cNvPr id="43" name="PlaceHolder 2"/>
+          <p:cNvSpPr>
+            <a:spLocks noGrp="1"/>
+          </p:cNvSpPr>
+          <p:nvPr>
+            <p:ph type="sldNum" idx="29"/>
           </p:nvPr>
         </p:nvSpPr>
         <p:spPr>
           <a:xfrm>
-            <a:off x="5909400" y="425520"/>
-            <a:ext cx="8449200" cy="9122040"/>
+            <a:off x="10831680" y="9906120"/>
+            <a:ext cx="3526200" cy="568800"/>
           </a:xfrm>
           <a:prstGeom prst="rect">
             <a:avLst/>
@@ -1645,175 +1670,68 @@
           </a:ln>
         </p:spPr>
         <p:txBody>
-          <a:bodyPr numCol="1" spcCol="0" lIns="147600" rIns="147600" tIns="73800" bIns="73800" anchor="t">
+          <a:bodyPr numCol="1" spcCol="0" lIns="147600" rIns="147600" tIns="73800" bIns="73800" anchor="ctr">
             <a:noAutofit/>
           </a:bodyPr>
-          <a:p>
-            <a:pPr marL="552600" indent="-552600" defTabSz="1473120">
+          <a:lstStyle>
+            <a:lvl1pPr indent="0" algn="r" defTabSz="1473120">
               <a:lnSpc>
                 <a:spcPct val="100000"/>
               </a:lnSpc>
-              <a:spcBef>
-                <a:spcPts val="1040"/>
-              </a:spcBef>
-              <a:buClr>
-                <a:srgbClr val="000000"/>
-              </a:buClr>
-              <a:buFont typeface="Arial"/>
-              <a:buChar char="•"/>
-            </a:pPr>
-            <a:r>
-              <a:rPr b="0" lang="en-US" sz="5200" spc="-1" strike="noStrike">
-                <a:solidFill>
-                  <a:schemeClr val="dk1"/>
+              <a:buNone/>
+              <a:tabLst>
+                <a:tab algn="l" pos="0"/>
+              </a:tabLst>
+              <a:defRPr b="0" lang="en-US" sz="2000" spc="-1" strike="noStrike">
+                <a:solidFill>
+                  <a:srgbClr val="898989"/>
                 </a:solidFill>
                 <a:latin typeface="Calibri"/>
-              </a:rPr>
-              <a:t>Click to edit Master text styles</a:t>
-            </a:r>
-            <a:endParaRPr b="0" lang="en-US" sz="5200" spc="-1" strike="noStrike">
-              <a:solidFill>
-                <a:schemeClr val="dk1"/>
-              </a:solidFill>
-              <a:latin typeface="Calibri"/>
-            </a:endParaRPr>
-          </a:p>
-          <a:p>
-            <a:pPr lvl="1" marL="1197000" indent="-460440" defTabSz="1473120">
+              </a:defRPr>
+            </a:lvl1pPr>
+          </a:lstStyle>
+          <a:p>
+            <a:pPr indent="0" algn="r" defTabSz="1473120">
               <a:lnSpc>
                 <a:spcPct val="100000"/>
               </a:lnSpc>
-              <a:spcBef>
-                <a:spcPts val="901"/>
-              </a:spcBef>
-              <a:buClr>
-                <a:srgbClr val="000000"/>
-              </a:buClr>
-              <a:buFont typeface="Arial"/>
-              <a:buChar char="–"/>
+              <a:buNone/>
+              <a:tabLst>
+                <a:tab algn="l" pos="0"/>
+              </a:tabLst>
             </a:pPr>
-            <a:r>
-              <a:rPr b="0" lang="en-US" sz="4500" spc="-1" strike="noStrike">
-                <a:solidFill>
-                  <a:schemeClr val="dk1"/>
+            <a:fld id="{A196D86C-A766-41A6-B26E-6C34CACACAA8}" type="slidenum">
+              <a:rPr b="0" lang="en-US" sz="2000" spc="-1" strike="noStrike">
+                <a:solidFill>
+                  <a:srgbClr val="898989"/>
                 </a:solidFill>
                 <a:latin typeface="Calibri"/>
               </a:rPr>
-              <a:t>Second level</a:t>
-            </a:r>
-            <a:endParaRPr b="0" lang="en-US" sz="4500" spc="-1" strike="noStrike">
+              <a:t>&lt;number&gt;</a:t>
+            </a:fld>
+            <a:endParaRPr b="0" lang="en-US" sz="2000" spc="-1" strike="noStrike">
               <a:solidFill>
-                <a:schemeClr val="dk1"/>
+                <a:srgbClr val="000000"/>
               </a:solidFill>
-              <a:latin typeface="Calibri"/>
+              <a:latin typeface="Times New Roman"/>
             </a:endParaRPr>
           </a:p>
-          <a:p>
-            <a:pPr lvl="2" marL="1841400" indent="-368280" defTabSz="1473120">
-              <a:lnSpc>
-                <a:spcPct val="100000"/>
-              </a:lnSpc>
-              <a:spcBef>
-                <a:spcPts val="780"/>
-              </a:spcBef>
-              <a:buClr>
-                <a:srgbClr val="000000"/>
-              </a:buClr>
-              <a:buFont typeface="Arial"/>
-              <a:buChar char="•"/>
-            </a:pPr>
-            <a:r>
-              <a:rPr b="0" lang="en-US" sz="3900" spc="-1" strike="noStrike">
-                <a:solidFill>
-                  <a:schemeClr val="dk1"/>
-                </a:solidFill>
-                <a:latin typeface="Calibri"/>
-              </a:rPr>
-              <a:t>Third level</a:t>
-            </a:r>
-            <a:endParaRPr b="0" lang="en-US" sz="3900" spc="-1" strike="noStrike">
-              <a:solidFill>
-                <a:schemeClr val="dk1"/>
-              </a:solidFill>
-              <a:latin typeface="Calibri"/>
-            </a:endParaRPr>
-          </a:p>
-          <a:p>
-            <a:pPr lvl="3" marL="2579760" indent="-368280" defTabSz="1473120">
-              <a:lnSpc>
-                <a:spcPct val="100000"/>
-              </a:lnSpc>
-              <a:spcBef>
-                <a:spcPts val="641"/>
-              </a:spcBef>
-              <a:buClr>
-                <a:srgbClr val="000000"/>
-              </a:buClr>
-              <a:buFont typeface="Arial"/>
-              <a:buChar char="–"/>
-            </a:pPr>
-            <a:r>
-              <a:rPr b="0" lang="en-US" sz="3200" spc="-1" strike="noStrike">
-                <a:solidFill>
-                  <a:schemeClr val="dk1"/>
-                </a:solidFill>
-                <a:latin typeface="Calibri"/>
-              </a:rPr>
-              <a:t>Fourth level</a:t>
-            </a:r>
-            <a:endParaRPr b="0" lang="en-US" sz="3200" spc="-1" strike="noStrike">
-              <a:solidFill>
-                <a:schemeClr val="dk1"/>
-              </a:solidFill>
-              <a:latin typeface="Calibri"/>
-            </a:endParaRPr>
-          </a:p>
-          <a:p>
-            <a:pPr lvl="4" marL="3316320" indent="-368280" defTabSz="1473120">
-              <a:lnSpc>
-                <a:spcPct val="100000"/>
-              </a:lnSpc>
-              <a:spcBef>
-                <a:spcPts val="641"/>
-              </a:spcBef>
-              <a:buClr>
-                <a:srgbClr val="000000"/>
-              </a:buClr>
-              <a:buFont typeface="Arial"/>
-              <a:buChar char="»"/>
-            </a:pPr>
-            <a:r>
-              <a:rPr b="0" lang="en-US" sz="3200" spc="-1" strike="noStrike">
-                <a:solidFill>
-                  <a:schemeClr val="dk1"/>
-                </a:solidFill>
-                <a:latin typeface="Calibri"/>
-              </a:rPr>
-              <a:t>Fifth level</a:t>
-            </a:r>
-            <a:endParaRPr b="0" lang="en-US" sz="3200" spc="-1" strike="noStrike">
-              <a:solidFill>
-                <a:schemeClr val="dk1"/>
-              </a:solidFill>
-              <a:latin typeface="Calibri"/>
-            </a:endParaRPr>
-          </a:p>
-        </p:txBody>
-      </p:sp>
-      <p:sp>
-        <p:nvSpPr>
-          <p:cNvPr id="55" name="PlaceHolder 3"/>
-          <p:cNvSpPr>
-            <a:spLocks noGrp="1"/>
-          </p:cNvSpPr>
-          <p:nvPr>
-            <p:ph type="body"/>
+        </p:txBody>
+      </p:sp>
+      <p:sp>
+        <p:nvSpPr>
+          <p:cNvPr id="44" name="PlaceHolder 3"/>
+          <p:cNvSpPr>
+            <a:spLocks noGrp="1"/>
+          </p:cNvSpPr>
+          <p:nvPr>
+            <p:ph type="dt" idx="30"/>
           </p:nvPr>
         </p:nvSpPr>
         <p:spPr>
           <a:xfrm>
-            <a:off x="755640" y="2236680"/>
-            <a:ext cx="4972320" cy="7310880"/>
+            <a:off x="755640" y="9906120"/>
+            <a:ext cx="3526200" cy="568800"/>
           </a:xfrm>
           <a:prstGeom prst="rect">
             <a:avLst/>
@@ -1824,139 +1742,11 @@
           </a:ln>
         </p:spPr>
         <p:txBody>
-          <a:bodyPr numCol="1" spcCol="0" lIns="147600" rIns="147600" tIns="73800" bIns="73800" anchor="t">
-            <a:noAutofit/>
-          </a:bodyPr>
-          <a:p>
-            <a:pPr indent="0" defTabSz="1473120">
-              <a:lnSpc>
-                <a:spcPct val="100000"/>
-              </a:lnSpc>
-              <a:spcBef>
-                <a:spcPts val="459"/>
-              </a:spcBef>
-              <a:buNone/>
-              <a:tabLst>
-                <a:tab algn="l" pos="0"/>
-              </a:tabLst>
-            </a:pPr>
-            <a:r>
-              <a:rPr b="0" lang="en-US" sz="2300" spc="-1" strike="noStrike">
-                <a:solidFill>
-                  <a:schemeClr val="dk1"/>
-                </a:solidFill>
-                <a:latin typeface="Calibri"/>
-              </a:rPr>
-              <a:t>Click to edit Master text styles</a:t>
-            </a:r>
-            <a:endParaRPr b="0" lang="en-US" sz="2300" spc="-1" strike="noStrike">
-              <a:solidFill>
-                <a:schemeClr val="dk1"/>
-              </a:solidFill>
-              <a:latin typeface="Calibri"/>
-            </a:endParaRPr>
-          </a:p>
-        </p:txBody>
-      </p:sp>
-      <p:sp>
-        <p:nvSpPr>
-          <p:cNvPr id="56" name="PlaceHolder 4"/>
-          <p:cNvSpPr>
-            <a:spLocks noGrp="1"/>
-          </p:cNvSpPr>
-          <p:nvPr>
-            <p:ph type="dt" idx="28"/>
-          </p:nvPr>
-        </p:nvSpPr>
-        <p:spPr>
-          <a:xfrm>
-            <a:off x="755640" y="9906120"/>
-            <a:ext cx="3526920" cy="569520"/>
-          </a:xfrm>
-          <a:prstGeom prst="rect">
-            <a:avLst/>
-          </a:prstGeom>
-          <a:noFill/>
-          <a:ln w="0">
-            <a:noFill/>
-          </a:ln>
-        </p:spPr>
-        <p:txBody>
           <a:bodyPr lIns="147600" rIns="147600" tIns="73800" bIns="73800" anchor="ctr">
             <a:noAutofit/>
           </a:bodyPr>
           <a:lstStyle>
-            <a:lvl1pPr indent="0" defTabSz="1474200">
-              <a:lnSpc>
-                <a:spcPct val="100000"/>
-              </a:lnSpc>
-              <a:buNone/>
-              <a:defRPr b="0" lang="en-US" sz="2000" spc="-1" strike="noStrike">
-                <a:solidFill>
-                  <a:schemeClr val="dk1">
-                    <a:tint val="75000"/>
-                  </a:schemeClr>
-                </a:solidFill>
-                <a:latin typeface="Calibri"/>
-              </a:defRPr>
-            </a:lvl1pPr>
-          </a:lstStyle>
-          <a:p>
-            <a:pPr indent="0" defTabSz="1474200">
-              <a:lnSpc>
-                <a:spcPct val="100000"/>
-              </a:lnSpc>
-              <a:buNone/>
-            </a:pPr>
-            <a:r>
-              <a:rPr b="0" lang="en-US" sz="2000" spc="-1" strike="noStrike">
-                <a:solidFill>
-                  <a:schemeClr val="dk1">
-                    <a:tint val="75000"/>
-                  </a:schemeClr>
-                </a:solidFill>
-                <a:latin typeface="Calibri"/>
-              </a:rPr>
-              <a:t>&lt;date/time&gt;</a:t>
-            </a:r>
-            <a:endParaRPr b="0" lang="en-US" sz="2000" spc="-1" strike="noStrike">
-              <a:solidFill>
-                <a:srgbClr val="000000"/>
-              </a:solidFill>
-              <a:latin typeface="Times New Roman"/>
-            </a:endParaRPr>
-          </a:p>
-        </p:txBody>
-      </p:sp>
-      <p:sp>
-        <p:nvSpPr>
-          <p:cNvPr id="57" name="PlaceHolder 5"/>
-          <p:cNvSpPr>
-            <a:spLocks noGrp="1"/>
-          </p:cNvSpPr>
-          <p:nvPr>
-            <p:ph type="ftr" idx="29"/>
-          </p:nvPr>
-        </p:nvSpPr>
-        <p:spPr>
-          <a:xfrm>
-            <a:off x="5164200" y="9906120"/>
-            <a:ext cx="4785840" cy="569520"/>
-          </a:xfrm>
-          <a:prstGeom prst="rect">
-            <a:avLst/>
-          </a:prstGeom>
-          <a:noFill/>
-          <a:ln w="0">
-            <a:noFill/>
-          </a:ln>
-        </p:spPr>
-        <p:txBody>
-          <a:bodyPr lIns="147600" rIns="147600" tIns="73800" bIns="73800" anchor="ctr">
-            <a:noAutofit/>
-          </a:bodyPr>
-          <a:lstStyle>
-            <a:lvl1pPr indent="0" algn="ctr">
+            <a:lvl1pPr indent="0">
               <a:buNone/>
               <a:defRPr b="0" lang="en-US" sz="1400" spc="-1" strike="noStrike">
                 <a:solidFill>
@@ -1967,7 +1757,7 @@
             </a:lvl1pPr>
           </a:lstStyle>
           <a:p>
-            <a:pPr indent="0" algn="ctr">
+            <a:pPr indent="0">
               <a:buNone/>
             </a:pPr>
             <a:r>
@@ -1977,75 +1767,9 @@
                 </a:solidFill>
                 <a:latin typeface="Times New Roman"/>
               </a:rPr>
-              <a:t>&lt;footer&gt;</a:t>
+              <a:t>&lt;date/time&gt;</a:t>
             </a:r>
             <a:endParaRPr b="0" lang="en-US" sz="1400" spc="-1" strike="noStrike">
-              <a:solidFill>
-                <a:srgbClr val="000000"/>
-              </a:solidFill>
-              <a:latin typeface="Times New Roman"/>
-            </a:endParaRPr>
-          </a:p>
-        </p:txBody>
-      </p:sp>
-      <p:sp>
-        <p:nvSpPr>
-          <p:cNvPr id="58" name="PlaceHolder 6"/>
-          <p:cNvSpPr>
-            <a:spLocks noGrp="1"/>
-          </p:cNvSpPr>
-          <p:nvPr>
-            <p:ph type="sldNum" idx="30"/>
-          </p:nvPr>
-        </p:nvSpPr>
-        <p:spPr>
-          <a:xfrm>
-            <a:off x="10831680" y="9906120"/>
-            <a:ext cx="3526920" cy="569520"/>
-          </a:xfrm>
-          <a:prstGeom prst="rect">
-            <a:avLst/>
-          </a:prstGeom>
-          <a:noFill/>
-          <a:ln w="0">
-            <a:noFill/>
-          </a:ln>
-        </p:spPr>
-        <p:txBody>
-          <a:bodyPr numCol="1" spcCol="0" lIns="147600" rIns="147600" tIns="73800" bIns="73800" anchor="ctr">
-            <a:noAutofit/>
-          </a:bodyPr>
-          <a:lstStyle>
-            <a:lvl1pPr indent="0" algn="r" defTabSz="1473120">
-              <a:lnSpc>
-                <a:spcPct val="100000"/>
-              </a:lnSpc>
-              <a:buNone/>
-              <a:defRPr b="0" lang="en-US" sz="2000" spc="-1" strike="noStrike">
-                <a:solidFill>
-                  <a:srgbClr val="898989"/>
-                </a:solidFill>
-                <a:latin typeface="Calibri"/>
-              </a:defRPr>
-            </a:lvl1pPr>
-          </a:lstStyle>
-          <a:p>
-            <a:pPr indent="0" algn="r" defTabSz="1473120">
-              <a:lnSpc>
-                <a:spcPct val="100000"/>
-              </a:lnSpc>
-              <a:buNone/>
-            </a:pPr>
-            <a:fld id="{427E4C70-42A6-422C-8AF5-F5F9D2CA98C4}" type="slidenum">
-              <a:rPr b="0" lang="en-US" sz="2000" spc="-1" strike="noStrike">
-                <a:solidFill>
-                  <a:srgbClr val="898989"/>
-                </a:solidFill>
-                <a:latin typeface="Calibri"/>
-              </a:rPr>
-              <a:t>&lt;number&gt;</a:t>
-            </a:fld>
-            <a:endParaRPr b="0" lang="en-US" sz="2000" spc="-1" strike="noStrike">
               <a:solidFill>
                 <a:srgbClr val="000000"/>
               </a:solidFill>
@@ -2089,18 +1813,18 @@
       </p:grpSpPr>
       <p:sp>
         <p:nvSpPr>
-          <p:cNvPr id="59" name="PlaceHolder 1"/>
-          <p:cNvSpPr>
-            <a:spLocks noGrp="1"/>
-          </p:cNvSpPr>
-          <p:nvPr>
-            <p:ph type="title"/>
+          <p:cNvPr id="45" name="PlaceHolder 1"/>
+          <p:cNvSpPr>
+            <a:spLocks noGrp="1"/>
+          </p:cNvSpPr>
+          <p:nvPr>
+            <p:ph type="ftr" idx="31"/>
           </p:nvPr>
         </p:nvSpPr>
         <p:spPr>
           <a:xfrm>
-            <a:off x="2962440" y="7481880"/>
-            <a:ext cx="9068400" cy="883080"/>
+            <a:off x="5164200" y="9906120"/>
+            <a:ext cx="4785120" cy="568800"/>
           </a:xfrm>
           <a:prstGeom prst="rect">
             <a:avLst/>
@@ -2111,48 +1835,68 @@
           </a:ln>
         </p:spPr>
         <p:txBody>
-          <a:bodyPr numCol="1" spcCol="0" lIns="147600" rIns="147600" tIns="73800" bIns="73800" anchor="b">
+          <a:bodyPr lIns="147600" rIns="147600" tIns="73800" bIns="73800" anchor="ctr">
             <a:noAutofit/>
           </a:bodyPr>
-          <a:p>
-            <a:pPr indent="0" defTabSz="1473120">
+          <a:lstStyle>
+            <a:lvl1pPr indent="0" algn="ctr">
               <a:lnSpc>
                 <a:spcPct val="100000"/>
               </a:lnSpc>
               <a:buNone/>
+              <a:tabLst>
+                <a:tab algn="l" pos="0"/>
+              </a:tabLst>
+              <a:defRPr b="0" lang="en-US" sz="1400" spc="-1" strike="noStrike">
+                <a:solidFill>
+                  <a:srgbClr val="000000"/>
+                </a:solidFill>
+                <a:latin typeface="Times New Roman"/>
+              </a:defRPr>
+            </a:lvl1pPr>
+          </a:lstStyle>
+          <a:p>
+            <a:pPr indent="0" algn="ctr">
+              <a:lnSpc>
+                <a:spcPct val="100000"/>
+              </a:lnSpc>
+              <a:buNone/>
+              <a:tabLst>
+                <a:tab algn="l" pos="0"/>
+              </a:tabLst>
             </a:pPr>
             <a:r>
-              <a:rPr b="1" lang="en-US" sz="3200" spc="-1" strike="noStrike">
-                <a:solidFill>
-                  <a:schemeClr val="dk1"/>
-                </a:solidFill>
-                <a:latin typeface="Calibri"/>
+              <a:rPr b="0" lang="en-US" sz="1400" spc="-1" strike="noStrike">
+                <a:solidFill>
+                  <a:srgbClr val="000000"/>
+                </a:solidFill>
+                <a:latin typeface="Times New Roman"/>
               </a:rPr>
-              <a:t>Click to edit Master title style</a:t>
-            </a:r>
-            <a:endParaRPr b="0" lang="en-US" sz="3200" spc="-1" strike="noStrike">
+              <a:t>&lt;footer&gt;</a:t>
+            </a:r>
+            <a:endParaRPr b="0" lang="en-US" sz="1400" spc="-1" strike="noStrike">
               <a:solidFill>
-                <a:schemeClr val="dk1"/>
+                <a:srgbClr val="000000"/>
               </a:solidFill>
-              <a:latin typeface="Calibri"/>
+              <a:latin typeface="Times New Roman"/>
             </a:endParaRPr>
           </a:p>
         </p:txBody>
       </p:sp>
       <p:sp>
         <p:nvSpPr>
-          <p:cNvPr id="60" name="PlaceHolder 2"/>
-          <p:cNvSpPr>
-            <a:spLocks noGrp="1"/>
-          </p:cNvSpPr>
-          <p:nvPr>
-            <p:ph type="body"/>
+          <p:cNvPr id="46" name="PlaceHolder 2"/>
+          <p:cNvSpPr>
+            <a:spLocks noGrp="1"/>
+          </p:cNvSpPr>
+          <p:nvPr>
+            <p:ph type="sldNum" idx="32"/>
           </p:nvPr>
         </p:nvSpPr>
         <p:spPr>
           <a:xfrm>
-            <a:off x="2962440" y="955080"/>
-            <a:ext cx="9068400" cy="6412680"/>
+            <a:off x="10831680" y="9906120"/>
+            <a:ext cx="3526200" cy="568800"/>
           </a:xfrm>
           <a:prstGeom prst="rect">
             <a:avLst/>
@@ -2163,221 +1907,68 @@
           </a:ln>
         </p:spPr>
         <p:txBody>
-          <a:bodyPr lIns="90000" rIns="90000" tIns="45000" bIns="45000" anchor="t">
-            <a:normAutofit fontScale="90406" lnSpcReduction="10000"/>
+          <a:bodyPr numCol="1" spcCol="0" lIns="147600" rIns="147600" tIns="73800" bIns="73800" anchor="ctr">
+            <a:noAutofit/>
           </a:bodyPr>
-          <a:p>
-            <a:pPr marL="432000" indent="-324000">
-              <a:spcBef>
-                <a:spcPts val="1417"/>
-              </a:spcBef>
-              <a:buClr>
-                <a:srgbClr val="000000"/>
-              </a:buClr>
-              <a:buSzPct val="45000"/>
-              <a:buFont typeface="Wingdings" charset="2"/>
-              <a:buChar char=""/>
+          <a:lstStyle>
+            <a:lvl1pPr indent="0" algn="r" defTabSz="1473120">
+              <a:lnSpc>
+                <a:spcPct val="100000"/>
+              </a:lnSpc>
+              <a:buNone/>
+              <a:tabLst>
+                <a:tab algn="l" pos="0"/>
+              </a:tabLst>
+              <a:defRPr b="0" lang="en-US" sz="2000" spc="-1" strike="noStrike">
+                <a:solidFill>
+                  <a:srgbClr val="898989"/>
+                </a:solidFill>
+                <a:latin typeface="Calibri"/>
+              </a:defRPr>
+            </a:lvl1pPr>
+          </a:lstStyle>
+          <a:p>
+            <a:pPr indent="0" algn="r" defTabSz="1473120">
+              <a:lnSpc>
+                <a:spcPct val="100000"/>
+              </a:lnSpc>
+              <a:buNone/>
+              <a:tabLst>
+                <a:tab algn="l" pos="0"/>
+              </a:tabLst>
             </a:pPr>
-            <a:r>
-              <a:rPr b="0" lang="en-US" sz="5200" spc="-1" strike="noStrike">
-                <a:solidFill>
-                  <a:schemeClr val="dk1"/>
+            <a:fld id="{F5B473B2-E3D2-4310-AF68-6846E61B27C8}" type="slidenum">
+              <a:rPr b="0" lang="en-US" sz="2000" spc="-1" strike="noStrike">
+                <a:solidFill>
+                  <a:srgbClr val="898989"/>
                 </a:solidFill>
                 <a:latin typeface="Calibri"/>
               </a:rPr>
-              <a:t>Click to edit the outline text format</a:t>
-            </a:r>
-            <a:endParaRPr b="0" lang="en-US" sz="5200" spc="-1" strike="noStrike">
+              <a:t>&lt;number&gt;</a:t>
+            </a:fld>
+            <a:endParaRPr b="0" lang="en-US" sz="2000" spc="-1" strike="noStrike">
               <a:solidFill>
-                <a:schemeClr val="dk1"/>
+                <a:srgbClr val="000000"/>
               </a:solidFill>
-              <a:latin typeface="Calibri"/>
+              <a:latin typeface="Times New Roman"/>
             </a:endParaRPr>
           </a:p>
-          <a:p>
-            <a:pPr lvl="1" marL="864000" indent="-324000">
-              <a:spcBef>
-                <a:spcPts val="1134"/>
-              </a:spcBef>
-              <a:buClr>
-                <a:srgbClr val="000000"/>
-              </a:buClr>
-              <a:buSzPct val="75000"/>
-              <a:buFont typeface="Symbol" charset="2"/>
-              <a:buChar char=""/>
-            </a:pPr>
-            <a:r>
-              <a:rPr b="0" lang="en-US" sz="5200" spc="-1" strike="noStrike">
-                <a:solidFill>
-                  <a:schemeClr val="dk1"/>
-                </a:solidFill>
-                <a:latin typeface="Calibri"/>
-              </a:rPr>
-              <a:t>Second Outline Level</a:t>
-            </a:r>
-            <a:endParaRPr b="0" lang="en-US" sz="5200" spc="-1" strike="noStrike">
-              <a:solidFill>
-                <a:schemeClr val="dk1"/>
-              </a:solidFill>
-              <a:latin typeface="Calibri"/>
-            </a:endParaRPr>
-          </a:p>
-          <a:p>
-            <a:pPr lvl="2" marL="1296000" indent="-288000">
-              <a:spcBef>
-                <a:spcPts val="850"/>
-              </a:spcBef>
-              <a:buClr>
-                <a:srgbClr val="000000"/>
-              </a:buClr>
-              <a:buSzPct val="45000"/>
-              <a:buFont typeface="Wingdings" charset="2"/>
-              <a:buChar char=""/>
-            </a:pPr>
-            <a:r>
-              <a:rPr b="0" lang="en-US" sz="5200" spc="-1" strike="noStrike">
-                <a:solidFill>
-                  <a:schemeClr val="dk1"/>
-                </a:solidFill>
-                <a:latin typeface="Calibri"/>
-              </a:rPr>
-              <a:t>Third Outline Level</a:t>
-            </a:r>
-            <a:endParaRPr b="0" lang="en-US" sz="5200" spc="-1" strike="noStrike">
-              <a:solidFill>
-                <a:schemeClr val="dk1"/>
-              </a:solidFill>
-              <a:latin typeface="Calibri"/>
-            </a:endParaRPr>
-          </a:p>
-          <a:p>
-            <a:pPr lvl="3" marL="1728000" indent="-216000">
-              <a:spcBef>
-                <a:spcPts val="567"/>
-              </a:spcBef>
-              <a:buClr>
-                <a:srgbClr val="000000"/>
-              </a:buClr>
-              <a:buSzPct val="75000"/>
-              <a:buFont typeface="Symbol" charset="2"/>
-              <a:buChar char=""/>
-            </a:pPr>
-            <a:r>
-              <a:rPr b="0" lang="en-US" sz="5200" spc="-1" strike="noStrike">
-                <a:solidFill>
-                  <a:schemeClr val="dk1"/>
-                </a:solidFill>
-                <a:latin typeface="Calibri"/>
-              </a:rPr>
-              <a:t>Fourth Outline Level</a:t>
-            </a:r>
-            <a:endParaRPr b="0" lang="en-US" sz="5200" spc="-1" strike="noStrike">
-              <a:solidFill>
-                <a:schemeClr val="dk1"/>
-              </a:solidFill>
-              <a:latin typeface="Calibri"/>
-            </a:endParaRPr>
-          </a:p>
-          <a:p>
-            <a:pPr lvl="4" marL="2160000" indent="-216000">
-              <a:spcBef>
-                <a:spcPts val="283"/>
-              </a:spcBef>
-              <a:buClr>
-                <a:srgbClr val="000000"/>
-              </a:buClr>
-              <a:buSzPct val="45000"/>
-              <a:buFont typeface="Wingdings" charset="2"/>
-              <a:buChar char=""/>
-            </a:pPr>
-            <a:r>
-              <a:rPr b="0" lang="en-US" sz="5200" spc="-1" strike="noStrike">
-                <a:solidFill>
-                  <a:schemeClr val="dk1"/>
-                </a:solidFill>
-                <a:latin typeface="Calibri"/>
-              </a:rPr>
-              <a:t>Fifth Outline Level</a:t>
-            </a:r>
-            <a:endParaRPr b="0" lang="en-US" sz="5200" spc="-1" strike="noStrike">
-              <a:solidFill>
-                <a:schemeClr val="dk1"/>
-              </a:solidFill>
-              <a:latin typeface="Calibri"/>
-            </a:endParaRPr>
-          </a:p>
-          <a:p>
-            <a:pPr lvl="5" marL="2592000" indent="-216000">
-              <a:spcBef>
-                <a:spcPts val="283"/>
-              </a:spcBef>
-              <a:buClr>
-                <a:srgbClr val="000000"/>
-              </a:buClr>
-              <a:buSzPct val="45000"/>
-              <a:buFont typeface="Wingdings" charset="2"/>
-              <a:buChar char=""/>
-            </a:pPr>
-            <a:r>
-              <a:rPr b="0" lang="en-US" sz="5200" spc="-1" strike="noStrike">
-                <a:solidFill>
-                  <a:schemeClr val="dk1"/>
-                </a:solidFill>
-                <a:latin typeface="Calibri"/>
-              </a:rPr>
-              <a:t>Sixth Outline Level</a:t>
-            </a:r>
-            <a:endParaRPr b="0" lang="en-US" sz="5200" spc="-1" strike="noStrike">
-              <a:solidFill>
-                <a:schemeClr val="dk1"/>
-              </a:solidFill>
-              <a:latin typeface="Calibri"/>
-            </a:endParaRPr>
-          </a:p>
-          <a:p>
-            <a:pPr lvl="6" marL="3024000" indent="-216000">
-              <a:spcBef>
-                <a:spcPts val="283"/>
-              </a:spcBef>
-              <a:buClr>
-                <a:srgbClr val="000000"/>
-              </a:buClr>
-              <a:buSzPct val="45000"/>
-              <a:buFont typeface="Wingdings" charset="2"/>
-              <a:buChar char=""/>
-            </a:pPr>
-            <a:r>
-              <a:rPr b="0" lang="en-US" sz="5200" spc="-1" strike="noStrike">
-                <a:solidFill>
-                  <a:schemeClr val="dk1"/>
-                </a:solidFill>
-                <a:latin typeface="Calibri"/>
-              </a:rPr>
-              <a:t>Seventh Outline Level</a:t>
-            </a:r>
-            <a:endParaRPr b="0" lang="en-US" sz="5200" spc="-1" strike="noStrike">
-              <a:solidFill>
-                <a:schemeClr val="dk1"/>
-              </a:solidFill>
-              <a:latin typeface="Calibri"/>
-            </a:endParaRPr>
-          </a:p>
-        </p:txBody>
-      </p:sp>
-      <p:sp>
-        <p:nvSpPr>
-          <p:cNvPr id="61" name="PlaceHolder 3"/>
-          <p:cNvSpPr>
-            <a:spLocks noGrp="1"/>
-          </p:cNvSpPr>
-          <p:nvPr>
-            <p:ph type="body"/>
+        </p:txBody>
+      </p:sp>
+      <p:sp>
+        <p:nvSpPr>
+          <p:cNvPr id="47" name="PlaceHolder 3"/>
+          <p:cNvSpPr>
+            <a:spLocks noGrp="1"/>
+          </p:cNvSpPr>
+          <p:nvPr>
+            <p:ph type="dt" idx="33"/>
           </p:nvPr>
         </p:nvSpPr>
         <p:spPr>
           <a:xfrm>
-            <a:off x="2962440" y="8365320"/>
-            <a:ext cx="9068400" cy="1254240"/>
+            <a:off x="755640" y="9906120"/>
+            <a:ext cx="3526200" cy="568800"/>
           </a:xfrm>
           <a:prstGeom prst="rect">
             <a:avLst/>
@@ -2388,139 +1979,11 @@
           </a:ln>
         </p:spPr>
         <p:txBody>
-          <a:bodyPr numCol="1" spcCol="0" lIns="147600" rIns="147600" tIns="73800" bIns="73800" anchor="t">
-            <a:noAutofit/>
-          </a:bodyPr>
-          <a:p>
-            <a:pPr indent="0" defTabSz="1473120">
-              <a:lnSpc>
-                <a:spcPct val="100000"/>
-              </a:lnSpc>
-              <a:spcBef>
-                <a:spcPts val="459"/>
-              </a:spcBef>
-              <a:buNone/>
-              <a:tabLst>
-                <a:tab algn="l" pos="0"/>
-              </a:tabLst>
-            </a:pPr>
-            <a:r>
-              <a:rPr b="0" lang="en-US" sz="2300" spc="-1" strike="noStrike">
-                <a:solidFill>
-                  <a:schemeClr val="dk1"/>
-                </a:solidFill>
-                <a:latin typeface="Calibri"/>
-              </a:rPr>
-              <a:t>Click to edit Master text styles</a:t>
-            </a:r>
-            <a:endParaRPr b="0" lang="en-US" sz="2300" spc="-1" strike="noStrike">
-              <a:solidFill>
-                <a:schemeClr val="dk1"/>
-              </a:solidFill>
-              <a:latin typeface="Calibri"/>
-            </a:endParaRPr>
-          </a:p>
-        </p:txBody>
-      </p:sp>
-      <p:sp>
-        <p:nvSpPr>
-          <p:cNvPr id="62" name="PlaceHolder 4"/>
-          <p:cNvSpPr>
-            <a:spLocks noGrp="1"/>
-          </p:cNvSpPr>
-          <p:nvPr>
-            <p:ph type="dt" idx="31"/>
-          </p:nvPr>
-        </p:nvSpPr>
-        <p:spPr>
-          <a:xfrm>
-            <a:off x="755640" y="9906120"/>
-            <a:ext cx="3526920" cy="569520"/>
-          </a:xfrm>
-          <a:prstGeom prst="rect">
-            <a:avLst/>
-          </a:prstGeom>
-          <a:noFill/>
-          <a:ln w="0">
-            <a:noFill/>
-          </a:ln>
-        </p:spPr>
-        <p:txBody>
           <a:bodyPr lIns="147600" rIns="147600" tIns="73800" bIns="73800" anchor="ctr">
             <a:noAutofit/>
           </a:bodyPr>
           <a:lstStyle>
-            <a:lvl1pPr indent="0" defTabSz="1474200">
-              <a:lnSpc>
-                <a:spcPct val="100000"/>
-              </a:lnSpc>
-              <a:buNone/>
-              <a:defRPr b="0" lang="en-US" sz="2000" spc="-1" strike="noStrike">
-                <a:solidFill>
-                  <a:schemeClr val="dk1">
-                    <a:tint val="75000"/>
-                  </a:schemeClr>
-                </a:solidFill>
-                <a:latin typeface="Calibri"/>
-              </a:defRPr>
-            </a:lvl1pPr>
-          </a:lstStyle>
-          <a:p>
-            <a:pPr indent="0" defTabSz="1474200">
-              <a:lnSpc>
-                <a:spcPct val="100000"/>
-              </a:lnSpc>
-              <a:buNone/>
-            </a:pPr>
-            <a:r>
-              <a:rPr b="0" lang="en-US" sz="2000" spc="-1" strike="noStrike">
-                <a:solidFill>
-                  <a:schemeClr val="dk1">
-                    <a:tint val="75000"/>
-                  </a:schemeClr>
-                </a:solidFill>
-                <a:latin typeface="Calibri"/>
-              </a:rPr>
-              <a:t>&lt;date/time&gt;</a:t>
-            </a:r>
-            <a:endParaRPr b="0" lang="en-US" sz="2000" spc="-1" strike="noStrike">
-              <a:solidFill>
-                <a:srgbClr val="000000"/>
-              </a:solidFill>
-              <a:latin typeface="Times New Roman"/>
-            </a:endParaRPr>
-          </a:p>
-        </p:txBody>
-      </p:sp>
-      <p:sp>
-        <p:nvSpPr>
-          <p:cNvPr id="63" name="PlaceHolder 5"/>
-          <p:cNvSpPr>
-            <a:spLocks noGrp="1"/>
-          </p:cNvSpPr>
-          <p:nvPr>
-            <p:ph type="ftr" idx="32"/>
-          </p:nvPr>
-        </p:nvSpPr>
-        <p:spPr>
-          <a:xfrm>
-            <a:off x="5164200" y="9906120"/>
-            <a:ext cx="4785840" cy="569520"/>
-          </a:xfrm>
-          <a:prstGeom prst="rect">
-            <a:avLst/>
-          </a:prstGeom>
-          <a:noFill/>
-          <a:ln w="0">
-            <a:noFill/>
-          </a:ln>
-        </p:spPr>
-        <p:txBody>
-          <a:bodyPr lIns="147600" rIns="147600" tIns="73800" bIns="73800" anchor="ctr">
-            <a:noAutofit/>
-          </a:bodyPr>
-          <a:lstStyle>
-            <a:lvl1pPr indent="0" algn="ctr">
+            <a:lvl1pPr indent="0">
               <a:buNone/>
               <a:defRPr b="0" lang="en-US" sz="1400" spc="-1" strike="noStrike">
                 <a:solidFill>
@@ -2531,7 +1994,7 @@
             </a:lvl1pPr>
           </a:lstStyle>
           <a:p>
-            <a:pPr indent="0" algn="ctr">
+            <a:pPr indent="0">
               <a:buNone/>
             </a:pPr>
             <a:r>
@@ -2541,75 +2004,9 @@
                 </a:solidFill>
                 <a:latin typeface="Times New Roman"/>
               </a:rPr>
-              <a:t>&lt;footer&gt;</a:t>
+              <a:t>&lt;date/time&gt;</a:t>
             </a:r>
             <a:endParaRPr b="0" lang="en-US" sz="1400" spc="-1" strike="noStrike">
-              <a:solidFill>
-                <a:srgbClr val="000000"/>
-              </a:solidFill>
-              <a:latin typeface="Times New Roman"/>
-            </a:endParaRPr>
-          </a:p>
-        </p:txBody>
-      </p:sp>
-      <p:sp>
-        <p:nvSpPr>
-          <p:cNvPr id="64" name="PlaceHolder 6"/>
-          <p:cNvSpPr>
-            <a:spLocks noGrp="1"/>
-          </p:cNvSpPr>
-          <p:nvPr>
-            <p:ph type="sldNum" idx="33"/>
-          </p:nvPr>
-        </p:nvSpPr>
-        <p:spPr>
-          <a:xfrm>
-            <a:off x="10831680" y="9906120"/>
-            <a:ext cx="3526920" cy="569520"/>
-          </a:xfrm>
-          <a:prstGeom prst="rect">
-            <a:avLst/>
-          </a:prstGeom>
-          <a:noFill/>
-          <a:ln w="0">
-            <a:noFill/>
-          </a:ln>
-        </p:spPr>
-        <p:txBody>
-          <a:bodyPr numCol="1" spcCol="0" lIns="147600" rIns="147600" tIns="73800" bIns="73800" anchor="ctr">
-            <a:noAutofit/>
-          </a:bodyPr>
-          <a:lstStyle>
-            <a:lvl1pPr indent="0" algn="r" defTabSz="1473120">
-              <a:lnSpc>
-                <a:spcPct val="100000"/>
-              </a:lnSpc>
-              <a:buNone/>
-              <a:defRPr b="0" lang="en-US" sz="2000" spc="-1" strike="noStrike">
-                <a:solidFill>
-                  <a:srgbClr val="898989"/>
-                </a:solidFill>
-                <a:latin typeface="Calibri"/>
-              </a:defRPr>
-            </a:lvl1pPr>
-          </a:lstStyle>
-          <a:p>
-            <a:pPr indent="0" algn="r" defTabSz="1473120">
-              <a:lnSpc>
-                <a:spcPct val="100000"/>
-              </a:lnSpc>
-              <a:buNone/>
-            </a:pPr>
-            <a:fld id="{C735CC68-83CC-4DC5-8954-5E3090DCD840}" type="slidenum">
-              <a:rPr b="0" lang="en-US" sz="2000" spc="-1" strike="noStrike">
-                <a:solidFill>
-                  <a:srgbClr val="898989"/>
-                </a:solidFill>
-                <a:latin typeface="Calibri"/>
-              </a:rPr>
-              <a:t>&lt;number&gt;</a:t>
-            </a:fld>
-            <a:endParaRPr b="0" lang="en-US" sz="2000" spc="-1" strike="noStrike">
               <a:solidFill>
                 <a:srgbClr val="000000"/>
               </a:solidFill>
@@ -2658,13 +2055,13 @@
             <a:spLocks noGrp="1"/>
           </p:cNvSpPr>
           <p:nvPr>
-            <p:ph type="title"/>
+            <p:ph type="ftr" idx="4"/>
           </p:nvPr>
         </p:nvSpPr>
         <p:spPr>
           <a:xfrm>
-            <a:off x="755640" y="428760"/>
-            <a:ext cx="13602960" cy="1780920"/>
+            <a:off x="5164200" y="9906120"/>
+            <a:ext cx="4785120" cy="568800"/>
           </a:xfrm>
           <a:prstGeom prst="rect">
             <a:avLst/>
@@ -2675,30 +2072,50 @@
           </a:ln>
         </p:spPr>
         <p:txBody>
-          <a:bodyPr numCol="1" spcCol="0" lIns="147600" rIns="147600" tIns="73800" bIns="73800" anchor="ctr">
+          <a:bodyPr lIns="147600" rIns="147600" tIns="73800" bIns="73800" anchor="ctr">
             <a:noAutofit/>
           </a:bodyPr>
-          <a:p>
-            <a:pPr indent="0" algn="ctr" defTabSz="1473120">
+          <a:lstStyle>
+            <a:lvl1pPr indent="0" algn="ctr">
               <a:lnSpc>
                 <a:spcPct val="100000"/>
               </a:lnSpc>
               <a:buNone/>
+              <a:tabLst>
+                <a:tab algn="l" pos="0"/>
+              </a:tabLst>
+              <a:defRPr b="0" lang="en-US" sz="1400" spc="-1" strike="noStrike">
+                <a:solidFill>
+                  <a:srgbClr val="000000"/>
+                </a:solidFill>
+                <a:latin typeface="Times New Roman"/>
+              </a:defRPr>
+            </a:lvl1pPr>
+          </a:lstStyle>
+          <a:p>
+            <a:pPr indent="0" algn="ctr">
+              <a:lnSpc>
+                <a:spcPct val="100000"/>
+              </a:lnSpc>
+              <a:buNone/>
+              <a:tabLst>
+                <a:tab algn="l" pos="0"/>
+              </a:tabLst>
             </a:pPr>
             <a:r>
-              <a:rPr b="0" lang="en-US" sz="7100" spc="-1" strike="noStrike">
-                <a:solidFill>
-                  <a:schemeClr val="dk1"/>
-                </a:solidFill>
-                <a:latin typeface="Calibri"/>
+              <a:rPr b="0" lang="en-US" sz="1400" spc="-1" strike="noStrike">
+                <a:solidFill>
+                  <a:srgbClr val="000000"/>
+                </a:solidFill>
+                <a:latin typeface="Times New Roman"/>
               </a:rPr>
-              <a:t>Click to edit Master title style</a:t>
-            </a:r>
-            <a:endParaRPr b="0" lang="en-US" sz="7100" spc="-1" strike="noStrike">
+              <a:t>&lt;footer&gt;</a:t>
+            </a:r>
+            <a:endParaRPr b="0" lang="en-US" sz="1400" spc="-1" strike="noStrike">
               <a:solidFill>
-                <a:schemeClr val="dk1"/>
+                <a:srgbClr val="000000"/>
               </a:solidFill>
-              <a:latin typeface="Calibri"/>
+              <a:latin typeface="Times New Roman"/>
             </a:endParaRPr>
           </a:p>
         </p:txBody>
@@ -2710,13 +2127,13 @@
             <a:spLocks noGrp="1"/>
           </p:cNvSpPr>
           <p:nvPr>
-            <p:ph type="body"/>
+            <p:ph type="sldNum" idx="5"/>
           </p:nvPr>
         </p:nvSpPr>
         <p:spPr>
           <a:xfrm>
-            <a:off x="755640" y="2494080"/>
-            <a:ext cx="13602960" cy="7054560"/>
+            <a:off x="10831680" y="9906120"/>
+            <a:ext cx="3526200" cy="568800"/>
           </a:xfrm>
           <a:prstGeom prst="rect">
             <a:avLst/>
@@ -2727,159 +2144,52 @@
           </a:ln>
         </p:spPr>
         <p:txBody>
-          <a:bodyPr numCol="1" spcCol="0" lIns="147600" rIns="147600" tIns="73800" bIns="73800" anchor="t" vert="eaVert">
+          <a:bodyPr numCol="1" spcCol="0" lIns="147600" rIns="147600" tIns="73800" bIns="73800" anchor="ctr">
             <a:noAutofit/>
           </a:bodyPr>
-          <a:p>
-            <a:pPr marL="552600" indent="-552600" defTabSz="1473120">
+          <a:lstStyle>
+            <a:lvl1pPr indent="0" algn="r" defTabSz="1473120">
               <a:lnSpc>
                 <a:spcPct val="100000"/>
               </a:lnSpc>
-              <a:spcBef>
-                <a:spcPts val="1040"/>
-              </a:spcBef>
-              <a:buClr>
-                <a:srgbClr val="000000"/>
-              </a:buClr>
-              <a:buFont typeface="Arial"/>
-              <a:buChar char="•"/>
-            </a:pPr>
-            <a:r>
-              <a:rPr b="0" lang="en-US" sz="5200" spc="-1" strike="noStrike">
-                <a:solidFill>
-                  <a:schemeClr val="dk1"/>
+              <a:buNone/>
+              <a:tabLst>
+                <a:tab algn="l" pos="0"/>
+              </a:tabLst>
+              <a:defRPr b="0" lang="en-US" sz="2000" spc="-1" strike="noStrike">
+                <a:solidFill>
+                  <a:srgbClr val="898989"/>
                 </a:solidFill>
                 <a:latin typeface="Calibri"/>
-              </a:rPr>
-              <a:t>Click to edit Master text styles</a:t>
-            </a:r>
-            <a:endParaRPr b="0" lang="en-US" sz="5200" spc="-1" strike="noStrike">
-              <a:solidFill>
-                <a:schemeClr val="dk1"/>
-              </a:solidFill>
-              <a:latin typeface="Calibri"/>
-            </a:endParaRPr>
-          </a:p>
-          <a:p>
-            <a:pPr lvl="1" marL="1197000" indent="-460440" defTabSz="1473120">
+              </a:defRPr>
+            </a:lvl1pPr>
+          </a:lstStyle>
+          <a:p>
+            <a:pPr indent="0" algn="r" defTabSz="1473120">
               <a:lnSpc>
                 <a:spcPct val="100000"/>
               </a:lnSpc>
-              <a:spcBef>
-                <a:spcPts val="901"/>
-              </a:spcBef>
-              <a:buClr>
-                <a:srgbClr val="000000"/>
-              </a:buClr>
-              <a:buFont typeface="Arial"/>
-              <a:buChar char="–"/>
+              <a:buNone/>
+              <a:tabLst>
+                <a:tab algn="l" pos="0"/>
+              </a:tabLst>
             </a:pPr>
-            <a:r>
-              <a:rPr b="0" lang="en-US" sz="4500" spc="-1" strike="noStrike">
-                <a:solidFill>
-                  <a:schemeClr val="dk1"/>
+            <a:fld id="{6B8314E0-2857-4C9F-BCEA-89A73DA3E0A1}" type="slidenum">
+              <a:rPr b="0" lang="en-US" sz="2000" spc="-1" strike="noStrike">
+                <a:solidFill>
+                  <a:srgbClr val="898989"/>
                 </a:solidFill>
                 <a:latin typeface="Calibri"/>
               </a:rPr>
-              <a:t>Second level</a:t>
-            </a:r>
-            <a:endParaRPr b="0" lang="en-US" sz="4500" spc="-1" strike="noStrike">
+              <a:t>&lt;number&gt;</a:t>
+            </a:fld>
+            <a:endParaRPr b="0" lang="en-US" sz="2000" spc="-1" strike="noStrike">
               <a:solidFill>
-                <a:schemeClr val="dk1"/>
+                <a:srgbClr val="000000"/>
               </a:solidFill>
-              <a:latin typeface="Calibri"/>
+              <a:latin typeface="Times New Roman"/>
             </a:endParaRPr>
           </a:p>
-          <a:p>
-            <a:pPr lvl="2" marL="1841400" indent="-368280" defTabSz="1473120">
-              <a:lnSpc>
-                <a:spcPct val="100000"/>
-              </a:lnSpc>
-              <a:spcBef>
-                <a:spcPts val="780"/>
-              </a:spcBef>
-              <a:buClr>
-                <a:srgbClr val="000000"/>
-              </a:buClr>
-              <a:buFont typeface="Arial"/>
-              <a:buChar char="•"/>
-            </a:pPr>
-            <a:r>
-              <a:rPr b="0" lang="en-US" sz="3900" spc="-1" strike="noStrike">
-                <a:solidFill>
-                  <a:schemeClr val="dk1"/>
-                </a:solidFill>
-                <a:latin typeface="Calibri"/>
-              </a:rPr>
-              <a:t>Third level</a:t>
-            </a:r>
-            <a:endParaRPr b="0" lang="en-US" sz="3900" spc="-1" strike="noStrike">
-              <a:solidFill>
-                <a:schemeClr val="dk1"/>
-              </a:solidFill>
-              <a:latin typeface="Calibri"/>
-            </a:endParaRPr>
-          </a:p>
-          <a:p>
-            <a:pPr lvl="3" marL="2579760" indent="-368280" defTabSz="1473120">
-              <a:lnSpc>
-                <a:spcPct val="100000"/>
-              </a:lnSpc>
-              <a:spcBef>
-                <a:spcPts val="641"/>
-              </a:spcBef>
-              <a:buClr>
-                <a:srgbClr val="000000"/>
-              </a:buClr>
-              <a:buFont typeface="Arial"/>
-              <a:buChar char="–"/>
-            </a:pPr>
-            <a:r>
-              <a:rPr b="0" lang="en-US" sz="3200" spc="-1" strike="noStrike">
-                <a:solidFill>
-                  <a:schemeClr val="dk1"/>
-                </a:solidFill>
-                <a:latin typeface="Calibri"/>
-              </a:rPr>
-              <a:t>Fourth level</a:t>
-            </a:r>
-            <a:endParaRPr b="0" lang="en-US" sz="3200" spc="-1" strike="noStrike">
-              <a:solidFill>
-                <a:schemeClr val="dk1"/>
-              </a:solidFill>
-              <a:latin typeface="Calibri"/>
-            </a:endParaRPr>
-          </a:p>
-          <a:p>
-            <a:pPr lvl="4" marL="3316320" indent="-368280" defTabSz="1473120">
-              <a:lnSpc>
-                <a:spcPct val="100000"/>
-              </a:lnSpc>
-              <a:spcBef>
-                <a:spcPts val="641"/>
-              </a:spcBef>
-              <a:buClr>
-                <a:srgbClr val="000000"/>
-              </a:buClr>
-              <a:buFont typeface="Arial"/>
-              <a:buChar char="»"/>
-            </a:pPr>
-            <a:r>
-              <a:rPr b="0" lang="en-US" sz="3200" spc="-1" strike="noStrike">
-                <a:solidFill>
-                  <a:schemeClr val="dk1"/>
-                </a:solidFill>
-                <a:latin typeface="Calibri"/>
-              </a:rPr>
-              <a:t>Fifth level</a:t>
-            </a:r>
-            <a:endParaRPr b="0" lang="en-US" sz="3200" spc="-1" strike="noStrike">
-              <a:solidFill>
-                <a:schemeClr val="dk1"/>
-              </a:solidFill>
-              <a:latin typeface="Calibri"/>
-            </a:endParaRPr>
-          </a:p>
         </p:txBody>
       </p:sp>
       <p:sp>
@@ -2889,13 +2199,13 @@
             <a:spLocks noGrp="1"/>
           </p:cNvSpPr>
           <p:nvPr>
-            <p:ph type="dt" idx="4"/>
+            <p:ph type="dt" idx="6"/>
           </p:nvPr>
         </p:nvSpPr>
         <p:spPr>
           <a:xfrm>
             <a:off x="755640" y="9906120"/>
-            <a:ext cx="3526920" cy="569520"/>
+            <a:ext cx="3526200" cy="568800"/>
           </a:xfrm>
           <a:prstGeom prst="rect">
             <a:avLst/>
@@ -2910,77 +2220,7 @@
             <a:noAutofit/>
           </a:bodyPr>
           <a:lstStyle>
-            <a:lvl1pPr indent="0" defTabSz="1474200">
-              <a:lnSpc>
-                <a:spcPct val="100000"/>
-              </a:lnSpc>
-              <a:buNone/>
-              <a:defRPr b="0" lang="en-US" sz="2000" spc="-1" strike="noStrike">
-                <a:solidFill>
-                  <a:schemeClr val="dk1">
-                    <a:tint val="75000"/>
-                  </a:schemeClr>
-                </a:solidFill>
-                <a:latin typeface="Calibri"/>
-              </a:defRPr>
-            </a:lvl1pPr>
-          </a:lstStyle>
-          <a:p>
-            <a:pPr indent="0" defTabSz="1474200">
-              <a:lnSpc>
-                <a:spcPct val="100000"/>
-              </a:lnSpc>
-              <a:buNone/>
-            </a:pPr>
-            <a:r>
-              <a:rPr b="0" lang="en-US" sz="2000" spc="-1" strike="noStrike">
-                <a:solidFill>
-                  <a:schemeClr val="dk1">
-                    <a:tint val="75000"/>
-                  </a:schemeClr>
-                </a:solidFill>
-                <a:latin typeface="Calibri"/>
-              </a:rPr>
-              <a:t>&lt;date/time&gt;</a:t>
-            </a:r>
-            <a:endParaRPr b="0" lang="en-US" sz="2000" spc="-1" strike="noStrike">
-              <a:solidFill>
-                <a:srgbClr val="000000"/>
-              </a:solidFill>
-              <a:latin typeface="Times New Roman"/>
-            </a:endParaRPr>
-          </a:p>
-        </p:txBody>
-      </p:sp>
-      <p:sp>
-        <p:nvSpPr>
-          <p:cNvPr id="9" name="PlaceHolder 4"/>
-          <p:cNvSpPr>
-            <a:spLocks noGrp="1"/>
-          </p:cNvSpPr>
-          <p:nvPr>
-            <p:ph type="ftr" idx="5"/>
-          </p:nvPr>
-        </p:nvSpPr>
-        <p:spPr>
-          <a:xfrm>
-            <a:off x="5164200" y="9906120"/>
-            <a:ext cx="4785840" cy="569520"/>
-          </a:xfrm>
-          <a:prstGeom prst="rect">
-            <a:avLst/>
-          </a:prstGeom>
-          <a:noFill/>
-          <a:ln w="0">
-            <a:noFill/>
-          </a:ln>
-        </p:spPr>
-        <p:txBody>
-          <a:bodyPr lIns="147600" rIns="147600" tIns="73800" bIns="73800" anchor="ctr">
-            <a:noAutofit/>
-          </a:bodyPr>
-          <a:lstStyle>
-            <a:lvl1pPr indent="0" algn="ctr">
+            <a:lvl1pPr indent="0">
               <a:buNone/>
               <a:defRPr b="0" lang="en-US" sz="1400" spc="-1" strike="noStrike">
                 <a:solidFill>
@@ -2991,7 +2231,7 @@
             </a:lvl1pPr>
           </a:lstStyle>
           <a:p>
-            <a:pPr indent="0" algn="ctr">
+            <a:pPr indent="0">
               <a:buNone/>
             </a:pPr>
             <a:r>
@@ -3001,75 +2241,9 @@
                 </a:solidFill>
                 <a:latin typeface="Times New Roman"/>
               </a:rPr>
-              <a:t>&lt;footer&gt;</a:t>
+              <a:t>&lt;date/time&gt;</a:t>
             </a:r>
             <a:endParaRPr b="0" lang="en-US" sz="1400" spc="-1" strike="noStrike">
-              <a:solidFill>
-                <a:srgbClr val="000000"/>
-              </a:solidFill>
-              <a:latin typeface="Times New Roman"/>
-            </a:endParaRPr>
-          </a:p>
-        </p:txBody>
-      </p:sp>
-      <p:sp>
-        <p:nvSpPr>
-          <p:cNvPr id="10" name="PlaceHolder 5"/>
-          <p:cNvSpPr>
-            <a:spLocks noGrp="1"/>
-          </p:cNvSpPr>
-          <p:nvPr>
-            <p:ph type="sldNum" idx="6"/>
-          </p:nvPr>
-        </p:nvSpPr>
-        <p:spPr>
-          <a:xfrm>
-            <a:off x="10831680" y="9906120"/>
-            <a:ext cx="3526920" cy="569520"/>
-          </a:xfrm>
-          <a:prstGeom prst="rect">
-            <a:avLst/>
-          </a:prstGeom>
-          <a:noFill/>
-          <a:ln w="0">
-            <a:noFill/>
-          </a:ln>
-        </p:spPr>
-        <p:txBody>
-          <a:bodyPr numCol="1" spcCol="0" lIns="147600" rIns="147600" tIns="73800" bIns="73800" anchor="ctr">
-            <a:noAutofit/>
-          </a:bodyPr>
-          <a:lstStyle>
-            <a:lvl1pPr indent="0" algn="r" defTabSz="1473120">
-              <a:lnSpc>
-                <a:spcPct val="100000"/>
-              </a:lnSpc>
-              <a:buNone/>
-              <a:defRPr b="0" lang="en-US" sz="2000" spc="-1" strike="noStrike">
-                <a:solidFill>
-                  <a:srgbClr val="898989"/>
-                </a:solidFill>
-                <a:latin typeface="Calibri"/>
-              </a:defRPr>
-            </a:lvl1pPr>
-          </a:lstStyle>
-          <a:p>
-            <a:pPr indent="0" algn="r" defTabSz="1473120">
-              <a:lnSpc>
-                <a:spcPct val="100000"/>
-              </a:lnSpc>
-              <a:buNone/>
-            </a:pPr>
-            <a:fld id="{000CFB28-7E20-4BA4-A7C8-A5A43B47E5F4}" type="slidenum">
-              <a:rPr b="0" lang="en-US" sz="2000" spc="-1" strike="noStrike">
-                <a:solidFill>
-                  <a:srgbClr val="898989"/>
-                </a:solidFill>
-                <a:latin typeface="Calibri"/>
-              </a:rPr>
-              <a:t>&lt;number&gt;</a:t>
-            </a:fld>
-            <a:endParaRPr b="0" lang="en-US" sz="2000" spc="-1" strike="noStrike">
               <a:solidFill>
                 <a:srgbClr val="000000"/>
               </a:solidFill>
@@ -3113,18 +2287,18 @@
       </p:grpSpPr>
       <p:sp>
         <p:nvSpPr>
-          <p:cNvPr id="11" name="PlaceHolder 1"/>
-          <p:cNvSpPr>
-            <a:spLocks noGrp="1"/>
-          </p:cNvSpPr>
-          <p:nvPr>
-            <p:ph type="title"/>
+          <p:cNvPr id="9" name="PlaceHolder 1"/>
+          <p:cNvSpPr>
+            <a:spLocks noGrp="1"/>
+          </p:cNvSpPr>
+          <p:nvPr>
+            <p:ph type="ftr" idx="7"/>
           </p:nvPr>
         </p:nvSpPr>
         <p:spPr>
           <a:xfrm>
-            <a:off x="10958040" y="428040"/>
-            <a:ext cx="3400560" cy="9119520"/>
+            <a:off x="5164200" y="9906120"/>
+            <a:ext cx="4785120" cy="568800"/>
           </a:xfrm>
           <a:prstGeom prst="rect">
             <a:avLst/>
@@ -3135,48 +2309,68 @@
           </a:ln>
         </p:spPr>
         <p:txBody>
-          <a:bodyPr numCol="1" spcCol="0" lIns="147600" rIns="147600" tIns="73800" bIns="73800" anchor="ctr" vert="eaVert">
+          <a:bodyPr lIns="147600" rIns="147600" tIns="73800" bIns="73800" anchor="ctr">
             <a:noAutofit/>
           </a:bodyPr>
-          <a:p>
-            <a:pPr indent="0" algn="ctr" defTabSz="1473120">
+          <a:lstStyle>
+            <a:lvl1pPr indent="0" algn="ctr">
               <a:lnSpc>
                 <a:spcPct val="100000"/>
               </a:lnSpc>
               <a:buNone/>
+              <a:tabLst>
+                <a:tab algn="l" pos="0"/>
+              </a:tabLst>
+              <a:defRPr b="0" lang="en-US" sz="1400" spc="-1" strike="noStrike">
+                <a:solidFill>
+                  <a:srgbClr val="000000"/>
+                </a:solidFill>
+                <a:latin typeface="Times New Roman"/>
+              </a:defRPr>
+            </a:lvl1pPr>
+          </a:lstStyle>
+          <a:p>
+            <a:pPr indent="0" algn="ctr">
+              <a:lnSpc>
+                <a:spcPct val="100000"/>
+              </a:lnSpc>
+              <a:buNone/>
+              <a:tabLst>
+                <a:tab algn="l" pos="0"/>
+              </a:tabLst>
             </a:pPr>
             <a:r>
-              <a:rPr b="0" lang="en-US" sz="7100" spc="-1" strike="noStrike">
-                <a:solidFill>
-                  <a:schemeClr val="dk1"/>
-                </a:solidFill>
-                <a:latin typeface="Calibri"/>
+              <a:rPr b="0" lang="en-US" sz="1400" spc="-1" strike="noStrike">
+                <a:solidFill>
+                  <a:srgbClr val="000000"/>
+                </a:solidFill>
+                <a:latin typeface="Times New Roman"/>
               </a:rPr>
-              <a:t>Click to edit Master title style</a:t>
-            </a:r>
-            <a:endParaRPr b="0" lang="en-US" sz="7100" spc="-1" strike="noStrike">
+              <a:t>&lt;footer&gt;</a:t>
+            </a:r>
+            <a:endParaRPr b="0" lang="en-US" sz="1400" spc="-1" strike="noStrike">
               <a:solidFill>
-                <a:schemeClr val="dk1"/>
+                <a:srgbClr val="000000"/>
               </a:solidFill>
-              <a:latin typeface="Calibri"/>
+              <a:latin typeface="Times New Roman"/>
             </a:endParaRPr>
           </a:p>
         </p:txBody>
       </p:sp>
       <p:sp>
         <p:nvSpPr>
-          <p:cNvPr id="12" name="PlaceHolder 2"/>
-          <p:cNvSpPr>
-            <a:spLocks noGrp="1"/>
-          </p:cNvSpPr>
-          <p:nvPr>
-            <p:ph type="body"/>
+          <p:cNvPr id="10" name="PlaceHolder 2"/>
+          <p:cNvSpPr>
+            <a:spLocks noGrp="1"/>
+          </p:cNvSpPr>
+          <p:nvPr>
+            <p:ph type="sldNum" idx="8"/>
           </p:nvPr>
         </p:nvSpPr>
         <p:spPr>
           <a:xfrm>
-            <a:off x="755640" y="428040"/>
-            <a:ext cx="9950040" cy="9119520"/>
+            <a:off x="10831680" y="9906120"/>
+            <a:ext cx="3526200" cy="568800"/>
           </a:xfrm>
           <a:prstGeom prst="rect">
             <a:avLst/>
@@ -3187,175 +2381,68 @@
           </a:ln>
         </p:spPr>
         <p:txBody>
-          <a:bodyPr numCol="1" spcCol="0" lIns="147600" rIns="147600" tIns="73800" bIns="73800" anchor="t" vert="eaVert">
+          <a:bodyPr numCol="1" spcCol="0" lIns="147600" rIns="147600" tIns="73800" bIns="73800" anchor="ctr">
             <a:noAutofit/>
           </a:bodyPr>
-          <a:p>
-            <a:pPr marL="552600" indent="-552600" defTabSz="1473120">
+          <a:lstStyle>
+            <a:lvl1pPr indent="0" algn="r" defTabSz="1473120">
               <a:lnSpc>
                 <a:spcPct val="100000"/>
               </a:lnSpc>
-              <a:spcBef>
-                <a:spcPts val="1040"/>
-              </a:spcBef>
-              <a:buClr>
-                <a:srgbClr val="000000"/>
-              </a:buClr>
-              <a:buFont typeface="Arial"/>
-              <a:buChar char="•"/>
-            </a:pPr>
-            <a:r>
-              <a:rPr b="0" lang="en-US" sz="5200" spc="-1" strike="noStrike">
-                <a:solidFill>
-                  <a:schemeClr val="dk1"/>
+              <a:buNone/>
+              <a:tabLst>
+                <a:tab algn="l" pos="0"/>
+              </a:tabLst>
+              <a:defRPr b="0" lang="en-US" sz="2000" spc="-1" strike="noStrike">
+                <a:solidFill>
+                  <a:srgbClr val="898989"/>
                 </a:solidFill>
                 <a:latin typeface="Calibri"/>
-              </a:rPr>
-              <a:t>Click to edit Master text styles</a:t>
-            </a:r>
-            <a:endParaRPr b="0" lang="en-US" sz="5200" spc="-1" strike="noStrike">
-              <a:solidFill>
-                <a:schemeClr val="dk1"/>
-              </a:solidFill>
-              <a:latin typeface="Calibri"/>
-            </a:endParaRPr>
-          </a:p>
-          <a:p>
-            <a:pPr lvl="1" marL="1197000" indent="-460440" defTabSz="1473120">
+              </a:defRPr>
+            </a:lvl1pPr>
+          </a:lstStyle>
+          <a:p>
+            <a:pPr indent="0" algn="r" defTabSz="1473120">
               <a:lnSpc>
                 <a:spcPct val="100000"/>
               </a:lnSpc>
-              <a:spcBef>
-                <a:spcPts val="901"/>
-              </a:spcBef>
-              <a:buClr>
-                <a:srgbClr val="000000"/>
-              </a:buClr>
-              <a:buFont typeface="Arial"/>
-              <a:buChar char="–"/>
+              <a:buNone/>
+              <a:tabLst>
+                <a:tab algn="l" pos="0"/>
+              </a:tabLst>
             </a:pPr>
-            <a:r>
-              <a:rPr b="0" lang="en-US" sz="4500" spc="-1" strike="noStrike">
-                <a:solidFill>
-                  <a:schemeClr val="dk1"/>
+            <a:fld id="{2C2D3701-1243-4EB2-8567-F5F2E65A7D06}" type="slidenum">
+              <a:rPr b="0" lang="en-US" sz="2000" spc="-1" strike="noStrike">
+                <a:solidFill>
+                  <a:srgbClr val="898989"/>
                 </a:solidFill>
                 <a:latin typeface="Calibri"/>
               </a:rPr>
-              <a:t>Second level</a:t>
-            </a:r>
-            <a:endParaRPr b="0" lang="en-US" sz="4500" spc="-1" strike="noStrike">
+              <a:t>&lt;number&gt;</a:t>
+            </a:fld>
+            <a:endParaRPr b="0" lang="en-US" sz="2000" spc="-1" strike="noStrike">
               <a:solidFill>
-                <a:schemeClr val="dk1"/>
+                <a:srgbClr val="000000"/>
               </a:solidFill>
-              <a:latin typeface="Calibri"/>
+              <a:latin typeface="Times New Roman"/>
             </a:endParaRPr>
           </a:p>
-          <a:p>
-            <a:pPr lvl="2" marL="1841400" indent="-368280" defTabSz="1473120">
-              <a:lnSpc>
-                <a:spcPct val="100000"/>
-              </a:lnSpc>
-              <a:spcBef>
-                <a:spcPts val="780"/>
-              </a:spcBef>
-              <a:buClr>
-                <a:srgbClr val="000000"/>
-              </a:buClr>
-              <a:buFont typeface="Arial"/>
-              <a:buChar char="•"/>
-            </a:pPr>
-            <a:r>
-              <a:rPr b="0" lang="en-US" sz="3900" spc="-1" strike="noStrike">
-                <a:solidFill>
-                  <a:schemeClr val="dk1"/>
-                </a:solidFill>
-                <a:latin typeface="Calibri"/>
-              </a:rPr>
-              <a:t>Third level</a:t>
-            </a:r>
-            <a:endParaRPr b="0" lang="en-US" sz="3900" spc="-1" strike="noStrike">
-              <a:solidFill>
-                <a:schemeClr val="dk1"/>
-              </a:solidFill>
-              <a:latin typeface="Calibri"/>
-            </a:endParaRPr>
-          </a:p>
-          <a:p>
-            <a:pPr lvl="3" marL="2579760" indent="-368280" defTabSz="1473120">
-              <a:lnSpc>
-                <a:spcPct val="100000"/>
-              </a:lnSpc>
-              <a:spcBef>
-                <a:spcPts val="641"/>
-              </a:spcBef>
-              <a:buClr>
-                <a:srgbClr val="000000"/>
-              </a:buClr>
-              <a:buFont typeface="Arial"/>
-              <a:buChar char="–"/>
-            </a:pPr>
-            <a:r>
-              <a:rPr b="0" lang="en-US" sz="3200" spc="-1" strike="noStrike">
-                <a:solidFill>
-                  <a:schemeClr val="dk1"/>
-                </a:solidFill>
-                <a:latin typeface="Calibri"/>
-              </a:rPr>
-              <a:t>Fourth level</a:t>
-            </a:r>
-            <a:endParaRPr b="0" lang="en-US" sz="3200" spc="-1" strike="noStrike">
-              <a:solidFill>
-                <a:schemeClr val="dk1"/>
-              </a:solidFill>
-              <a:latin typeface="Calibri"/>
-            </a:endParaRPr>
-          </a:p>
-          <a:p>
-            <a:pPr lvl="4" marL="3316320" indent="-368280" defTabSz="1473120">
-              <a:lnSpc>
-                <a:spcPct val="100000"/>
-              </a:lnSpc>
-              <a:spcBef>
-                <a:spcPts val="641"/>
-              </a:spcBef>
-              <a:buClr>
-                <a:srgbClr val="000000"/>
-              </a:buClr>
-              <a:buFont typeface="Arial"/>
-              <a:buChar char="»"/>
-            </a:pPr>
-            <a:r>
-              <a:rPr b="0" lang="en-US" sz="3200" spc="-1" strike="noStrike">
-                <a:solidFill>
-                  <a:schemeClr val="dk1"/>
-                </a:solidFill>
-                <a:latin typeface="Calibri"/>
-              </a:rPr>
-              <a:t>Fifth level</a:t>
-            </a:r>
-            <a:endParaRPr b="0" lang="en-US" sz="3200" spc="-1" strike="noStrike">
-              <a:solidFill>
-                <a:schemeClr val="dk1"/>
-              </a:solidFill>
-              <a:latin typeface="Calibri"/>
-            </a:endParaRPr>
-          </a:p>
-        </p:txBody>
-      </p:sp>
-      <p:sp>
-        <p:nvSpPr>
-          <p:cNvPr id="13" name="PlaceHolder 3"/>
-          <p:cNvSpPr>
-            <a:spLocks noGrp="1"/>
-          </p:cNvSpPr>
-          <p:nvPr>
-            <p:ph type="dt" idx="7"/>
+        </p:txBody>
+      </p:sp>
+      <p:sp>
+        <p:nvSpPr>
+          <p:cNvPr id="11" name="PlaceHolder 3"/>
+          <p:cNvSpPr>
+            <a:spLocks noGrp="1"/>
+          </p:cNvSpPr>
+          <p:nvPr>
+            <p:ph type="dt" idx="9"/>
           </p:nvPr>
         </p:nvSpPr>
         <p:spPr>
           <a:xfrm>
             <a:off x="755640" y="9906120"/>
-            <a:ext cx="3526920" cy="569520"/>
+            <a:ext cx="3526200" cy="568800"/>
           </a:xfrm>
           <a:prstGeom prst="rect">
             <a:avLst/>
@@ -3370,77 +2457,7 @@
             <a:noAutofit/>
           </a:bodyPr>
           <a:lstStyle>
-            <a:lvl1pPr indent="0" defTabSz="1474200">
-              <a:lnSpc>
-                <a:spcPct val="100000"/>
-              </a:lnSpc>
-              <a:buNone/>
-              <a:defRPr b="0" lang="en-US" sz="2000" spc="-1" strike="noStrike">
-                <a:solidFill>
-                  <a:schemeClr val="dk1">
-                    <a:tint val="75000"/>
-                  </a:schemeClr>
-                </a:solidFill>
-                <a:latin typeface="Calibri"/>
-              </a:defRPr>
-            </a:lvl1pPr>
-          </a:lstStyle>
-          <a:p>
-            <a:pPr indent="0" defTabSz="1474200">
-              <a:lnSpc>
-                <a:spcPct val="100000"/>
-              </a:lnSpc>
-              <a:buNone/>
-            </a:pPr>
-            <a:r>
-              <a:rPr b="0" lang="en-US" sz="2000" spc="-1" strike="noStrike">
-                <a:solidFill>
-                  <a:schemeClr val="dk1">
-                    <a:tint val="75000"/>
-                  </a:schemeClr>
-                </a:solidFill>
-                <a:latin typeface="Calibri"/>
-              </a:rPr>
-              <a:t>&lt;date/time&gt;</a:t>
-            </a:r>
-            <a:endParaRPr b="0" lang="en-US" sz="2000" spc="-1" strike="noStrike">
-              <a:solidFill>
-                <a:srgbClr val="000000"/>
-              </a:solidFill>
-              <a:latin typeface="Times New Roman"/>
-            </a:endParaRPr>
-          </a:p>
-        </p:txBody>
-      </p:sp>
-      <p:sp>
-        <p:nvSpPr>
-          <p:cNvPr id="14" name="PlaceHolder 4"/>
-          <p:cNvSpPr>
-            <a:spLocks noGrp="1"/>
-          </p:cNvSpPr>
-          <p:nvPr>
-            <p:ph type="ftr" idx="8"/>
-          </p:nvPr>
-        </p:nvSpPr>
-        <p:spPr>
-          <a:xfrm>
-            <a:off x="5164200" y="9906120"/>
-            <a:ext cx="4785840" cy="569520"/>
-          </a:xfrm>
-          <a:prstGeom prst="rect">
-            <a:avLst/>
-          </a:prstGeom>
-          <a:noFill/>
-          <a:ln w="0">
-            <a:noFill/>
-          </a:ln>
-        </p:spPr>
-        <p:txBody>
-          <a:bodyPr lIns="147600" rIns="147600" tIns="73800" bIns="73800" anchor="ctr">
-            <a:noAutofit/>
-          </a:bodyPr>
-          <a:lstStyle>
-            <a:lvl1pPr indent="0" algn="ctr">
+            <a:lvl1pPr indent="0">
               <a:buNone/>
               <a:defRPr b="0" lang="en-US" sz="1400" spc="-1" strike="noStrike">
                 <a:solidFill>
@@ -3451,7 +2468,7 @@
             </a:lvl1pPr>
           </a:lstStyle>
           <a:p>
-            <a:pPr indent="0" algn="ctr">
+            <a:pPr indent="0">
               <a:buNone/>
             </a:pPr>
             <a:r>
@@ -3461,75 +2478,9 @@
                 </a:solidFill>
                 <a:latin typeface="Times New Roman"/>
               </a:rPr>
-              <a:t>&lt;footer&gt;</a:t>
+              <a:t>&lt;date/time&gt;</a:t>
             </a:r>
             <a:endParaRPr b="0" lang="en-US" sz="1400" spc="-1" strike="noStrike">
-              <a:solidFill>
-                <a:srgbClr val="000000"/>
-              </a:solidFill>
-              <a:latin typeface="Times New Roman"/>
-            </a:endParaRPr>
-          </a:p>
-        </p:txBody>
-      </p:sp>
-      <p:sp>
-        <p:nvSpPr>
-          <p:cNvPr id="15" name="PlaceHolder 5"/>
-          <p:cNvSpPr>
-            <a:spLocks noGrp="1"/>
-          </p:cNvSpPr>
-          <p:nvPr>
-            <p:ph type="sldNum" idx="9"/>
-          </p:nvPr>
-        </p:nvSpPr>
-        <p:spPr>
-          <a:xfrm>
-            <a:off x="10831680" y="9906120"/>
-            <a:ext cx="3526920" cy="569520"/>
-          </a:xfrm>
-          <a:prstGeom prst="rect">
-            <a:avLst/>
-          </a:prstGeom>
-          <a:noFill/>
-          <a:ln w="0">
-            <a:noFill/>
-          </a:ln>
-        </p:spPr>
-        <p:txBody>
-          <a:bodyPr numCol="1" spcCol="0" lIns="147600" rIns="147600" tIns="73800" bIns="73800" anchor="ctr">
-            <a:noAutofit/>
-          </a:bodyPr>
-          <a:lstStyle>
-            <a:lvl1pPr indent="0" algn="r" defTabSz="1473120">
-              <a:lnSpc>
-                <a:spcPct val="100000"/>
-              </a:lnSpc>
-              <a:buNone/>
-              <a:defRPr b="0" lang="en-US" sz="2000" spc="-1" strike="noStrike">
-                <a:solidFill>
-                  <a:srgbClr val="898989"/>
-                </a:solidFill>
-                <a:latin typeface="Calibri"/>
-              </a:defRPr>
-            </a:lvl1pPr>
-          </a:lstStyle>
-          <a:p>
-            <a:pPr indent="0" algn="r" defTabSz="1473120">
-              <a:lnSpc>
-                <a:spcPct val="100000"/>
-              </a:lnSpc>
-              <a:buNone/>
-            </a:pPr>
-            <a:fld id="{E00E3EA0-77A7-420F-A20B-41FD6A663ACC}" type="slidenum">
-              <a:rPr b="0" lang="en-US" sz="2000" spc="-1" strike="noStrike">
-                <a:solidFill>
-                  <a:srgbClr val="898989"/>
-                </a:solidFill>
-                <a:latin typeface="Calibri"/>
-              </a:rPr>
-              <a:t>&lt;number&gt;</a:t>
-            </a:fld>
-            <a:endParaRPr b="0" lang="en-US" sz="2000" spc="-1" strike="noStrike">
               <a:solidFill>
                 <a:srgbClr val="000000"/>
               </a:solidFill>
@@ -3573,7 +2524,7 @@
       </p:grpSpPr>
       <p:sp>
         <p:nvSpPr>
-          <p:cNvPr id="16" name="PlaceHolder 1"/>
+          <p:cNvPr id="12" name="PlaceHolder 1"/>
           <p:cNvSpPr>
             <a:spLocks noGrp="1"/>
           </p:cNvSpPr>
@@ -3584,7 +2535,7 @@
         <p:spPr>
           <a:xfrm>
             <a:off x="755640" y="428760"/>
-            <a:ext cx="13602960" cy="1780920"/>
+            <a:ext cx="13602240" cy="1780200"/>
           </a:xfrm>
           <a:prstGeom prst="rect">
             <a:avLst/>
@@ -3595,37 +2546,34 @@
           </a:ln>
         </p:spPr>
         <p:txBody>
-          <a:bodyPr numCol="1" spcCol="0" lIns="147600" rIns="147600" tIns="73800" bIns="73800" anchor="ctr">
+          <a:bodyPr numCol="1" spcCol="0" lIns="0" rIns="0" tIns="0" bIns="0" anchor="ctr">
             <a:noAutofit/>
           </a:bodyPr>
           <a:p>
-            <a:pPr indent="0" algn="ctr" defTabSz="1473120">
-              <a:lnSpc>
-                <a:spcPct val="100000"/>
-              </a:lnSpc>
+            <a:pPr indent="0">
               <a:buNone/>
             </a:pPr>
             <a:r>
-              <a:rPr b="0" lang="en-US" sz="7100" spc="-1" strike="noStrike">
-                <a:solidFill>
-                  <a:schemeClr val="dk1"/>
-                </a:solidFill>
-                <a:latin typeface="Calibri"/>
+              <a:rPr b="0" lang="en-US" sz="1800" spc="-1" strike="noStrike">
+                <a:solidFill>
+                  <a:srgbClr val="000000"/>
+                </a:solidFill>
+                <a:latin typeface="Arial"/>
               </a:rPr>
-              <a:t>Click to edit Master title style</a:t>
-            </a:r>
-            <a:endParaRPr b="0" lang="en-US" sz="7100" spc="-1" strike="noStrike">
+              <a:t>Click to edit the title text format</a:t>
+            </a:r>
+            <a:endParaRPr b="0" lang="en-US" sz="1800" spc="-1" strike="noStrike">
               <a:solidFill>
-                <a:schemeClr val="dk1"/>
+                <a:srgbClr val="000000"/>
               </a:solidFill>
-              <a:latin typeface="Calibri"/>
+              <a:latin typeface="Arial"/>
             </a:endParaRPr>
           </a:p>
         </p:txBody>
       </p:sp>
       <p:sp>
         <p:nvSpPr>
-          <p:cNvPr id="17" name="PlaceHolder 2"/>
+          <p:cNvPr id="13" name="PlaceHolder 2"/>
           <p:cNvSpPr>
             <a:spLocks noGrp="1"/>
           </p:cNvSpPr>
@@ -3636,7 +2584,7 @@
         <p:spPr>
           <a:xfrm>
             <a:off x="755640" y="2494080"/>
-            <a:ext cx="13602960" cy="7054560"/>
+            <a:ext cx="13602240" cy="7053840"/>
           </a:xfrm>
           <a:prstGeom prst="rect">
             <a:avLst/>
@@ -3647,175 +2595,221 @@
           </a:ln>
         </p:spPr>
         <p:txBody>
-          <a:bodyPr numCol="1" spcCol="0" lIns="147600" rIns="147600" tIns="73800" bIns="73800" anchor="t">
-            <a:noAutofit/>
+          <a:bodyPr numCol="1" spcCol="0" lIns="0" rIns="0" tIns="0" bIns="0" anchor="t">
+            <a:normAutofit/>
           </a:bodyPr>
           <a:p>
-            <a:pPr marL="552600" indent="-552600" defTabSz="1473120">
-              <a:lnSpc>
-                <a:spcPct val="100000"/>
-              </a:lnSpc>
+            <a:pPr marL="432000" indent="-324000">
               <a:spcBef>
-                <a:spcPts val="1040"/>
+                <a:spcPts val="1417"/>
               </a:spcBef>
               <a:buClr>
                 <a:srgbClr val="000000"/>
               </a:buClr>
-              <a:buFont typeface="Arial"/>
-              <a:buChar char="•"/>
+              <a:buSzPct val="45000"/>
+              <a:buFont typeface="Wingdings" charset="2"/>
+              <a:buChar char=""/>
             </a:pPr>
             <a:r>
-              <a:rPr b="0" lang="en-US" sz="5200" spc="-1" strike="noStrike">
-                <a:solidFill>
-                  <a:schemeClr val="dk1"/>
-                </a:solidFill>
-                <a:latin typeface="Calibri"/>
+              <a:rPr b="0" lang="en-US" sz="1800" spc="-1" strike="noStrike">
+                <a:solidFill>
+                  <a:srgbClr val="000000"/>
+                </a:solidFill>
+                <a:latin typeface="Arial"/>
               </a:rPr>
-              <a:t>Click to edit Master text styles</a:t>
-            </a:r>
-            <a:endParaRPr b="0" lang="en-US" sz="5200" spc="-1" strike="noStrike">
+              <a:t>Click to edit the outline text format</a:t>
+            </a:r>
+            <a:endParaRPr b="0" lang="en-US" sz="1800" spc="-1" strike="noStrike">
               <a:solidFill>
-                <a:schemeClr val="dk1"/>
+                <a:srgbClr val="000000"/>
               </a:solidFill>
-              <a:latin typeface="Calibri"/>
+              <a:latin typeface="Arial"/>
             </a:endParaRPr>
           </a:p>
           <a:p>
-            <a:pPr lvl="1" marL="1197000" indent="-460440" defTabSz="1473120">
-              <a:lnSpc>
-                <a:spcPct val="100000"/>
-              </a:lnSpc>
+            <a:pPr lvl="1" marL="864000" indent="-324000">
               <a:spcBef>
-                <a:spcPts val="901"/>
+                <a:spcPts val="1134"/>
               </a:spcBef>
               <a:buClr>
                 <a:srgbClr val="000000"/>
               </a:buClr>
-              <a:buFont typeface="Arial"/>
-              <a:buChar char="–"/>
+              <a:buSzPct val="75000"/>
+              <a:buFont typeface="Symbol" charset="2"/>
+              <a:buChar char=""/>
             </a:pPr>
             <a:r>
-              <a:rPr b="0" lang="en-US" sz="4500" spc="-1" strike="noStrike">
-                <a:solidFill>
-                  <a:schemeClr val="dk1"/>
-                </a:solidFill>
-                <a:latin typeface="Calibri"/>
+              <a:rPr b="0" lang="en-US" sz="1800" spc="-1" strike="noStrike">
+                <a:solidFill>
+                  <a:srgbClr val="000000"/>
+                </a:solidFill>
+                <a:latin typeface="Arial"/>
               </a:rPr>
-              <a:t>Second level</a:t>
-            </a:r>
-            <a:endParaRPr b="0" lang="en-US" sz="4500" spc="-1" strike="noStrike">
+              <a:t>Second Outline Level</a:t>
+            </a:r>
+            <a:endParaRPr b="0" lang="en-US" sz="1800" spc="-1" strike="noStrike">
               <a:solidFill>
-                <a:schemeClr val="dk1"/>
+                <a:srgbClr val="000000"/>
               </a:solidFill>
-              <a:latin typeface="Calibri"/>
+              <a:latin typeface="Arial"/>
             </a:endParaRPr>
           </a:p>
           <a:p>
-            <a:pPr lvl="2" marL="1841400" indent="-368280" defTabSz="1473120">
-              <a:lnSpc>
-                <a:spcPct val="100000"/>
-              </a:lnSpc>
+            <a:pPr lvl="2" marL="1296000" indent="-288000">
               <a:spcBef>
-                <a:spcPts val="780"/>
+                <a:spcPts val="850"/>
               </a:spcBef>
               <a:buClr>
                 <a:srgbClr val="000000"/>
               </a:buClr>
-              <a:buFont typeface="Arial"/>
-              <a:buChar char="•"/>
+              <a:buSzPct val="45000"/>
+              <a:buFont typeface="Wingdings" charset="2"/>
+              <a:buChar char=""/>
             </a:pPr>
             <a:r>
-              <a:rPr b="0" lang="en-US" sz="3900" spc="-1" strike="noStrike">
-                <a:solidFill>
-                  <a:schemeClr val="dk1"/>
-                </a:solidFill>
-                <a:latin typeface="Calibri"/>
+              <a:rPr b="0" lang="en-US" sz="1800" spc="-1" strike="noStrike">
+                <a:solidFill>
+                  <a:srgbClr val="000000"/>
+                </a:solidFill>
+                <a:latin typeface="Arial"/>
               </a:rPr>
-              <a:t>Third level</a:t>
-            </a:r>
-            <a:endParaRPr b="0" lang="en-US" sz="3900" spc="-1" strike="noStrike">
+              <a:t>Third Outline Level</a:t>
+            </a:r>
+            <a:endParaRPr b="0" lang="en-US" sz="1800" spc="-1" strike="noStrike">
               <a:solidFill>
-                <a:schemeClr val="dk1"/>
+                <a:srgbClr val="000000"/>
               </a:solidFill>
-              <a:latin typeface="Calibri"/>
+              <a:latin typeface="Arial"/>
             </a:endParaRPr>
           </a:p>
           <a:p>
-            <a:pPr lvl="3" marL="2579760" indent="-368280" defTabSz="1473120">
-              <a:lnSpc>
-                <a:spcPct val="100000"/>
-              </a:lnSpc>
+            <a:pPr lvl="3" marL="1728000" indent="-216000">
               <a:spcBef>
-                <a:spcPts val="641"/>
+                <a:spcPts val="567"/>
               </a:spcBef>
               <a:buClr>
                 <a:srgbClr val="000000"/>
               </a:buClr>
-              <a:buFont typeface="Arial"/>
-              <a:buChar char="–"/>
+              <a:buSzPct val="75000"/>
+              <a:buFont typeface="Symbol" charset="2"/>
+              <a:buChar char=""/>
             </a:pPr>
             <a:r>
-              <a:rPr b="0" lang="en-US" sz="3200" spc="-1" strike="noStrike">
-                <a:solidFill>
-                  <a:schemeClr val="dk1"/>
-                </a:solidFill>
-                <a:latin typeface="Calibri"/>
+              <a:rPr b="0" lang="en-US" sz="1800" spc="-1" strike="noStrike">
+                <a:solidFill>
+                  <a:srgbClr val="000000"/>
+                </a:solidFill>
+                <a:latin typeface="Arial"/>
               </a:rPr>
-              <a:t>Fourth level</a:t>
-            </a:r>
-            <a:endParaRPr b="0" lang="en-US" sz="3200" spc="-1" strike="noStrike">
+              <a:t>Fourth Outline Level</a:t>
+            </a:r>
+            <a:endParaRPr b="0" lang="en-US" sz="1800" spc="-1" strike="noStrike">
               <a:solidFill>
-                <a:schemeClr val="dk1"/>
+                <a:srgbClr val="000000"/>
               </a:solidFill>
-              <a:latin typeface="Calibri"/>
+              <a:latin typeface="Arial"/>
             </a:endParaRPr>
           </a:p>
           <a:p>
-            <a:pPr lvl="4" marL="3316320" indent="-368280" defTabSz="1473120">
-              <a:lnSpc>
-                <a:spcPct val="100000"/>
-              </a:lnSpc>
+            <a:pPr lvl="4" marL="2160000" indent="-216000">
               <a:spcBef>
-                <a:spcPts val="641"/>
+                <a:spcPts val="283"/>
               </a:spcBef>
               <a:buClr>
                 <a:srgbClr val="000000"/>
               </a:buClr>
-              <a:buFont typeface="Arial"/>
-              <a:buChar char="»"/>
+              <a:buSzPct val="45000"/>
+              <a:buFont typeface="Wingdings" charset="2"/>
+              <a:buChar char=""/>
             </a:pPr>
             <a:r>
-              <a:rPr b="0" lang="en-US" sz="3200" spc="-1" strike="noStrike">
-                <a:solidFill>
-                  <a:schemeClr val="dk1"/>
-                </a:solidFill>
-                <a:latin typeface="Calibri"/>
+              <a:rPr b="0" lang="en-US" sz="1800" spc="-1" strike="noStrike">
+                <a:solidFill>
+                  <a:srgbClr val="000000"/>
+                </a:solidFill>
+                <a:latin typeface="Arial"/>
               </a:rPr>
-              <a:t>Fifth level</a:t>
-            </a:r>
-            <a:endParaRPr b="0" lang="en-US" sz="3200" spc="-1" strike="noStrike">
+              <a:t>Fifth Outline Level</a:t>
+            </a:r>
+            <a:endParaRPr b="0" lang="en-US" sz="1800" spc="-1" strike="noStrike">
               <a:solidFill>
-                <a:schemeClr val="dk1"/>
+                <a:srgbClr val="000000"/>
               </a:solidFill>
-              <a:latin typeface="Calibri"/>
+              <a:latin typeface="Arial"/>
             </a:endParaRPr>
           </a:p>
-        </p:txBody>
-      </p:sp>
-      <p:sp>
-        <p:nvSpPr>
-          <p:cNvPr id="18" name="PlaceHolder 3"/>
-          <p:cNvSpPr>
-            <a:spLocks noGrp="1"/>
-          </p:cNvSpPr>
-          <p:nvPr>
-            <p:ph type="dt" idx="10"/>
+          <a:p>
+            <a:pPr lvl="5" marL="2592000" indent="-216000">
+              <a:spcBef>
+                <a:spcPts val="283"/>
+              </a:spcBef>
+              <a:buClr>
+                <a:srgbClr val="000000"/>
+              </a:buClr>
+              <a:buSzPct val="45000"/>
+              <a:buFont typeface="Wingdings" charset="2"/>
+              <a:buChar char=""/>
+            </a:pPr>
+            <a:r>
+              <a:rPr b="0" lang="en-US" sz="1800" spc="-1" strike="noStrike">
+                <a:solidFill>
+                  <a:srgbClr val="000000"/>
+                </a:solidFill>
+                <a:latin typeface="Arial"/>
+              </a:rPr>
+              <a:t>Sixth Outline Level</a:t>
+            </a:r>
+            <a:endParaRPr b="0" lang="en-US" sz="1800" spc="-1" strike="noStrike">
+              <a:solidFill>
+                <a:srgbClr val="000000"/>
+              </a:solidFill>
+              <a:latin typeface="Arial"/>
+            </a:endParaRPr>
+          </a:p>
+          <a:p>
+            <a:pPr lvl="6" marL="3024000" indent="-216000">
+              <a:spcBef>
+                <a:spcPts val="283"/>
+              </a:spcBef>
+              <a:buClr>
+                <a:srgbClr val="000000"/>
+              </a:buClr>
+              <a:buSzPct val="45000"/>
+              <a:buFont typeface="Wingdings" charset="2"/>
+              <a:buChar char=""/>
+            </a:pPr>
+            <a:r>
+              <a:rPr b="0" lang="en-US" sz="1800" spc="-1" strike="noStrike">
+                <a:solidFill>
+                  <a:srgbClr val="000000"/>
+                </a:solidFill>
+                <a:latin typeface="Arial"/>
+              </a:rPr>
+              <a:t>Seventh Outline Level</a:t>
+            </a:r>
+            <a:endParaRPr b="0" lang="en-US" sz="1800" spc="-1" strike="noStrike">
+              <a:solidFill>
+                <a:srgbClr val="000000"/>
+              </a:solidFill>
+              <a:latin typeface="Arial"/>
+            </a:endParaRPr>
+          </a:p>
+        </p:txBody>
+      </p:sp>
+      <p:sp>
+        <p:nvSpPr>
+          <p:cNvPr id="14" name="PlaceHolder 3"/>
+          <p:cNvSpPr>
+            <a:spLocks noGrp="1"/>
+          </p:cNvSpPr>
+          <p:nvPr>
+            <p:ph type="ftr" idx="10"/>
           </p:nvPr>
         </p:nvSpPr>
         <p:spPr>
           <a:xfrm>
-            <a:off x="755640" y="9906120"/>
-            <a:ext cx="3526920" cy="569520"/>
+            <a:off x="5164200" y="9906120"/>
+            <a:ext cx="4785120" cy="568800"/>
           </a:xfrm>
           <a:prstGeom prst="rect">
             <a:avLst/>
@@ -3830,40 +2824,42 @@
             <a:noAutofit/>
           </a:bodyPr>
           <a:lstStyle>
-            <a:lvl1pPr indent="0" defTabSz="1474200">
+            <a:lvl1pPr indent="0" algn="ctr">
               <a:lnSpc>
                 <a:spcPct val="100000"/>
               </a:lnSpc>
               <a:buNone/>
-              <a:defRPr b="0" lang="en-US" sz="2000" spc="-1" strike="noStrike">
-                <a:solidFill>
-                  <a:schemeClr val="dk1">
-                    <a:tint val="75000"/>
-                  </a:schemeClr>
-                </a:solidFill>
-                <a:latin typeface="Calibri"/>
+              <a:tabLst>
+                <a:tab algn="l" pos="0"/>
+              </a:tabLst>
+              <a:defRPr b="0" lang="en-US" sz="1400" spc="-1" strike="noStrike">
+                <a:solidFill>
+                  <a:srgbClr val="000000"/>
+                </a:solidFill>
+                <a:latin typeface="Times New Roman"/>
               </a:defRPr>
             </a:lvl1pPr>
           </a:lstStyle>
           <a:p>
-            <a:pPr indent="0" defTabSz="1474200">
+            <a:pPr indent="0" algn="ctr">
               <a:lnSpc>
                 <a:spcPct val="100000"/>
               </a:lnSpc>
               <a:buNone/>
+              <a:tabLst>
+                <a:tab algn="l" pos="0"/>
+              </a:tabLst>
             </a:pPr>
             <a:r>
-              <a:rPr b="0" lang="en-US" sz="2000" spc="-1" strike="noStrike">
-                <a:solidFill>
-                  <a:schemeClr val="dk1">
-                    <a:tint val="75000"/>
-                  </a:schemeClr>
-                </a:solidFill>
-                <a:latin typeface="Calibri"/>
+              <a:rPr b="0" lang="en-US" sz="1400" spc="-1" strike="noStrike">
+                <a:solidFill>
+                  <a:srgbClr val="000000"/>
+                </a:solidFill>
+                <a:latin typeface="Times New Roman"/>
               </a:rPr>
-              <a:t>&lt;date/time&gt;</a:t>
-            </a:r>
-            <a:endParaRPr b="0" lang="en-US" sz="2000" spc="-1" strike="noStrike">
+              <a:t>&lt;footer&gt;</a:t>
+            </a:r>
+            <a:endParaRPr b="0" lang="en-US" sz="1400" spc="-1" strike="noStrike">
               <a:solidFill>
                 <a:srgbClr val="000000"/>
               </a:solidFill>
@@ -3874,18 +2870,18 @@
       </p:sp>
       <p:sp>
         <p:nvSpPr>
-          <p:cNvPr id="19" name="PlaceHolder 4"/>
-          <p:cNvSpPr>
-            <a:spLocks noGrp="1"/>
-          </p:cNvSpPr>
-          <p:nvPr>
-            <p:ph type="ftr" idx="11"/>
+          <p:cNvPr id="15" name="PlaceHolder 4"/>
+          <p:cNvSpPr>
+            <a:spLocks noGrp="1"/>
+          </p:cNvSpPr>
+          <p:nvPr>
+            <p:ph type="sldNum" idx="11"/>
           </p:nvPr>
         </p:nvSpPr>
         <p:spPr>
           <a:xfrm>
-            <a:off x="5164200" y="9906120"/>
-            <a:ext cx="4785840" cy="569520"/>
+            <a:off x="10831680" y="9906120"/>
+            <a:ext cx="3526200" cy="568800"/>
           </a:xfrm>
           <a:prstGeom prst="rect">
             <a:avLst/>
@@ -3896,34 +2892,46 @@
           </a:ln>
         </p:spPr>
         <p:txBody>
-          <a:bodyPr lIns="147600" rIns="147600" tIns="73800" bIns="73800" anchor="ctr">
+          <a:bodyPr numCol="1" spcCol="0" lIns="147600" rIns="147600" tIns="73800" bIns="73800" anchor="ctr">
             <a:noAutofit/>
           </a:bodyPr>
           <a:lstStyle>
-            <a:lvl1pPr indent="0" algn="ctr">
-              <a:buNone/>
-              <a:defRPr b="0" lang="en-US" sz="1400" spc="-1" strike="noStrike">
-                <a:solidFill>
-                  <a:srgbClr val="000000"/>
-                </a:solidFill>
-                <a:latin typeface="Times New Roman"/>
+            <a:lvl1pPr indent="0" algn="r" defTabSz="1473120">
+              <a:lnSpc>
+                <a:spcPct val="100000"/>
+              </a:lnSpc>
+              <a:buNone/>
+              <a:tabLst>
+                <a:tab algn="l" pos="0"/>
+              </a:tabLst>
+              <a:defRPr b="0" lang="en-US" sz="2000" spc="-1" strike="noStrike">
+                <a:solidFill>
+                  <a:srgbClr val="898989"/>
+                </a:solidFill>
+                <a:latin typeface="Calibri"/>
               </a:defRPr>
             </a:lvl1pPr>
           </a:lstStyle>
           <a:p>
-            <a:pPr indent="0" algn="ctr">
-              <a:buNone/>
+            <a:pPr indent="0" algn="r" defTabSz="1473120">
+              <a:lnSpc>
+                <a:spcPct val="100000"/>
+              </a:lnSpc>
+              <a:buNone/>
+              <a:tabLst>
+                <a:tab algn="l" pos="0"/>
+              </a:tabLst>
             </a:pPr>
-            <a:r>
-              <a:rPr b="0" lang="en-US" sz="1400" spc="-1" strike="noStrike">
-                <a:solidFill>
-                  <a:srgbClr val="000000"/>
-                </a:solidFill>
-                <a:latin typeface="Times New Roman"/>
+            <a:fld id="{47156723-BC8C-4598-B56E-3A57FC3A9CF7}" type="slidenum">
+              <a:rPr b="0" lang="en-US" sz="2000" spc="-1" strike="noStrike">
+                <a:solidFill>
+                  <a:srgbClr val="898989"/>
+                </a:solidFill>
+                <a:latin typeface="Calibri"/>
               </a:rPr>
-              <a:t>&lt;footer&gt;</a:t>
-            </a:r>
-            <a:endParaRPr b="0" lang="en-US" sz="1400" spc="-1" strike="noStrike">
+              <a:t>&lt;number&gt;</a:t>
+            </a:fld>
+            <a:endParaRPr b="0" lang="en-US" sz="2000" spc="-1" strike="noStrike">
               <a:solidFill>
                 <a:srgbClr val="000000"/>
               </a:solidFill>
@@ -3934,18 +2942,18 @@
       </p:sp>
       <p:sp>
         <p:nvSpPr>
-          <p:cNvPr id="20" name="PlaceHolder 5"/>
-          <p:cNvSpPr>
-            <a:spLocks noGrp="1"/>
-          </p:cNvSpPr>
-          <p:nvPr>
-            <p:ph type="sldNum" idx="12"/>
+          <p:cNvPr id="16" name="PlaceHolder 5"/>
+          <p:cNvSpPr>
+            <a:spLocks noGrp="1"/>
+          </p:cNvSpPr>
+          <p:nvPr>
+            <p:ph type="dt" idx="12"/>
           </p:nvPr>
         </p:nvSpPr>
         <p:spPr>
           <a:xfrm>
-            <a:off x="10831680" y="9906120"/>
-            <a:ext cx="3526920" cy="569520"/>
+            <a:off x="755640" y="9906120"/>
+            <a:ext cx="3526200" cy="568800"/>
           </a:xfrm>
           <a:prstGeom prst="rect">
             <a:avLst/>
@@ -3956,40 +2964,34 @@
           </a:ln>
         </p:spPr>
         <p:txBody>
-          <a:bodyPr numCol="1" spcCol="0" lIns="147600" rIns="147600" tIns="73800" bIns="73800" anchor="ctr">
+          <a:bodyPr lIns="147600" rIns="147600" tIns="73800" bIns="73800" anchor="ctr">
             <a:noAutofit/>
           </a:bodyPr>
           <a:lstStyle>
-            <a:lvl1pPr indent="0" algn="r" defTabSz="1473120">
-              <a:lnSpc>
-                <a:spcPct val="100000"/>
-              </a:lnSpc>
-              <a:buNone/>
-              <a:defRPr b="0" lang="en-US" sz="2000" spc="-1" strike="noStrike">
-                <a:solidFill>
-                  <a:srgbClr val="898989"/>
-                </a:solidFill>
-                <a:latin typeface="Calibri"/>
+            <a:lvl1pPr indent="0">
+              <a:buNone/>
+              <a:defRPr b="0" lang="en-US" sz="1400" spc="-1" strike="noStrike">
+                <a:solidFill>
+                  <a:srgbClr val="000000"/>
+                </a:solidFill>
+                <a:latin typeface="Times New Roman"/>
               </a:defRPr>
             </a:lvl1pPr>
           </a:lstStyle>
           <a:p>
-            <a:pPr indent="0" algn="r" defTabSz="1473120">
-              <a:lnSpc>
-                <a:spcPct val="100000"/>
-              </a:lnSpc>
+            <a:pPr indent="0">
               <a:buNone/>
             </a:pPr>
-            <a:fld id="{6D83EF3E-3855-46C7-A1A5-6D1521618596}" type="slidenum">
-              <a:rPr b="0" lang="en-US" sz="2000" spc="-1" strike="noStrike">
-                <a:solidFill>
-                  <a:srgbClr val="898989"/>
-                </a:solidFill>
-                <a:latin typeface="Calibri"/>
+            <a:r>
+              <a:rPr b="0" lang="en-US" sz="1400" spc="-1" strike="noStrike">
+                <a:solidFill>
+                  <a:srgbClr val="000000"/>
+                </a:solidFill>
+                <a:latin typeface="Times New Roman"/>
               </a:rPr>
-              <a:t>&lt;number&gt;</a:t>
-            </a:fld>
-            <a:endParaRPr b="0" lang="en-US" sz="2000" spc="-1" strike="noStrike">
+              <a:t>&lt;date/time&gt;</a:t>
+            </a:r>
+            <a:endParaRPr b="0" lang="en-US" sz="1400" spc="-1" strike="noStrike">
               <a:solidFill>
                 <a:srgbClr val="000000"/>
               </a:solidFill>
@@ -4033,18 +3035,18 @@
       </p:grpSpPr>
       <p:sp>
         <p:nvSpPr>
-          <p:cNvPr id="23" name="PlaceHolder 1"/>
-          <p:cNvSpPr>
-            <a:spLocks noGrp="1"/>
-          </p:cNvSpPr>
-          <p:nvPr>
-            <p:ph type="title"/>
+          <p:cNvPr id="19" name="PlaceHolder 1"/>
+          <p:cNvSpPr>
+            <a:spLocks noGrp="1"/>
+          </p:cNvSpPr>
+          <p:nvPr>
+            <p:ph type="ftr" idx="13"/>
           </p:nvPr>
         </p:nvSpPr>
         <p:spPr>
           <a:xfrm>
-            <a:off x="1194120" y="6868440"/>
-            <a:ext cx="12846960" cy="2122560"/>
+            <a:off x="5164200" y="9906120"/>
+            <a:ext cx="4785120" cy="568800"/>
           </a:xfrm>
           <a:prstGeom prst="rect">
             <a:avLst/>
@@ -4055,48 +3057,68 @@
           </a:ln>
         </p:spPr>
         <p:txBody>
-          <a:bodyPr numCol="1" spcCol="0" lIns="147600" rIns="147600" tIns="73800" bIns="73800" anchor="t">
+          <a:bodyPr lIns="147600" rIns="147600" tIns="73800" bIns="73800" anchor="ctr">
             <a:noAutofit/>
           </a:bodyPr>
-          <a:p>
-            <a:pPr indent="0" defTabSz="1473120">
+          <a:lstStyle>
+            <a:lvl1pPr indent="0" algn="ctr">
               <a:lnSpc>
                 <a:spcPct val="100000"/>
               </a:lnSpc>
               <a:buNone/>
+              <a:tabLst>
+                <a:tab algn="l" pos="0"/>
+              </a:tabLst>
+              <a:defRPr b="0" lang="en-US" sz="1400" spc="-1" strike="noStrike">
+                <a:solidFill>
+                  <a:srgbClr val="000000"/>
+                </a:solidFill>
+                <a:latin typeface="Times New Roman"/>
+              </a:defRPr>
+            </a:lvl1pPr>
+          </a:lstStyle>
+          <a:p>
+            <a:pPr indent="0" algn="ctr">
+              <a:lnSpc>
+                <a:spcPct val="100000"/>
+              </a:lnSpc>
+              <a:buNone/>
+              <a:tabLst>
+                <a:tab algn="l" pos="0"/>
+              </a:tabLst>
             </a:pPr>
             <a:r>
-              <a:rPr b="1" lang="en-US" sz="6400" spc="-1" strike="noStrike" cap="all">
-                <a:solidFill>
-                  <a:schemeClr val="dk1"/>
-                </a:solidFill>
-                <a:latin typeface="Calibri"/>
+              <a:rPr b="0" lang="en-US" sz="1400" spc="-1" strike="noStrike">
+                <a:solidFill>
+                  <a:srgbClr val="000000"/>
+                </a:solidFill>
+                <a:latin typeface="Times New Roman"/>
               </a:rPr>
-              <a:t>Click to edit Master title style</a:t>
-            </a:r>
-            <a:endParaRPr b="0" lang="en-US" sz="6400" spc="-1" strike="noStrike">
+              <a:t>&lt;footer&gt;</a:t>
+            </a:r>
+            <a:endParaRPr b="0" lang="en-US" sz="1400" spc="-1" strike="noStrike">
               <a:solidFill>
-                <a:schemeClr val="dk1"/>
+                <a:srgbClr val="000000"/>
               </a:solidFill>
-              <a:latin typeface="Calibri"/>
+              <a:latin typeface="Times New Roman"/>
             </a:endParaRPr>
           </a:p>
         </p:txBody>
       </p:sp>
       <p:sp>
         <p:nvSpPr>
-          <p:cNvPr id="24" name="PlaceHolder 2"/>
-          <p:cNvSpPr>
-            <a:spLocks noGrp="1"/>
-          </p:cNvSpPr>
-          <p:nvPr>
-            <p:ph type="body"/>
+          <p:cNvPr id="20" name="PlaceHolder 2"/>
+          <p:cNvSpPr>
+            <a:spLocks noGrp="1"/>
+          </p:cNvSpPr>
+          <p:nvPr>
+            <p:ph type="sldNum" idx="14"/>
           </p:nvPr>
         </p:nvSpPr>
         <p:spPr>
           <a:xfrm>
-            <a:off x="1194120" y="4530240"/>
-            <a:ext cx="12846960" cy="2337840"/>
+            <a:off x="10831680" y="9906120"/>
+            <a:ext cx="3526200" cy="568800"/>
           </a:xfrm>
           <a:prstGeom prst="rect">
             <a:avLst/>
@@ -4107,56 +3129,68 @@
           </a:ln>
         </p:spPr>
         <p:txBody>
-          <a:bodyPr numCol="1" spcCol="0" lIns="147600" rIns="147600" tIns="73800" bIns="73800" anchor="b">
+          <a:bodyPr numCol="1" spcCol="0" lIns="147600" rIns="147600" tIns="73800" bIns="73800" anchor="ctr">
             <a:noAutofit/>
           </a:bodyPr>
-          <a:p>
-            <a:pPr indent="0" defTabSz="1473120">
+          <a:lstStyle>
+            <a:lvl1pPr indent="0" algn="r" defTabSz="1473120">
               <a:lnSpc>
                 <a:spcPct val="100000"/>
               </a:lnSpc>
-              <a:spcBef>
-                <a:spcPts val="641"/>
-              </a:spcBef>
+              <a:buNone/>
+              <a:tabLst>
+                <a:tab algn="l" pos="0"/>
+              </a:tabLst>
+              <a:defRPr b="0" lang="en-US" sz="2000" spc="-1" strike="noStrike">
+                <a:solidFill>
+                  <a:srgbClr val="898989"/>
+                </a:solidFill>
+                <a:latin typeface="Calibri"/>
+              </a:defRPr>
+            </a:lvl1pPr>
+          </a:lstStyle>
+          <a:p>
+            <a:pPr indent="0" algn="r" defTabSz="1473120">
+              <a:lnSpc>
+                <a:spcPct val="100000"/>
+              </a:lnSpc>
               <a:buNone/>
               <a:tabLst>
                 <a:tab algn="l" pos="0"/>
               </a:tabLst>
             </a:pPr>
-            <a:r>
-              <a:rPr b="0" lang="en-US" sz="3200" spc="-1" strike="noStrike">
-                <a:solidFill>
-                  <a:schemeClr val="dk1">
-                    <a:tint val="75000"/>
-                  </a:schemeClr>
+            <a:fld id="{07E3F49A-6652-4AB8-9255-104936B5E2C9}" type="slidenum">
+              <a:rPr b="0" lang="en-US" sz="2000" spc="-1" strike="noStrike">
+                <a:solidFill>
+                  <a:srgbClr val="898989"/>
                 </a:solidFill>
                 <a:latin typeface="Calibri"/>
               </a:rPr>
-              <a:t>Click to edit Master text styles</a:t>
-            </a:r>
-            <a:endParaRPr b="0" lang="en-US" sz="3200" spc="-1" strike="noStrike">
+              <a:t>&lt;number&gt;</a:t>
+            </a:fld>
+            <a:endParaRPr b="0" lang="en-US" sz="2000" spc="-1" strike="noStrike">
               <a:solidFill>
-                <a:schemeClr val="dk1"/>
+                <a:srgbClr val="000000"/>
               </a:solidFill>
-              <a:latin typeface="Calibri"/>
+              <a:latin typeface="Times New Roman"/>
             </a:endParaRPr>
           </a:p>
         </p:txBody>
       </p:sp>
       <p:sp>
         <p:nvSpPr>
-          <p:cNvPr id="25" name="PlaceHolder 3"/>
-          <p:cNvSpPr>
-            <a:spLocks noGrp="1"/>
-          </p:cNvSpPr>
-          <p:nvPr>
-            <p:ph type="dt" idx="13"/>
+          <p:cNvPr id="21" name="PlaceHolder 3"/>
+          <p:cNvSpPr>
+            <a:spLocks noGrp="1"/>
+          </p:cNvSpPr>
+          <p:nvPr>
+            <p:ph type="dt" idx="15"/>
           </p:nvPr>
         </p:nvSpPr>
         <p:spPr>
           <a:xfrm>
             <a:off x="755640" y="9906120"/>
-            <a:ext cx="3526920" cy="569520"/>
+            <a:ext cx="3526200" cy="568800"/>
           </a:xfrm>
           <a:prstGeom prst="rect">
             <a:avLst/>
@@ -4171,77 +3205,7 @@
             <a:noAutofit/>
           </a:bodyPr>
           <a:lstStyle>
-            <a:lvl1pPr indent="0" defTabSz="1474200">
-              <a:lnSpc>
-                <a:spcPct val="100000"/>
-              </a:lnSpc>
-              <a:buNone/>
-              <a:defRPr b="0" lang="en-US" sz="2000" spc="-1" strike="noStrike">
-                <a:solidFill>
-                  <a:schemeClr val="dk1">
-                    <a:tint val="75000"/>
-                  </a:schemeClr>
-                </a:solidFill>
-                <a:latin typeface="Calibri"/>
-              </a:defRPr>
-            </a:lvl1pPr>
-          </a:lstStyle>
-          <a:p>
-            <a:pPr indent="0" defTabSz="1474200">
-              <a:lnSpc>
-                <a:spcPct val="100000"/>
-              </a:lnSpc>
-              <a:buNone/>
-            </a:pPr>
-            <a:r>
-              <a:rPr b="0" lang="en-US" sz="2000" spc="-1" strike="noStrike">
-                <a:solidFill>
-                  <a:schemeClr val="dk1">
-                    <a:tint val="75000"/>
-                  </a:schemeClr>
-                </a:solidFill>
-                <a:latin typeface="Calibri"/>
-              </a:rPr>
-              <a:t>&lt;date/time&gt;</a:t>
-            </a:r>
-            <a:endParaRPr b="0" lang="en-US" sz="2000" spc="-1" strike="noStrike">
-              <a:solidFill>
-                <a:srgbClr val="000000"/>
-              </a:solidFill>
-              <a:latin typeface="Times New Roman"/>
-            </a:endParaRPr>
-          </a:p>
-        </p:txBody>
-      </p:sp>
-      <p:sp>
-        <p:nvSpPr>
-          <p:cNvPr id="26" name="PlaceHolder 4"/>
-          <p:cNvSpPr>
-            <a:spLocks noGrp="1"/>
-          </p:cNvSpPr>
-          <p:nvPr>
-            <p:ph type="ftr" idx="14"/>
-          </p:nvPr>
-        </p:nvSpPr>
-        <p:spPr>
-          <a:xfrm>
-            <a:off x="5164200" y="9906120"/>
-            <a:ext cx="4785840" cy="569520"/>
-          </a:xfrm>
-          <a:prstGeom prst="rect">
-            <a:avLst/>
-          </a:prstGeom>
-          <a:noFill/>
-          <a:ln w="0">
-            <a:noFill/>
-          </a:ln>
-        </p:spPr>
-        <p:txBody>
-          <a:bodyPr lIns="147600" rIns="147600" tIns="73800" bIns="73800" anchor="ctr">
-            <a:noAutofit/>
-          </a:bodyPr>
-          <a:lstStyle>
-            <a:lvl1pPr indent="0" algn="ctr">
+            <a:lvl1pPr indent="0">
               <a:buNone/>
               <a:defRPr b="0" lang="en-US" sz="1400" spc="-1" strike="noStrike">
                 <a:solidFill>
@@ -4252,7 +3216,7 @@
             </a:lvl1pPr>
           </a:lstStyle>
           <a:p>
-            <a:pPr indent="0" algn="ctr">
+            <a:pPr indent="0">
               <a:buNone/>
             </a:pPr>
             <a:r>
@@ -4262,75 +3226,9 @@
                 </a:solidFill>
                 <a:latin typeface="Times New Roman"/>
               </a:rPr>
-              <a:t>&lt;footer&gt;</a:t>
+              <a:t>&lt;date/time&gt;</a:t>
             </a:r>
             <a:endParaRPr b="0" lang="en-US" sz="1400" spc="-1" strike="noStrike">
-              <a:solidFill>
-                <a:srgbClr val="000000"/>
-              </a:solidFill>
-              <a:latin typeface="Times New Roman"/>
-            </a:endParaRPr>
-          </a:p>
-        </p:txBody>
-      </p:sp>
-      <p:sp>
-        <p:nvSpPr>
-          <p:cNvPr id="27" name="PlaceHolder 5"/>
-          <p:cNvSpPr>
-            <a:spLocks noGrp="1"/>
-          </p:cNvSpPr>
-          <p:nvPr>
-            <p:ph type="sldNum" idx="15"/>
-          </p:nvPr>
-        </p:nvSpPr>
-        <p:spPr>
-          <a:xfrm>
-            <a:off x="10831680" y="9906120"/>
-            <a:ext cx="3526920" cy="569520"/>
-          </a:xfrm>
-          <a:prstGeom prst="rect">
-            <a:avLst/>
-          </a:prstGeom>
-          <a:noFill/>
-          <a:ln w="0">
-            <a:noFill/>
-          </a:ln>
-        </p:spPr>
-        <p:txBody>
-          <a:bodyPr numCol="1" spcCol="0" lIns="147600" rIns="147600" tIns="73800" bIns="73800" anchor="ctr">
-            <a:noAutofit/>
-          </a:bodyPr>
-          <a:lstStyle>
-            <a:lvl1pPr indent="0" algn="r" defTabSz="1473120">
-              <a:lnSpc>
-                <a:spcPct val="100000"/>
-              </a:lnSpc>
-              <a:buNone/>
-              <a:defRPr b="0" lang="en-US" sz="2000" spc="-1" strike="noStrike">
-                <a:solidFill>
-                  <a:srgbClr val="898989"/>
-                </a:solidFill>
-                <a:latin typeface="Calibri"/>
-              </a:defRPr>
-            </a:lvl1pPr>
-          </a:lstStyle>
-          <a:p>
-            <a:pPr indent="0" algn="r" defTabSz="1473120">
-              <a:lnSpc>
-                <a:spcPct val="100000"/>
-              </a:lnSpc>
-              <a:buNone/>
-            </a:pPr>
-            <a:fld id="{EDA7DE55-1B11-4366-82BC-89D776094F82}" type="slidenum">
-              <a:rPr b="0" lang="en-US" sz="2000" spc="-1" strike="noStrike">
-                <a:solidFill>
-                  <a:srgbClr val="898989"/>
-                </a:solidFill>
-                <a:latin typeface="Calibri"/>
-              </a:rPr>
-              <a:t>&lt;number&gt;</a:t>
-            </a:fld>
-            <a:endParaRPr b="0" lang="en-US" sz="2000" spc="-1" strike="noStrike">
               <a:solidFill>
                 <a:srgbClr val="000000"/>
               </a:solidFill>
@@ -4374,7 +3272,7 @@
       </p:grpSpPr>
       <p:sp>
         <p:nvSpPr>
-          <p:cNvPr id="28" name="PlaceHolder 1"/>
+          <p:cNvPr id="22" name="PlaceHolder 1"/>
           <p:cNvSpPr>
             <a:spLocks noGrp="1"/>
           </p:cNvSpPr>
@@ -4385,7 +3283,7 @@
         <p:spPr>
           <a:xfrm>
             <a:off x="755640" y="428760"/>
-            <a:ext cx="13602960" cy="1780920"/>
+            <a:ext cx="13602240" cy="1780200"/>
           </a:xfrm>
           <a:prstGeom prst="rect">
             <a:avLst/>
@@ -4396,37 +3294,34 @@
           </a:ln>
         </p:spPr>
         <p:txBody>
-          <a:bodyPr numCol="1" spcCol="0" lIns="147600" rIns="147600" tIns="73800" bIns="73800" anchor="ctr">
+          <a:bodyPr numCol="1" spcCol="0" lIns="0" rIns="0" tIns="0" bIns="0" anchor="ctr">
             <a:noAutofit/>
           </a:bodyPr>
           <a:p>
-            <a:pPr indent="0" algn="ctr" defTabSz="1473120">
-              <a:lnSpc>
-                <a:spcPct val="100000"/>
-              </a:lnSpc>
+            <a:pPr indent="0">
               <a:buNone/>
             </a:pPr>
             <a:r>
-              <a:rPr b="0" lang="en-US" sz="7100" spc="-1" strike="noStrike">
-                <a:solidFill>
-                  <a:schemeClr val="dk1"/>
-                </a:solidFill>
-                <a:latin typeface="Calibri"/>
+              <a:rPr b="0" lang="en-US" sz="1800" spc="-1" strike="noStrike">
+                <a:solidFill>
+                  <a:srgbClr val="000000"/>
+                </a:solidFill>
+                <a:latin typeface="Arial"/>
               </a:rPr>
-              <a:t>Click to edit Master title style</a:t>
-            </a:r>
-            <a:endParaRPr b="0" lang="en-US" sz="7100" spc="-1" strike="noStrike">
+              <a:t>Click to edit the title text format</a:t>
+            </a:r>
+            <a:endParaRPr b="0" lang="en-US" sz="1800" spc="-1" strike="noStrike">
               <a:solidFill>
-                <a:schemeClr val="dk1"/>
+                <a:srgbClr val="000000"/>
               </a:solidFill>
-              <a:latin typeface="Calibri"/>
+              <a:latin typeface="Arial"/>
             </a:endParaRPr>
           </a:p>
         </p:txBody>
       </p:sp>
       <p:sp>
         <p:nvSpPr>
-          <p:cNvPr id="29" name="PlaceHolder 2"/>
+          <p:cNvPr id="23" name="PlaceHolder 2"/>
           <p:cNvSpPr>
             <a:spLocks noGrp="1"/>
           </p:cNvSpPr>
@@ -4437,7 +3332,7 @@
         <p:spPr>
           <a:xfrm>
             <a:off x="755640" y="2494080"/>
-            <a:ext cx="6675120" cy="7053480"/>
+            <a:ext cx="6637680" cy="7053840"/>
           </a:xfrm>
           <a:prstGeom prst="rect">
             <a:avLst/>
@@ -4448,164 +3343,210 @@
           </a:ln>
         </p:spPr>
         <p:txBody>
-          <a:bodyPr numCol="1" spcCol="0" lIns="147600" rIns="147600" tIns="73800" bIns="73800" anchor="t">
-            <a:noAutofit/>
+          <a:bodyPr numCol="1" spcCol="0" lIns="0" rIns="0" tIns="0" bIns="0" anchor="t">
+            <a:normAutofit/>
           </a:bodyPr>
           <a:p>
-            <a:pPr marL="552600" indent="-552600" defTabSz="1473120">
-              <a:lnSpc>
-                <a:spcPct val="100000"/>
-              </a:lnSpc>
+            <a:pPr marL="432000" indent="-324000">
               <a:spcBef>
-                <a:spcPts val="901"/>
+                <a:spcPts val="1417"/>
               </a:spcBef>
               <a:buClr>
                 <a:srgbClr val="000000"/>
               </a:buClr>
-              <a:buFont typeface="Arial"/>
-              <a:buChar char="•"/>
+              <a:buSzPct val="45000"/>
+              <a:buFont typeface="Wingdings" charset="2"/>
+              <a:buChar char=""/>
             </a:pPr>
             <a:r>
-              <a:rPr b="0" lang="en-US" sz="4500" spc="-1" strike="noStrike">
-                <a:solidFill>
-                  <a:schemeClr val="dk1"/>
-                </a:solidFill>
-                <a:latin typeface="Calibri"/>
+              <a:rPr b="0" lang="en-US" sz="1800" spc="-1" strike="noStrike">
+                <a:solidFill>
+                  <a:srgbClr val="000000"/>
+                </a:solidFill>
+                <a:latin typeface="Arial"/>
               </a:rPr>
-              <a:t>Click to edit Master text styles</a:t>
-            </a:r>
-            <a:endParaRPr b="0" lang="en-US" sz="4500" spc="-1" strike="noStrike">
+              <a:t>Click to edit the outline text format</a:t>
+            </a:r>
+            <a:endParaRPr b="0" lang="en-US" sz="1800" spc="-1" strike="noStrike">
               <a:solidFill>
-                <a:schemeClr val="dk1"/>
+                <a:srgbClr val="000000"/>
               </a:solidFill>
-              <a:latin typeface="Calibri"/>
+              <a:latin typeface="Arial"/>
             </a:endParaRPr>
           </a:p>
           <a:p>
-            <a:pPr lvl="1" marL="1197000" indent="-460440" defTabSz="1473120">
-              <a:lnSpc>
-                <a:spcPct val="100000"/>
-              </a:lnSpc>
+            <a:pPr lvl="1" marL="864000" indent="-324000">
               <a:spcBef>
-                <a:spcPts val="780"/>
+                <a:spcPts val="1134"/>
               </a:spcBef>
               <a:buClr>
                 <a:srgbClr val="000000"/>
               </a:buClr>
-              <a:buFont typeface="Arial"/>
-              <a:buChar char="–"/>
+              <a:buSzPct val="75000"/>
+              <a:buFont typeface="Symbol" charset="2"/>
+              <a:buChar char=""/>
             </a:pPr>
             <a:r>
-              <a:rPr b="0" lang="en-US" sz="3900" spc="-1" strike="noStrike">
-                <a:solidFill>
-                  <a:schemeClr val="dk1"/>
-                </a:solidFill>
-                <a:latin typeface="Calibri"/>
+              <a:rPr b="0" lang="en-US" sz="1800" spc="-1" strike="noStrike">
+                <a:solidFill>
+                  <a:srgbClr val="000000"/>
+                </a:solidFill>
+                <a:latin typeface="Arial"/>
               </a:rPr>
-              <a:t>Second level</a:t>
-            </a:r>
-            <a:endParaRPr b="0" lang="en-US" sz="3900" spc="-1" strike="noStrike">
+              <a:t>Second Outline Level</a:t>
+            </a:r>
+            <a:endParaRPr b="0" lang="en-US" sz="1800" spc="-1" strike="noStrike">
               <a:solidFill>
-                <a:schemeClr val="dk1"/>
+                <a:srgbClr val="000000"/>
               </a:solidFill>
-              <a:latin typeface="Calibri"/>
+              <a:latin typeface="Arial"/>
             </a:endParaRPr>
           </a:p>
           <a:p>
-            <a:pPr lvl="2" marL="1841400" indent="-368280" defTabSz="1473120">
-              <a:lnSpc>
-                <a:spcPct val="100000"/>
-              </a:lnSpc>
+            <a:pPr lvl="2" marL="1296000" indent="-288000">
               <a:spcBef>
-                <a:spcPts val="641"/>
+                <a:spcPts val="850"/>
               </a:spcBef>
               <a:buClr>
                 <a:srgbClr val="000000"/>
               </a:buClr>
-              <a:buFont typeface="Arial"/>
-              <a:buChar char="•"/>
+              <a:buSzPct val="45000"/>
+              <a:buFont typeface="Wingdings" charset="2"/>
+              <a:buChar char=""/>
             </a:pPr>
             <a:r>
-              <a:rPr b="0" lang="en-US" sz="3200" spc="-1" strike="noStrike">
-                <a:solidFill>
-                  <a:schemeClr val="dk1"/>
-                </a:solidFill>
-                <a:latin typeface="Calibri"/>
+              <a:rPr b="0" lang="en-US" sz="1800" spc="-1" strike="noStrike">
+                <a:solidFill>
+                  <a:srgbClr val="000000"/>
+                </a:solidFill>
+                <a:latin typeface="Arial"/>
               </a:rPr>
-              <a:t>Third level</a:t>
-            </a:r>
-            <a:endParaRPr b="0" lang="en-US" sz="3200" spc="-1" strike="noStrike">
+              <a:t>Third Outline Level</a:t>
+            </a:r>
+            <a:endParaRPr b="0" lang="en-US" sz="1800" spc="-1" strike="noStrike">
               <a:solidFill>
-                <a:schemeClr val="dk1"/>
+                <a:srgbClr val="000000"/>
               </a:solidFill>
-              <a:latin typeface="Calibri"/>
+              <a:latin typeface="Arial"/>
             </a:endParaRPr>
           </a:p>
           <a:p>
-            <a:pPr lvl="3" marL="2579760" indent="-368280" defTabSz="1473120">
-              <a:lnSpc>
-                <a:spcPct val="100000"/>
-              </a:lnSpc>
+            <a:pPr lvl="3" marL="1728000" indent="-216000">
               <a:spcBef>
-                <a:spcPts val="581"/>
+                <a:spcPts val="567"/>
               </a:spcBef>
               <a:buClr>
                 <a:srgbClr val="000000"/>
               </a:buClr>
-              <a:buFont typeface="Arial"/>
-              <a:buChar char="–"/>
+              <a:buSzPct val="75000"/>
+              <a:buFont typeface="Symbol" charset="2"/>
+              <a:buChar char=""/>
             </a:pPr>
             <a:r>
-              <a:rPr b="0" lang="en-US" sz="2900" spc="-1" strike="noStrike">
-                <a:solidFill>
-                  <a:schemeClr val="dk1"/>
-                </a:solidFill>
-                <a:latin typeface="Calibri"/>
+              <a:rPr b="0" lang="en-US" sz="1800" spc="-1" strike="noStrike">
+                <a:solidFill>
+                  <a:srgbClr val="000000"/>
+                </a:solidFill>
+                <a:latin typeface="Arial"/>
               </a:rPr>
-              <a:t>Fourth level</a:t>
-            </a:r>
-            <a:endParaRPr b="0" lang="en-US" sz="2900" spc="-1" strike="noStrike">
+              <a:t>Fourth Outline Level</a:t>
+            </a:r>
+            <a:endParaRPr b="0" lang="en-US" sz="1800" spc="-1" strike="noStrike">
               <a:solidFill>
-                <a:schemeClr val="dk1"/>
+                <a:srgbClr val="000000"/>
               </a:solidFill>
-              <a:latin typeface="Calibri"/>
+              <a:latin typeface="Arial"/>
             </a:endParaRPr>
           </a:p>
           <a:p>
-            <a:pPr lvl="4" marL="3316320" indent="-368280" defTabSz="1473120">
-              <a:lnSpc>
-                <a:spcPct val="100000"/>
-              </a:lnSpc>
+            <a:pPr lvl="4" marL="2160000" indent="-216000">
               <a:spcBef>
-                <a:spcPts val="581"/>
+                <a:spcPts val="283"/>
               </a:spcBef>
               <a:buClr>
                 <a:srgbClr val="000000"/>
               </a:buClr>
-              <a:buFont typeface="Arial"/>
-              <a:buChar char="»"/>
+              <a:buSzPct val="45000"/>
+              <a:buFont typeface="Wingdings" charset="2"/>
+              <a:buChar char=""/>
             </a:pPr>
             <a:r>
-              <a:rPr b="0" lang="en-US" sz="2900" spc="-1" strike="noStrike">
-                <a:solidFill>
-                  <a:schemeClr val="dk1"/>
-                </a:solidFill>
-                <a:latin typeface="Calibri"/>
+              <a:rPr b="0" lang="en-US" sz="1800" spc="-1" strike="noStrike">
+                <a:solidFill>
+                  <a:srgbClr val="000000"/>
+                </a:solidFill>
+                <a:latin typeface="Arial"/>
               </a:rPr>
-              <a:t>Fifth level</a:t>
-            </a:r>
-            <a:endParaRPr b="0" lang="en-US" sz="2900" spc="-1" strike="noStrike">
+              <a:t>Fifth Outline Level</a:t>
+            </a:r>
+            <a:endParaRPr b="0" lang="en-US" sz="1800" spc="-1" strike="noStrike">
               <a:solidFill>
-                <a:schemeClr val="dk1"/>
+                <a:srgbClr val="000000"/>
               </a:solidFill>
-              <a:latin typeface="Calibri"/>
+              <a:latin typeface="Arial"/>
             </a:endParaRPr>
           </a:p>
-        </p:txBody>
-      </p:sp>
-      <p:sp>
-        <p:nvSpPr>
-          <p:cNvPr id="30" name="PlaceHolder 3"/>
+          <a:p>
+            <a:pPr lvl="5" marL="2592000" indent="-216000">
+              <a:spcBef>
+                <a:spcPts val="283"/>
+              </a:spcBef>
+              <a:buClr>
+                <a:srgbClr val="000000"/>
+              </a:buClr>
+              <a:buSzPct val="45000"/>
+              <a:buFont typeface="Wingdings" charset="2"/>
+              <a:buChar char=""/>
+            </a:pPr>
+            <a:r>
+              <a:rPr b="0" lang="en-US" sz="1800" spc="-1" strike="noStrike">
+                <a:solidFill>
+                  <a:srgbClr val="000000"/>
+                </a:solidFill>
+                <a:latin typeface="Arial"/>
+              </a:rPr>
+              <a:t>Sixth Outline Level</a:t>
+            </a:r>
+            <a:endParaRPr b="0" lang="en-US" sz="1800" spc="-1" strike="noStrike">
+              <a:solidFill>
+                <a:srgbClr val="000000"/>
+              </a:solidFill>
+              <a:latin typeface="Arial"/>
+            </a:endParaRPr>
+          </a:p>
+          <a:p>
+            <a:pPr lvl="6" marL="3024000" indent="-216000">
+              <a:spcBef>
+                <a:spcPts val="283"/>
+              </a:spcBef>
+              <a:buClr>
+                <a:srgbClr val="000000"/>
+              </a:buClr>
+              <a:buSzPct val="45000"/>
+              <a:buFont typeface="Wingdings" charset="2"/>
+              <a:buChar char=""/>
+            </a:pPr>
+            <a:r>
+              <a:rPr b="0" lang="en-US" sz="1800" spc="-1" strike="noStrike">
+                <a:solidFill>
+                  <a:srgbClr val="000000"/>
+                </a:solidFill>
+                <a:latin typeface="Arial"/>
+              </a:rPr>
+              <a:t>Seventh Outline Level</a:t>
+            </a:r>
+            <a:endParaRPr b="0" lang="en-US" sz="1800" spc="-1" strike="noStrike">
+              <a:solidFill>
+                <a:srgbClr val="000000"/>
+              </a:solidFill>
+              <a:latin typeface="Arial"/>
+            </a:endParaRPr>
+          </a:p>
+        </p:txBody>
+      </p:sp>
+      <p:sp>
+        <p:nvSpPr>
+          <p:cNvPr id="24" name="PlaceHolder 3"/>
           <p:cNvSpPr>
             <a:spLocks noGrp="1"/>
           </p:cNvSpPr>
@@ -4615,8 +3556,8 @@
         </p:nvSpPr>
         <p:spPr>
           <a:xfrm>
-            <a:off x="7683120" y="2494080"/>
-            <a:ext cx="6675120" cy="7053480"/>
+            <a:off x="7725960" y="2494080"/>
+            <a:ext cx="6637680" cy="7053840"/>
           </a:xfrm>
           <a:prstGeom prst="rect">
             <a:avLst/>
@@ -4627,175 +3568,221 @@
           </a:ln>
         </p:spPr>
         <p:txBody>
-          <a:bodyPr numCol="1" spcCol="0" lIns="147600" rIns="147600" tIns="73800" bIns="73800" anchor="t">
-            <a:noAutofit/>
+          <a:bodyPr numCol="1" spcCol="0" lIns="0" rIns="0" tIns="0" bIns="0" anchor="t">
+            <a:normAutofit/>
           </a:bodyPr>
           <a:p>
-            <a:pPr marL="552600" indent="-552600" defTabSz="1473120">
-              <a:lnSpc>
-                <a:spcPct val="100000"/>
-              </a:lnSpc>
+            <a:pPr marL="432000" indent="-324000">
               <a:spcBef>
-                <a:spcPts val="901"/>
+                <a:spcPts val="1417"/>
               </a:spcBef>
               <a:buClr>
                 <a:srgbClr val="000000"/>
               </a:buClr>
-              <a:buFont typeface="Arial"/>
-              <a:buChar char="•"/>
+              <a:buSzPct val="45000"/>
+              <a:buFont typeface="Wingdings" charset="2"/>
+              <a:buChar char=""/>
             </a:pPr>
             <a:r>
-              <a:rPr b="0" lang="en-US" sz="4500" spc="-1" strike="noStrike">
-                <a:solidFill>
-                  <a:schemeClr val="dk1"/>
-                </a:solidFill>
-                <a:latin typeface="Calibri"/>
+              <a:rPr b="0" lang="en-US" sz="1800" spc="-1" strike="noStrike">
+                <a:solidFill>
+                  <a:srgbClr val="000000"/>
+                </a:solidFill>
+                <a:latin typeface="Arial"/>
               </a:rPr>
-              <a:t>Click to edit Master text styles</a:t>
-            </a:r>
-            <a:endParaRPr b="0" lang="en-US" sz="4500" spc="-1" strike="noStrike">
+              <a:t>Click to edit the outline text format</a:t>
+            </a:r>
+            <a:endParaRPr b="0" lang="en-US" sz="1800" spc="-1" strike="noStrike">
               <a:solidFill>
-                <a:schemeClr val="dk1"/>
+                <a:srgbClr val="000000"/>
               </a:solidFill>
-              <a:latin typeface="Calibri"/>
+              <a:latin typeface="Arial"/>
             </a:endParaRPr>
           </a:p>
           <a:p>
-            <a:pPr lvl="1" marL="1197000" indent="-460440" defTabSz="1473120">
-              <a:lnSpc>
-                <a:spcPct val="100000"/>
-              </a:lnSpc>
+            <a:pPr lvl="1" marL="864000" indent="-324000">
               <a:spcBef>
-                <a:spcPts val="780"/>
+                <a:spcPts val="1134"/>
               </a:spcBef>
               <a:buClr>
                 <a:srgbClr val="000000"/>
               </a:buClr>
-              <a:buFont typeface="Arial"/>
-              <a:buChar char="–"/>
+              <a:buSzPct val="75000"/>
+              <a:buFont typeface="Symbol" charset="2"/>
+              <a:buChar char=""/>
             </a:pPr>
             <a:r>
-              <a:rPr b="0" lang="en-US" sz="3900" spc="-1" strike="noStrike">
-                <a:solidFill>
-                  <a:schemeClr val="dk1"/>
-                </a:solidFill>
-                <a:latin typeface="Calibri"/>
+              <a:rPr b="0" lang="en-US" sz="1800" spc="-1" strike="noStrike">
+                <a:solidFill>
+                  <a:srgbClr val="000000"/>
+                </a:solidFill>
+                <a:latin typeface="Arial"/>
               </a:rPr>
-              <a:t>Second level</a:t>
-            </a:r>
-            <a:endParaRPr b="0" lang="en-US" sz="3900" spc="-1" strike="noStrike">
+              <a:t>Second Outline Level</a:t>
+            </a:r>
+            <a:endParaRPr b="0" lang="en-US" sz="1800" spc="-1" strike="noStrike">
               <a:solidFill>
-                <a:schemeClr val="dk1"/>
+                <a:srgbClr val="000000"/>
               </a:solidFill>
-              <a:latin typeface="Calibri"/>
+              <a:latin typeface="Arial"/>
             </a:endParaRPr>
           </a:p>
           <a:p>
-            <a:pPr lvl="2" marL="1841400" indent="-368280" defTabSz="1473120">
-              <a:lnSpc>
-                <a:spcPct val="100000"/>
-              </a:lnSpc>
+            <a:pPr lvl="2" marL="1296000" indent="-288000">
               <a:spcBef>
-                <a:spcPts val="641"/>
+                <a:spcPts val="850"/>
               </a:spcBef>
               <a:buClr>
                 <a:srgbClr val="000000"/>
               </a:buClr>
-              <a:buFont typeface="Arial"/>
-              <a:buChar char="•"/>
+              <a:buSzPct val="45000"/>
+              <a:buFont typeface="Wingdings" charset="2"/>
+              <a:buChar char=""/>
             </a:pPr>
             <a:r>
-              <a:rPr b="0" lang="en-US" sz="3200" spc="-1" strike="noStrike">
-                <a:solidFill>
-                  <a:schemeClr val="dk1"/>
-                </a:solidFill>
-                <a:latin typeface="Calibri"/>
+              <a:rPr b="0" lang="en-US" sz="1800" spc="-1" strike="noStrike">
+                <a:solidFill>
+                  <a:srgbClr val="000000"/>
+                </a:solidFill>
+                <a:latin typeface="Arial"/>
               </a:rPr>
-              <a:t>Third level</a:t>
-            </a:r>
-            <a:endParaRPr b="0" lang="en-US" sz="3200" spc="-1" strike="noStrike">
+              <a:t>Third Outline Level</a:t>
+            </a:r>
+            <a:endParaRPr b="0" lang="en-US" sz="1800" spc="-1" strike="noStrike">
               <a:solidFill>
-                <a:schemeClr val="dk1"/>
+                <a:srgbClr val="000000"/>
               </a:solidFill>
-              <a:latin typeface="Calibri"/>
+              <a:latin typeface="Arial"/>
             </a:endParaRPr>
           </a:p>
           <a:p>
-            <a:pPr lvl="3" marL="2579760" indent="-368280" defTabSz="1473120">
-              <a:lnSpc>
-                <a:spcPct val="100000"/>
-              </a:lnSpc>
+            <a:pPr lvl="3" marL="1728000" indent="-216000">
               <a:spcBef>
-                <a:spcPts val="581"/>
+                <a:spcPts val="567"/>
               </a:spcBef>
               <a:buClr>
                 <a:srgbClr val="000000"/>
               </a:buClr>
-              <a:buFont typeface="Arial"/>
-              <a:buChar char="–"/>
+              <a:buSzPct val="75000"/>
+              <a:buFont typeface="Symbol" charset="2"/>
+              <a:buChar char=""/>
             </a:pPr>
             <a:r>
-              <a:rPr b="0" lang="en-US" sz="2900" spc="-1" strike="noStrike">
-                <a:solidFill>
-                  <a:schemeClr val="dk1"/>
-                </a:solidFill>
-                <a:latin typeface="Calibri"/>
+              <a:rPr b="0" lang="en-US" sz="1800" spc="-1" strike="noStrike">
+                <a:solidFill>
+                  <a:srgbClr val="000000"/>
+                </a:solidFill>
+                <a:latin typeface="Arial"/>
               </a:rPr>
-              <a:t>Fourth level</a:t>
-            </a:r>
-            <a:endParaRPr b="0" lang="en-US" sz="2900" spc="-1" strike="noStrike">
+              <a:t>Fourth Outline Level</a:t>
+            </a:r>
+            <a:endParaRPr b="0" lang="en-US" sz="1800" spc="-1" strike="noStrike">
               <a:solidFill>
-                <a:schemeClr val="dk1"/>
+                <a:srgbClr val="000000"/>
               </a:solidFill>
-              <a:latin typeface="Calibri"/>
+              <a:latin typeface="Arial"/>
             </a:endParaRPr>
           </a:p>
           <a:p>
-            <a:pPr lvl="4" marL="3316320" indent="-368280" defTabSz="1473120">
-              <a:lnSpc>
-                <a:spcPct val="100000"/>
-              </a:lnSpc>
+            <a:pPr lvl="4" marL="2160000" indent="-216000">
               <a:spcBef>
-                <a:spcPts val="581"/>
+                <a:spcPts val="283"/>
               </a:spcBef>
               <a:buClr>
                 <a:srgbClr val="000000"/>
               </a:buClr>
-              <a:buFont typeface="Arial"/>
-              <a:buChar char="»"/>
+              <a:buSzPct val="45000"/>
+              <a:buFont typeface="Wingdings" charset="2"/>
+              <a:buChar char=""/>
             </a:pPr>
             <a:r>
-              <a:rPr b="0" lang="en-US" sz="2900" spc="-1" strike="noStrike">
-                <a:solidFill>
-                  <a:schemeClr val="dk1"/>
-                </a:solidFill>
-                <a:latin typeface="Calibri"/>
+              <a:rPr b="0" lang="en-US" sz="1800" spc="-1" strike="noStrike">
+                <a:solidFill>
+                  <a:srgbClr val="000000"/>
+                </a:solidFill>
+                <a:latin typeface="Arial"/>
               </a:rPr>
-              <a:t>Fifth level</a:t>
-            </a:r>
-            <a:endParaRPr b="0" lang="en-US" sz="2900" spc="-1" strike="noStrike">
+              <a:t>Fifth Outline Level</a:t>
+            </a:r>
+            <a:endParaRPr b="0" lang="en-US" sz="1800" spc="-1" strike="noStrike">
               <a:solidFill>
-                <a:schemeClr val="dk1"/>
+                <a:srgbClr val="000000"/>
               </a:solidFill>
-              <a:latin typeface="Calibri"/>
+              <a:latin typeface="Arial"/>
             </a:endParaRPr>
           </a:p>
-        </p:txBody>
-      </p:sp>
-      <p:sp>
-        <p:nvSpPr>
-          <p:cNvPr id="31" name="PlaceHolder 4"/>
-          <p:cNvSpPr>
-            <a:spLocks noGrp="1"/>
-          </p:cNvSpPr>
-          <p:nvPr>
-            <p:ph type="dt" idx="16"/>
+          <a:p>
+            <a:pPr lvl="5" marL="2592000" indent="-216000">
+              <a:spcBef>
+                <a:spcPts val="283"/>
+              </a:spcBef>
+              <a:buClr>
+                <a:srgbClr val="000000"/>
+              </a:buClr>
+              <a:buSzPct val="45000"/>
+              <a:buFont typeface="Wingdings" charset="2"/>
+              <a:buChar char=""/>
+            </a:pPr>
+            <a:r>
+              <a:rPr b="0" lang="en-US" sz="1800" spc="-1" strike="noStrike">
+                <a:solidFill>
+                  <a:srgbClr val="000000"/>
+                </a:solidFill>
+                <a:latin typeface="Arial"/>
+              </a:rPr>
+              <a:t>Sixth Outline Level</a:t>
+            </a:r>
+            <a:endParaRPr b="0" lang="en-US" sz="1800" spc="-1" strike="noStrike">
+              <a:solidFill>
+                <a:srgbClr val="000000"/>
+              </a:solidFill>
+              <a:latin typeface="Arial"/>
+            </a:endParaRPr>
+          </a:p>
+          <a:p>
+            <a:pPr lvl="6" marL="3024000" indent="-216000">
+              <a:spcBef>
+                <a:spcPts val="283"/>
+              </a:spcBef>
+              <a:buClr>
+                <a:srgbClr val="000000"/>
+              </a:buClr>
+              <a:buSzPct val="45000"/>
+              <a:buFont typeface="Wingdings" charset="2"/>
+              <a:buChar char=""/>
+            </a:pPr>
+            <a:r>
+              <a:rPr b="0" lang="en-US" sz="1800" spc="-1" strike="noStrike">
+                <a:solidFill>
+                  <a:srgbClr val="000000"/>
+                </a:solidFill>
+                <a:latin typeface="Arial"/>
+              </a:rPr>
+              <a:t>Seventh Outline Level</a:t>
+            </a:r>
+            <a:endParaRPr b="0" lang="en-US" sz="1800" spc="-1" strike="noStrike">
+              <a:solidFill>
+                <a:srgbClr val="000000"/>
+              </a:solidFill>
+              <a:latin typeface="Arial"/>
+            </a:endParaRPr>
+          </a:p>
+        </p:txBody>
+      </p:sp>
+      <p:sp>
+        <p:nvSpPr>
+          <p:cNvPr id="25" name="PlaceHolder 4"/>
+          <p:cNvSpPr>
+            <a:spLocks noGrp="1"/>
+          </p:cNvSpPr>
+          <p:nvPr>
+            <p:ph type="ftr" idx="16"/>
           </p:nvPr>
         </p:nvSpPr>
         <p:spPr>
           <a:xfrm>
-            <a:off x="755640" y="9906120"/>
-            <a:ext cx="3526920" cy="569520"/>
+            <a:off x="5164200" y="9906120"/>
+            <a:ext cx="4785120" cy="568800"/>
           </a:xfrm>
           <a:prstGeom prst="rect">
             <a:avLst/>
@@ -4810,40 +3797,42 @@
             <a:noAutofit/>
           </a:bodyPr>
           <a:lstStyle>
-            <a:lvl1pPr indent="0" defTabSz="1474200">
+            <a:lvl1pPr indent="0" algn="ctr">
               <a:lnSpc>
                 <a:spcPct val="100000"/>
               </a:lnSpc>
               <a:buNone/>
-              <a:defRPr b="0" lang="en-US" sz="2000" spc="-1" strike="noStrike">
-                <a:solidFill>
-                  <a:schemeClr val="dk1">
-                    <a:tint val="75000"/>
-                  </a:schemeClr>
-                </a:solidFill>
-                <a:latin typeface="Calibri"/>
+              <a:tabLst>
+                <a:tab algn="l" pos="0"/>
+              </a:tabLst>
+              <a:defRPr b="0" lang="en-US" sz="1400" spc="-1" strike="noStrike">
+                <a:solidFill>
+                  <a:srgbClr val="000000"/>
+                </a:solidFill>
+                <a:latin typeface="Times New Roman"/>
               </a:defRPr>
             </a:lvl1pPr>
           </a:lstStyle>
           <a:p>
-            <a:pPr indent="0" defTabSz="1474200">
+            <a:pPr indent="0" algn="ctr">
               <a:lnSpc>
                 <a:spcPct val="100000"/>
               </a:lnSpc>
               <a:buNone/>
+              <a:tabLst>
+                <a:tab algn="l" pos="0"/>
+              </a:tabLst>
             </a:pPr>
             <a:r>
-              <a:rPr b="0" lang="en-US" sz="2000" spc="-1" strike="noStrike">
-                <a:solidFill>
-                  <a:schemeClr val="dk1">
-                    <a:tint val="75000"/>
-                  </a:schemeClr>
-                </a:solidFill>
-                <a:latin typeface="Calibri"/>
+              <a:rPr b="0" lang="en-US" sz="1400" spc="-1" strike="noStrike">
+                <a:solidFill>
+                  <a:srgbClr val="000000"/>
+                </a:solidFill>
+                <a:latin typeface="Times New Roman"/>
               </a:rPr>
-              <a:t>&lt;date/time&gt;</a:t>
-            </a:r>
-            <a:endParaRPr b="0" lang="en-US" sz="2000" spc="-1" strike="noStrike">
+              <a:t>&lt;footer&gt;</a:t>
+            </a:r>
+            <a:endParaRPr b="0" lang="en-US" sz="1400" spc="-1" strike="noStrike">
               <a:solidFill>
                 <a:srgbClr val="000000"/>
               </a:solidFill>
@@ -4854,18 +3843,18 @@
       </p:sp>
       <p:sp>
         <p:nvSpPr>
-          <p:cNvPr id="32" name="PlaceHolder 5"/>
-          <p:cNvSpPr>
-            <a:spLocks noGrp="1"/>
-          </p:cNvSpPr>
-          <p:nvPr>
-            <p:ph type="ftr" idx="17"/>
+          <p:cNvPr id="26" name="PlaceHolder 5"/>
+          <p:cNvSpPr>
+            <a:spLocks noGrp="1"/>
+          </p:cNvSpPr>
+          <p:nvPr>
+            <p:ph type="sldNum" idx="17"/>
           </p:nvPr>
         </p:nvSpPr>
         <p:spPr>
           <a:xfrm>
-            <a:off x="5164200" y="9906120"/>
-            <a:ext cx="4785840" cy="569520"/>
+            <a:off x="10831680" y="9906120"/>
+            <a:ext cx="3526200" cy="568800"/>
           </a:xfrm>
           <a:prstGeom prst="rect">
             <a:avLst/>
@@ -4876,34 +3865,46 @@
           </a:ln>
         </p:spPr>
         <p:txBody>
-          <a:bodyPr lIns="147600" rIns="147600" tIns="73800" bIns="73800" anchor="ctr">
+          <a:bodyPr numCol="1" spcCol="0" lIns="147600" rIns="147600" tIns="73800" bIns="73800" anchor="ctr">
             <a:noAutofit/>
           </a:bodyPr>
           <a:lstStyle>
-            <a:lvl1pPr indent="0" algn="ctr">
-              <a:buNone/>
-              <a:defRPr b="0" lang="en-US" sz="1400" spc="-1" strike="noStrike">
-                <a:solidFill>
-                  <a:srgbClr val="000000"/>
-                </a:solidFill>
-                <a:latin typeface="Times New Roman"/>
+            <a:lvl1pPr indent="0" algn="r" defTabSz="1473120">
+              <a:lnSpc>
+                <a:spcPct val="100000"/>
+              </a:lnSpc>
+              <a:buNone/>
+              <a:tabLst>
+                <a:tab algn="l" pos="0"/>
+              </a:tabLst>
+              <a:defRPr b="0" lang="en-US" sz="2000" spc="-1" strike="noStrike">
+                <a:solidFill>
+                  <a:srgbClr val="898989"/>
+                </a:solidFill>
+                <a:latin typeface="Calibri"/>
               </a:defRPr>
             </a:lvl1pPr>
           </a:lstStyle>
           <a:p>
-            <a:pPr indent="0" algn="ctr">
-              <a:buNone/>
+            <a:pPr indent="0" algn="r" defTabSz="1473120">
+              <a:lnSpc>
+                <a:spcPct val="100000"/>
+              </a:lnSpc>
+              <a:buNone/>
+              <a:tabLst>
+                <a:tab algn="l" pos="0"/>
+              </a:tabLst>
             </a:pPr>
-            <a:r>
-              <a:rPr b="0" lang="en-US" sz="1400" spc="-1" strike="noStrike">
-                <a:solidFill>
-                  <a:srgbClr val="000000"/>
-                </a:solidFill>
-                <a:latin typeface="Times New Roman"/>
+            <a:fld id="{EEE571FF-56D1-474A-87E4-53FDD5D5482F}" type="slidenum">
+              <a:rPr b="0" lang="en-US" sz="2000" spc="-1" strike="noStrike">
+                <a:solidFill>
+                  <a:srgbClr val="898989"/>
+                </a:solidFill>
+                <a:latin typeface="Calibri"/>
               </a:rPr>
-              <a:t>&lt;footer&gt;</a:t>
-            </a:r>
-            <a:endParaRPr b="0" lang="en-US" sz="1400" spc="-1" strike="noStrike">
+              <a:t>&lt;number&gt;</a:t>
+            </a:fld>
+            <a:endParaRPr b="0" lang="en-US" sz="2000" spc="-1" strike="noStrike">
               <a:solidFill>
                 <a:srgbClr val="000000"/>
               </a:solidFill>
@@ -4914,18 +3915,18 @@
       </p:sp>
       <p:sp>
         <p:nvSpPr>
-          <p:cNvPr id="33" name="PlaceHolder 6"/>
-          <p:cNvSpPr>
-            <a:spLocks noGrp="1"/>
-          </p:cNvSpPr>
-          <p:nvPr>
-            <p:ph type="sldNum" idx="18"/>
+          <p:cNvPr id="27" name="PlaceHolder 6"/>
+          <p:cNvSpPr>
+            <a:spLocks noGrp="1"/>
+          </p:cNvSpPr>
+          <p:nvPr>
+            <p:ph type="dt" idx="18"/>
           </p:nvPr>
         </p:nvSpPr>
         <p:spPr>
           <a:xfrm>
-            <a:off x="10831680" y="9906120"/>
-            <a:ext cx="3526920" cy="569520"/>
+            <a:off x="755640" y="9906120"/>
+            <a:ext cx="3526200" cy="568800"/>
           </a:xfrm>
           <a:prstGeom prst="rect">
             <a:avLst/>
@@ -4936,40 +3937,34 @@
           </a:ln>
         </p:spPr>
         <p:txBody>
-          <a:bodyPr numCol="1" spcCol="0" lIns="147600" rIns="147600" tIns="73800" bIns="73800" anchor="ctr">
+          <a:bodyPr lIns="147600" rIns="147600" tIns="73800" bIns="73800" anchor="ctr">
             <a:noAutofit/>
           </a:bodyPr>
           <a:lstStyle>
-            <a:lvl1pPr indent="0" algn="r" defTabSz="1473120">
-              <a:lnSpc>
-                <a:spcPct val="100000"/>
-              </a:lnSpc>
-              <a:buNone/>
-              <a:defRPr b="0" lang="en-US" sz="2000" spc="-1" strike="noStrike">
-                <a:solidFill>
-                  <a:srgbClr val="898989"/>
-                </a:solidFill>
-                <a:latin typeface="Calibri"/>
+            <a:lvl1pPr indent="0">
+              <a:buNone/>
+              <a:defRPr b="0" lang="en-US" sz="1400" spc="-1" strike="noStrike">
+                <a:solidFill>
+                  <a:srgbClr val="000000"/>
+                </a:solidFill>
+                <a:latin typeface="Times New Roman"/>
               </a:defRPr>
             </a:lvl1pPr>
           </a:lstStyle>
           <a:p>
-            <a:pPr indent="0" algn="r" defTabSz="1473120">
-              <a:lnSpc>
-                <a:spcPct val="100000"/>
-              </a:lnSpc>
+            <a:pPr indent="0">
               <a:buNone/>
             </a:pPr>
-            <a:fld id="{C16334AB-AF2C-4A85-8A41-A29A805DEA4A}" type="slidenum">
-              <a:rPr b="0" lang="en-US" sz="2000" spc="-1" strike="noStrike">
-                <a:solidFill>
-                  <a:srgbClr val="898989"/>
-                </a:solidFill>
-                <a:latin typeface="Calibri"/>
+            <a:r>
+              <a:rPr b="0" lang="en-US" sz="1400" spc="-1" strike="noStrike">
+                <a:solidFill>
+                  <a:srgbClr val="000000"/>
+                </a:solidFill>
+                <a:latin typeface="Times New Roman"/>
               </a:rPr>
-              <a:t>&lt;number&gt;</a:t>
-            </a:fld>
-            <a:endParaRPr b="0" lang="en-US" sz="2000" spc="-1" strike="noStrike">
+              <a:t>&lt;date/time&gt;</a:t>
+            </a:r>
+            <a:endParaRPr b="0" lang="en-US" sz="1400" spc="-1" strike="noStrike">
               <a:solidFill>
                 <a:srgbClr val="000000"/>
               </a:solidFill>
@@ -5013,18 +4008,18 @@
       </p:grpSpPr>
       <p:sp>
         <p:nvSpPr>
-          <p:cNvPr id="37" name="PlaceHolder 1"/>
-          <p:cNvSpPr>
-            <a:spLocks noGrp="1"/>
-          </p:cNvSpPr>
-          <p:nvPr>
-            <p:ph type="title"/>
+          <p:cNvPr id="31" name="PlaceHolder 1"/>
+          <p:cNvSpPr>
+            <a:spLocks noGrp="1"/>
+          </p:cNvSpPr>
+          <p:nvPr>
+            <p:ph type="ftr" idx="19"/>
           </p:nvPr>
         </p:nvSpPr>
         <p:spPr>
           <a:xfrm>
-            <a:off x="755640" y="428760"/>
-            <a:ext cx="13602960" cy="1780920"/>
+            <a:off x="5164200" y="9906120"/>
+            <a:ext cx="4785120" cy="568800"/>
           </a:xfrm>
           <a:prstGeom prst="rect">
             <a:avLst/>
@@ -5035,48 +4030,68 @@
           </a:ln>
         </p:spPr>
         <p:txBody>
-          <a:bodyPr numCol="1" spcCol="0" lIns="147600" rIns="147600" tIns="73800" bIns="73800" anchor="ctr">
+          <a:bodyPr lIns="147600" rIns="147600" tIns="73800" bIns="73800" anchor="ctr">
             <a:noAutofit/>
           </a:bodyPr>
-          <a:p>
-            <a:pPr indent="0" algn="ctr" defTabSz="1473120">
+          <a:lstStyle>
+            <a:lvl1pPr indent="0" algn="ctr">
               <a:lnSpc>
                 <a:spcPct val="100000"/>
               </a:lnSpc>
               <a:buNone/>
+              <a:tabLst>
+                <a:tab algn="l" pos="0"/>
+              </a:tabLst>
+              <a:defRPr b="0" lang="en-US" sz="1400" spc="-1" strike="noStrike">
+                <a:solidFill>
+                  <a:srgbClr val="000000"/>
+                </a:solidFill>
+                <a:latin typeface="Times New Roman"/>
+              </a:defRPr>
+            </a:lvl1pPr>
+          </a:lstStyle>
+          <a:p>
+            <a:pPr indent="0" algn="ctr">
+              <a:lnSpc>
+                <a:spcPct val="100000"/>
+              </a:lnSpc>
+              <a:buNone/>
+              <a:tabLst>
+                <a:tab algn="l" pos="0"/>
+              </a:tabLst>
             </a:pPr>
             <a:r>
-              <a:rPr b="0" lang="en-US" sz="7100" spc="-1" strike="noStrike">
-                <a:solidFill>
-                  <a:schemeClr val="dk1"/>
-                </a:solidFill>
-                <a:latin typeface="Calibri"/>
+              <a:rPr b="0" lang="en-US" sz="1400" spc="-1" strike="noStrike">
+                <a:solidFill>
+                  <a:srgbClr val="000000"/>
+                </a:solidFill>
+                <a:latin typeface="Times New Roman"/>
               </a:rPr>
-              <a:t>Click to edit Master title style</a:t>
-            </a:r>
-            <a:endParaRPr b="0" lang="en-US" sz="7100" spc="-1" strike="noStrike">
+              <a:t>&lt;footer&gt;</a:t>
+            </a:r>
+            <a:endParaRPr b="0" lang="en-US" sz="1400" spc="-1" strike="noStrike">
               <a:solidFill>
-                <a:schemeClr val="dk1"/>
+                <a:srgbClr val="000000"/>
               </a:solidFill>
-              <a:latin typeface="Calibri"/>
+              <a:latin typeface="Times New Roman"/>
             </a:endParaRPr>
           </a:p>
         </p:txBody>
       </p:sp>
       <p:sp>
         <p:nvSpPr>
-          <p:cNvPr id="38" name="PlaceHolder 2"/>
-          <p:cNvSpPr>
-            <a:spLocks noGrp="1"/>
-          </p:cNvSpPr>
-          <p:nvPr>
-            <p:ph type="body"/>
+          <p:cNvPr id="32" name="PlaceHolder 2"/>
+          <p:cNvSpPr>
+            <a:spLocks noGrp="1"/>
+          </p:cNvSpPr>
+          <p:nvPr>
+            <p:ph type="sldNum" idx="20"/>
           </p:nvPr>
         </p:nvSpPr>
         <p:spPr>
           <a:xfrm>
-            <a:off x="755640" y="2392560"/>
-            <a:ext cx="6678000" cy="996840"/>
+            <a:off x="10831680" y="9906120"/>
+            <a:ext cx="3526200" cy="568800"/>
           </a:xfrm>
           <a:prstGeom prst="rect">
             <a:avLst/>
@@ -5087,54 +4102,68 @@
           </a:ln>
         </p:spPr>
         <p:txBody>
-          <a:bodyPr numCol="1" spcCol="0" lIns="147600" rIns="147600" tIns="73800" bIns="73800" anchor="b">
+          <a:bodyPr numCol="1" spcCol="0" lIns="147600" rIns="147600" tIns="73800" bIns="73800" anchor="ctr">
             <a:noAutofit/>
           </a:bodyPr>
-          <a:p>
-            <a:pPr indent="0" defTabSz="1473120">
+          <a:lstStyle>
+            <a:lvl1pPr indent="0" algn="r" defTabSz="1473120">
               <a:lnSpc>
                 <a:spcPct val="100000"/>
               </a:lnSpc>
-              <a:spcBef>
-                <a:spcPts val="780"/>
-              </a:spcBef>
+              <a:buNone/>
+              <a:tabLst>
+                <a:tab algn="l" pos="0"/>
+              </a:tabLst>
+              <a:defRPr b="0" lang="en-US" sz="2000" spc="-1" strike="noStrike">
+                <a:solidFill>
+                  <a:srgbClr val="898989"/>
+                </a:solidFill>
+                <a:latin typeface="Calibri"/>
+              </a:defRPr>
+            </a:lvl1pPr>
+          </a:lstStyle>
+          <a:p>
+            <a:pPr indent="0" algn="r" defTabSz="1473120">
+              <a:lnSpc>
+                <a:spcPct val="100000"/>
+              </a:lnSpc>
               <a:buNone/>
               <a:tabLst>
                 <a:tab algn="l" pos="0"/>
               </a:tabLst>
             </a:pPr>
-            <a:r>
-              <a:rPr b="1" lang="en-US" sz="3900" spc="-1" strike="noStrike">
-                <a:solidFill>
-                  <a:schemeClr val="dk1"/>
+            <a:fld id="{A87B42AA-844B-4BF0-A461-1402D628B69F}" type="slidenum">
+              <a:rPr b="0" lang="en-US" sz="2000" spc="-1" strike="noStrike">
+                <a:solidFill>
+                  <a:srgbClr val="898989"/>
                 </a:solidFill>
                 <a:latin typeface="Calibri"/>
               </a:rPr>
-              <a:t>Click to edit Master text styles</a:t>
-            </a:r>
-            <a:endParaRPr b="0" lang="en-US" sz="3900" spc="-1" strike="noStrike">
+              <a:t>&lt;number&gt;</a:t>
+            </a:fld>
+            <a:endParaRPr b="0" lang="en-US" sz="2000" spc="-1" strike="noStrike">
               <a:solidFill>
-                <a:schemeClr val="dk1"/>
+                <a:srgbClr val="000000"/>
               </a:solidFill>
-              <a:latin typeface="Calibri"/>
+              <a:latin typeface="Times New Roman"/>
             </a:endParaRPr>
           </a:p>
         </p:txBody>
       </p:sp>
       <p:sp>
         <p:nvSpPr>
-          <p:cNvPr id="39" name="PlaceHolder 3"/>
-          <p:cNvSpPr>
-            <a:spLocks noGrp="1"/>
-          </p:cNvSpPr>
-          <p:nvPr>
-            <p:ph type="body"/>
+          <p:cNvPr id="33" name="PlaceHolder 3"/>
+          <p:cNvSpPr>
+            <a:spLocks noGrp="1"/>
+          </p:cNvSpPr>
+          <p:nvPr>
+            <p:ph type="dt" idx="21"/>
           </p:nvPr>
         </p:nvSpPr>
         <p:spPr>
           <a:xfrm>
-            <a:off x="755640" y="3389760"/>
-            <a:ext cx="6678000" cy="6157800"/>
+            <a:off x="755640" y="9906120"/>
+            <a:ext cx="3526200" cy="568800"/>
           </a:xfrm>
           <a:prstGeom prst="rect">
             <a:avLst/>
@@ -5145,497 +4174,11 @@
           </a:ln>
         </p:spPr>
         <p:txBody>
-          <a:bodyPr numCol="1" spcCol="0" lIns="147600" rIns="147600" tIns="73800" bIns="73800" anchor="t">
-            <a:noAutofit/>
-          </a:bodyPr>
-          <a:p>
-            <a:pPr marL="552600" indent="-552600" defTabSz="1473120">
-              <a:lnSpc>
-                <a:spcPct val="100000"/>
-              </a:lnSpc>
-              <a:spcBef>
-                <a:spcPts val="780"/>
-              </a:spcBef>
-              <a:buClr>
-                <a:srgbClr val="000000"/>
-              </a:buClr>
-              <a:buFont typeface="Arial"/>
-              <a:buChar char="•"/>
-            </a:pPr>
-            <a:r>
-              <a:rPr b="0" lang="en-US" sz="3900" spc="-1" strike="noStrike">
-                <a:solidFill>
-                  <a:schemeClr val="dk1"/>
-                </a:solidFill>
-                <a:latin typeface="Calibri"/>
-              </a:rPr>
-              <a:t>Click to edit Master text styles</a:t>
-            </a:r>
-            <a:endParaRPr b="0" lang="en-US" sz="3900" spc="-1" strike="noStrike">
-              <a:solidFill>
-                <a:schemeClr val="dk1"/>
-              </a:solidFill>
-              <a:latin typeface="Calibri"/>
-            </a:endParaRPr>
-          </a:p>
-          <a:p>
-            <a:pPr lvl="1" marL="1197000" indent="-460440" defTabSz="1473120">
-              <a:lnSpc>
-                <a:spcPct val="100000"/>
-              </a:lnSpc>
-              <a:spcBef>
-                <a:spcPts val="641"/>
-              </a:spcBef>
-              <a:buClr>
-                <a:srgbClr val="000000"/>
-              </a:buClr>
-              <a:buFont typeface="Arial"/>
-              <a:buChar char="–"/>
-            </a:pPr>
-            <a:r>
-              <a:rPr b="0" lang="en-US" sz="3200" spc="-1" strike="noStrike">
-                <a:solidFill>
-                  <a:schemeClr val="dk1"/>
-                </a:solidFill>
-                <a:latin typeface="Calibri"/>
-              </a:rPr>
-              <a:t>Second level</a:t>
-            </a:r>
-            <a:endParaRPr b="0" lang="en-US" sz="3200" spc="-1" strike="noStrike">
-              <a:solidFill>
-                <a:schemeClr val="dk1"/>
-              </a:solidFill>
-              <a:latin typeface="Calibri"/>
-            </a:endParaRPr>
-          </a:p>
-          <a:p>
-            <a:pPr lvl="2" marL="1841400" indent="-368280" defTabSz="1473120">
-              <a:lnSpc>
-                <a:spcPct val="100000"/>
-              </a:lnSpc>
-              <a:spcBef>
-                <a:spcPts val="581"/>
-              </a:spcBef>
-              <a:buClr>
-                <a:srgbClr val="000000"/>
-              </a:buClr>
-              <a:buFont typeface="Arial"/>
-              <a:buChar char="•"/>
-            </a:pPr>
-            <a:r>
-              <a:rPr b="0" lang="en-US" sz="2900" spc="-1" strike="noStrike">
-                <a:solidFill>
-                  <a:schemeClr val="dk1"/>
-                </a:solidFill>
-                <a:latin typeface="Calibri"/>
-              </a:rPr>
-              <a:t>Third level</a:t>
-            </a:r>
-            <a:endParaRPr b="0" lang="en-US" sz="2900" spc="-1" strike="noStrike">
-              <a:solidFill>
-                <a:schemeClr val="dk1"/>
-              </a:solidFill>
-              <a:latin typeface="Calibri"/>
-            </a:endParaRPr>
-          </a:p>
-          <a:p>
-            <a:pPr lvl="3" marL="2579760" indent="-368280" defTabSz="1473120">
-              <a:lnSpc>
-                <a:spcPct val="100000"/>
-              </a:lnSpc>
-              <a:spcBef>
-                <a:spcPts val="499"/>
-              </a:spcBef>
-              <a:buClr>
-                <a:srgbClr val="000000"/>
-              </a:buClr>
-              <a:buFont typeface="Arial"/>
-              <a:buChar char="–"/>
-            </a:pPr>
-            <a:r>
-              <a:rPr b="0" lang="en-US" sz="2500" spc="-1" strike="noStrike">
-                <a:solidFill>
-                  <a:schemeClr val="dk1"/>
-                </a:solidFill>
-                <a:latin typeface="Calibri"/>
-              </a:rPr>
-              <a:t>Fourth level</a:t>
-            </a:r>
-            <a:endParaRPr b="0" lang="en-US" sz="2500" spc="-1" strike="noStrike">
-              <a:solidFill>
-                <a:schemeClr val="dk1"/>
-              </a:solidFill>
-              <a:latin typeface="Calibri"/>
-            </a:endParaRPr>
-          </a:p>
-          <a:p>
-            <a:pPr lvl="4" marL="3316320" indent="-368280" defTabSz="1473120">
-              <a:lnSpc>
-                <a:spcPct val="100000"/>
-              </a:lnSpc>
-              <a:spcBef>
-                <a:spcPts val="499"/>
-              </a:spcBef>
-              <a:buClr>
-                <a:srgbClr val="000000"/>
-              </a:buClr>
-              <a:buFont typeface="Arial"/>
-              <a:buChar char="»"/>
-            </a:pPr>
-            <a:r>
-              <a:rPr b="0" lang="en-US" sz="2500" spc="-1" strike="noStrike">
-                <a:solidFill>
-                  <a:schemeClr val="dk1"/>
-                </a:solidFill>
-                <a:latin typeface="Calibri"/>
-              </a:rPr>
-              <a:t>Fifth level</a:t>
-            </a:r>
-            <a:endParaRPr b="0" lang="en-US" sz="2500" spc="-1" strike="noStrike">
-              <a:solidFill>
-                <a:schemeClr val="dk1"/>
-              </a:solidFill>
-              <a:latin typeface="Calibri"/>
-            </a:endParaRPr>
-          </a:p>
-        </p:txBody>
-      </p:sp>
-      <p:sp>
-        <p:nvSpPr>
-          <p:cNvPr id="40" name="PlaceHolder 4"/>
-          <p:cNvSpPr>
-            <a:spLocks noGrp="1"/>
-          </p:cNvSpPr>
-          <p:nvPr>
-            <p:ph type="body"/>
-          </p:nvPr>
-        </p:nvSpPr>
-        <p:spPr>
-          <a:xfrm>
-            <a:off x="7678080" y="2392560"/>
-            <a:ext cx="6680520" cy="996840"/>
-          </a:xfrm>
-          <a:prstGeom prst="rect">
-            <a:avLst/>
-          </a:prstGeom>
-          <a:noFill/>
-          <a:ln w="0">
-            <a:noFill/>
-          </a:ln>
-        </p:spPr>
-        <p:txBody>
-          <a:bodyPr numCol="1" spcCol="0" lIns="147600" rIns="147600" tIns="73800" bIns="73800" anchor="b">
-            <a:noAutofit/>
-          </a:bodyPr>
-          <a:p>
-            <a:pPr indent="0" defTabSz="1473120">
-              <a:lnSpc>
-                <a:spcPct val="100000"/>
-              </a:lnSpc>
-              <a:spcBef>
-                <a:spcPts val="780"/>
-              </a:spcBef>
-              <a:buNone/>
-              <a:tabLst>
-                <a:tab algn="l" pos="0"/>
-              </a:tabLst>
-            </a:pPr>
-            <a:r>
-              <a:rPr b="1" lang="en-US" sz="3900" spc="-1" strike="noStrike">
-                <a:solidFill>
-                  <a:schemeClr val="dk1"/>
-                </a:solidFill>
-                <a:latin typeface="Calibri"/>
-              </a:rPr>
-              <a:t>Click to edit Master text styles</a:t>
-            </a:r>
-            <a:endParaRPr b="0" lang="en-US" sz="3900" spc="-1" strike="noStrike">
-              <a:solidFill>
-                <a:schemeClr val="dk1"/>
-              </a:solidFill>
-              <a:latin typeface="Calibri"/>
-            </a:endParaRPr>
-          </a:p>
-        </p:txBody>
-      </p:sp>
-      <p:sp>
-        <p:nvSpPr>
-          <p:cNvPr id="41" name="PlaceHolder 5"/>
-          <p:cNvSpPr>
-            <a:spLocks noGrp="1"/>
-          </p:cNvSpPr>
-          <p:nvPr>
-            <p:ph type="body"/>
-          </p:nvPr>
-        </p:nvSpPr>
-        <p:spPr>
-          <a:xfrm>
-            <a:off x="7678080" y="3389760"/>
-            <a:ext cx="6680520" cy="6157800"/>
-          </a:xfrm>
-          <a:prstGeom prst="rect">
-            <a:avLst/>
-          </a:prstGeom>
-          <a:noFill/>
-          <a:ln w="0">
-            <a:noFill/>
-          </a:ln>
-        </p:spPr>
-        <p:txBody>
-          <a:bodyPr numCol="1" spcCol="0" lIns="147600" rIns="147600" tIns="73800" bIns="73800" anchor="t">
-            <a:noAutofit/>
-          </a:bodyPr>
-          <a:p>
-            <a:pPr marL="552600" indent="-552600" defTabSz="1473120">
-              <a:lnSpc>
-                <a:spcPct val="100000"/>
-              </a:lnSpc>
-              <a:spcBef>
-                <a:spcPts val="780"/>
-              </a:spcBef>
-              <a:buClr>
-                <a:srgbClr val="000000"/>
-              </a:buClr>
-              <a:buFont typeface="Arial"/>
-              <a:buChar char="•"/>
-            </a:pPr>
-            <a:r>
-              <a:rPr b="0" lang="en-US" sz="3900" spc="-1" strike="noStrike">
-                <a:solidFill>
-                  <a:schemeClr val="dk1"/>
-                </a:solidFill>
-                <a:latin typeface="Calibri"/>
-              </a:rPr>
-              <a:t>Click to edit Master text styles</a:t>
-            </a:r>
-            <a:endParaRPr b="0" lang="en-US" sz="3900" spc="-1" strike="noStrike">
-              <a:solidFill>
-                <a:schemeClr val="dk1"/>
-              </a:solidFill>
-              <a:latin typeface="Calibri"/>
-            </a:endParaRPr>
-          </a:p>
-          <a:p>
-            <a:pPr lvl="1" marL="1197000" indent="-460440" defTabSz="1473120">
-              <a:lnSpc>
-                <a:spcPct val="100000"/>
-              </a:lnSpc>
-              <a:spcBef>
-                <a:spcPts val="641"/>
-              </a:spcBef>
-              <a:buClr>
-                <a:srgbClr val="000000"/>
-              </a:buClr>
-              <a:buFont typeface="Arial"/>
-              <a:buChar char="–"/>
-            </a:pPr>
-            <a:r>
-              <a:rPr b="0" lang="en-US" sz="3200" spc="-1" strike="noStrike">
-                <a:solidFill>
-                  <a:schemeClr val="dk1"/>
-                </a:solidFill>
-                <a:latin typeface="Calibri"/>
-              </a:rPr>
-              <a:t>Second level</a:t>
-            </a:r>
-            <a:endParaRPr b="0" lang="en-US" sz="3200" spc="-1" strike="noStrike">
-              <a:solidFill>
-                <a:schemeClr val="dk1"/>
-              </a:solidFill>
-              <a:latin typeface="Calibri"/>
-            </a:endParaRPr>
-          </a:p>
-          <a:p>
-            <a:pPr lvl="2" marL="1841400" indent="-368280" defTabSz="1473120">
-              <a:lnSpc>
-                <a:spcPct val="100000"/>
-              </a:lnSpc>
-              <a:spcBef>
-                <a:spcPts val="581"/>
-              </a:spcBef>
-              <a:buClr>
-                <a:srgbClr val="000000"/>
-              </a:buClr>
-              <a:buFont typeface="Arial"/>
-              <a:buChar char="•"/>
-            </a:pPr>
-            <a:r>
-              <a:rPr b="0" lang="en-US" sz="2900" spc="-1" strike="noStrike">
-                <a:solidFill>
-                  <a:schemeClr val="dk1"/>
-                </a:solidFill>
-                <a:latin typeface="Calibri"/>
-              </a:rPr>
-              <a:t>Third level</a:t>
-            </a:r>
-            <a:endParaRPr b="0" lang="en-US" sz="2900" spc="-1" strike="noStrike">
-              <a:solidFill>
-                <a:schemeClr val="dk1"/>
-              </a:solidFill>
-              <a:latin typeface="Calibri"/>
-            </a:endParaRPr>
-          </a:p>
-          <a:p>
-            <a:pPr lvl="3" marL="2579760" indent="-368280" defTabSz="1473120">
-              <a:lnSpc>
-                <a:spcPct val="100000"/>
-              </a:lnSpc>
-              <a:spcBef>
-                <a:spcPts val="499"/>
-              </a:spcBef>
-              <a:buClr>
-                <a:srgbClr val="000000"/>
-              </a:buClr>
-              <a:buFont typeface="Arial"/>
-              <a:buChar char="–"/>
-            </a:pPr>
-            <a:r>
-              <a:rPr b="0" lang="en-US" sz="2500" spc="-1" strike="noStrike">
-                <a:solidFill>
-                  <a:schemeClr val="dk1"/>
-                </a:solidFill>
-                <a:latin typeface="Calibri"/>
-              </a:rPr>
-              <a:t>Fourth level</a:t>
-            </a:r>
-            <a:endParaRPr b="0" lang="en-US" sz="2500" spc="-1" strike="noStrike">
-              <a:solidFill>
-                <a:schemeClr val="dk1"/>
-              </a:solidFill>
-              <a:latin typeface="Calibri"/>
-            </a:endParaRPr>
-          </a:p>
-          <a:p>
-            <a:pPr lvl="4" marL="3316320" indent="-368280" defTabSz="1473120">
-              <a:lnSpc>
-                <a:spcPct val="100000"/>
-              </a:lnSpc>
-              <a:spcBef>
-                <a:spcPts val="499"/>
-              </a:spcBef>
-              <a:buClr>
-                <a:srgbClr val="000000"/>
-              </a:buClr>
-              <a:buFont typeface="Arial"/>
-              <a:buChar char="»"/>
-            </a:pPr>
-            <a:r>
-              <a:rPr b="0" lang="en-US" sz="2500" spc="-1" strike="noStrike">
-                <a:solidFill>
-                  <a:schemeClr val="dk1"/>
-                </a:solidFill>
-                <a:latin typeface="Calibri"/>
-              </a:rPr>
-              <a:t>Fifth level</a:t>
-            </a:r>
-            <a:endParaRPr b="0" lang="en-US" sz="2500" spc="-1" strike="noStrike">
-              <a:solidFill>
-                <a:schemeClr val="dk1"/>
-              </a:solidFill>
-              <a:latin typeface="Calibri"/>
-            </a:endParaRPr>
-          </a:p>
-        </p:txBody>
-      </p:sp>
-      <p:sp>
-        <p:nvSpPr>
-          <p:cNvPr id="42" name="PlaceHolder 6"/>
-          <p:cNvSpPr>
-            <a:spLocks noGrp="1"/>
-          </p:cNvSpPr>
-          <p:nvPr>
-            <p:ph type="dt" idx="19"/>
-          </p:nvPr>
-        </p:nvSpPr>
-        <p:spPr>
-          <a:xfrm>
-            <a:off x="755640" y="9906120"/>
-            <a:ext cx="3526920" cy="569520"/>
-          </a:xfrm>
-          <a:prstGeom prst="rect">
-            <a:avLst/>
-          </a:prstGeom>
-          <a:noFill/>
-          <a:ln w="0">
-            <a:noFill/>
-          </a:ln>
-        </p:spPr>
-        <p:txBody>
           <a:bodyPr lIns="147600" rIns="147600" tIns="73800" bIns="73800" anchor="ctr">
             <a:noAutofit/>
           </a:bodyPr>
           <a:lstStyle>
-            <a:lvl1pPr indent="0" defTabSz="1474200">
-              <a:lnSpc>
-                <a:spcPct val="100000"/>
-              </a:lnSpc>
-              <a:buNone/>
-              <a:defRPr b="0" lang="en-US" sz="2000" spc="-1" strike="noStrike">
-                <a:solidFill>
-                  <a:schemeClr val="dk1">
-                    <a:tint val="75000"/>
-                  </a:schemeClr>
-                </a:solidFill>
-                <a:latin typeface="Calibri"/>
-              </a:defRPr>
-            </a:lvl1pPr>
-          </a:lstStyle>
-          <a:p>
-            <a:pPr indent="0" defTabSz="1474200">
-              <a:lnSpc>
-                <a:spcPct val="100000"/>
-              </a:lnSpc>
-              <a:buNone/>
-            </a:pPr>
-            <a:r>
-              <a:rPr b="0" lang="en-US" sz="2000" spc="-1" strike="noStrike">
-                <a:solidFill>
-                  <a:schemeClr val="dk1">
-                    <a:tint val="75000"/>
-                  </a:schemeClr>
-                </a:solidFill>
-                <a:latin typeface="Calibri"/>
-              </a:rPr>
-              <a:t>&lt;date/time&gt;</a:t>
-            </a:r>
-            <a:endParaRPr b="0" lang="en-US" sz="2000" spc="-1" strike="noStrike">
-              <a:solidFill>
-                <a:srgbClr val="000000"/>
-              </a:solidFill>
-              <a:latin typeface="Times New Roman"/>
-            </a:endParaRPr>
-          </a:p>
-        </p:txBody>
-      </p:sp>
-      <p:sp>
-        <p:nvSpPr>
-          <p:cNvPr id="43" name="PlaceHolder 7"/>
-          <p:cNvSpPr>
-            <a:spLocks noGrp="1"/>
-          </p:cNvSpPr>
-          <p:nvPr>
-            <p:ph type="ftr" idx="20"/>
-          </p:nvPr>
-        </p:nvSpPr>
-        <p:spPr>
-          <a:xfrm>
-            <a:off x="5164200" y="9906120"/>
-            <a:ext cx="4785840" cy="569520"/>
-          </a:xfrm>
-          <a:prstGeom prst="rect">
-            <a:avLst/>
-          </a:prstGeom>
-          <a:noFill/>
-          <a:ln w="0">
-            <a:noFill/>
-          </a:ln>
-        </p:spPr>
-        <p:txBody>
-          <a:bodyPr lIns="147600" rIns="147600" tIns="73800" bIns="73800" anchor="ctr">
-            <a:noAutofit/>
-          </a:bodyPr>
-          <a:lstStyle>
-            <a:lvl1pPr indent="0" algn="ctr">
+            <a:lvl1pPr indent="0">
               <a:buNone/>
               <a:defRPr b="0" lang="en-US" sz="1400" spc="-1" strike="noStrike">
                 <a:solidFill>
@@ -5646,7 +4189,7 @@
             </a:lvl1pPr>
           </a:lstStyle>
           <a:p>
-            <a:pPr indent="0" algn="ctr">
+            <a:pPr indent="0">
               <a:buNone/>
             </a:pPr>
             <a:r>
@@ -5656,75 +4199,9 @@
                 </a:solidFill>
                 <a:latin typeface="Times New Roman"/>
               </a:rPr>
-              <a:t>&lt;footer&gt;</a:t>
+              <a:t>&lt;date/time&gt;</a:t>
             </a:r>
             <a:endParaRPr b="0" lang="en-US" sz="1400" spc="-1" strike="noStrike">
-              <a:solidFill>
-                <a:srgbClr val="000000"/>
-              </a:solidFill>
-              <a:latin typeface="Times New Roman"/>
-            </a:endParaRPr>
-          </a:p>
-        </p:txBody>
-      </p:sp>
-      <p:sp>
-        <p:nvSpPr>
-          <p:cNvPr id="44" name="PlaceHolder 8"/>
-          <p:cNvSpPr>
-            <a:spLocks noGrp="1"/>
-          </p:cNvSpPr>
-          <p:nvPr>
-            <p:ph type="sldNum" idx="21"/>
-          </p:nvPr>
-        </p:nvSpPr>
-        <p:spPr>
-          <a:xfrm>
-            <a:off x="10831680" y="9906120"/>
-            <a:ext cx="3526920" cy="569520"/>
-          </a:xfrm>
-          <a:prstGeom prst="rect">
-            <a:avLst/>
-          </a:prstGeom>
-          <a:noFill/>
-          <a:ln w="0">
-            <a:noFill/>
-          </a:ln>
-        </p:spPr>
-        <p:txBody>
-          <a:bodyPr numCol="1" spcCol="0" lIns="147600" rIns="147600" tIns="73800" bIns="73800" anchor="ctr">
-            <a:noAutofit/>
-          </a:bodyPr>
-          <a:lstStyle>
-            <a:lvl1pPr indent="0" algn="r" defTabSz="1473120">
-              <a:lnSpc>
-                <a:spcPct val="100000"/>
-              </a:lnSpc>
-              <a:buNone/>
-              <a:defRPr b="0" lang="en-US" sz="2000" spc="-1" strike="noStrike">
-                <a:solidFill>
-                  <a:srgbClr val="898989"/>
-                </a:solidFill>
-                <a:latin typeface="Calibri"/>
-              </a:defRPr>
-            </a:lvl1pPr>
-          </a:lstStyle>
-          <a:p>
-            <a:pPr indent="0" algn="r" defTabSz="1473120">
-              <a:lnSpc>
-                <a:spcPct val="100000"/>
-              </a:lnSpc>
-              <a:buNone/>
-            </a:pPr>
-            <a:fld id="{1F42851A-3B8A-4C17-BDF9-0A929AB040EC}" type="slidenum">
-              <a:rPr b="0" lang="en-US" sz="2000" spc="-1" strike="noStrike">
-                <a:solidFill>
-                  <a:srgbClr val="898989"/>
-                </a:solidFill>
-                <a:latin typeface="Calibri"/>
-              </a:rPr>
-              <a:t>&lt;number&gt;</a:t>
-            </a:fld>
-            <a:endParaRPr b="0" lang="en-US" sz="2000" spc="-1" strike="noStrike">
               <a:solidFill>
                 <a:srgbClr val="000000"/>
               </a:solidFill>
@@ -5768,7 +4245,7 @@
       </p:grpSpPr>
       <p:sp>
         <p:nvSpPr>
-          <p:cNvPr id="45" name="PlaceHolder 1"/>
+          <p:cNvPr id="34" name="PlaceHolder 1"/>
           <p:cNvSpPr>
             <a:spLocks noGrp="1"/>
           </p:cNvSpPr>
@@ -5779,7 +4256,7 @@
         <p:spPr>
           <a:xfrm>
             <a:off x="755640" y="428760"/>
-            <a:ext cx="13602960" cy="1780920"/>
+            <a:ext cx="13602240" cy="1780200"/>
           </a:xfrm>
           <a:prstGeom prst="rect">
             <a:avLst/>
@@ -5790,48 +4267,45 @@
           </a:ln>
         </p:spPr>
         <p:txBody>
-          <a:bodyPr numCol="1" spcCol="0" lIns="147600" rIns="147600" tIns="73800" bIns="73800" anchor="ctr">
+          <a:bodyPr numCol="1" spcCol="0" lIns="0" rIns="0" tIns="0" bIns="0" anchor="ctr">
             <a:noAutofit/>
           </a:bodyPr>
           <a:p>
-            <a:pPr indent="0" algn="ctr" defTabSz="1473120">
-              <a:lnSpc>
-                <a:spcPct val="100000"/>
-              </a:lnSpc>
+            <a:pPr indent="0">
               <a:buNone/>
             </a:pPr>
             <a:r>
-              <a:rPr b="0" lang="en-US" sz="7100" spc="-1" strike="noStrike">
-                <a:solidFill>
-                  <a:schemeClr val="dk1"/>
-                </a:solidFill>
-                <a:latin typeface="Calibri"/>
+              <a:rPr b="0" lang="en-US" sz="1800" spc="-1" strike="noStrike">
+                <a:solidFill>
+                  <a:srgbClr val="000000"/>
+                </a:solidFill>
+                <a:latin typeface="Arial"/>
               </a:rPr>
-              <a:t>Click to edit Master title style</a:t>
-            </a:r>
-            <a:endParaRPr b="0" lang="en-US" sz="7100" spc="-1" strike="noStrike">
+              <a:t>Click to edit the title text format</a:t>
+            </a:r>
+            <a:endParaRPr b="0" lang="en-US" sz="1800" spc="-1" strike="noStrike">
               <a:solidFill>
-                <a:schemeClr val="dk1"/>
+                <a:srgbClr val="000000"/>
               </a:solidFill>
-              <a:latin typeface="Calibri"/>
+              <a:latin typeface="Arial"/>
             </a:endParaRPr>
           </a:p>
         </p:txBody>
       </p:sp>
       <p:sp>
         <p:nvSpPr>
-          <p:cNvPr id="46" name="PlaceHolder 2"/>
-          <p:cNvSpPr>
-            <a:spLocks noGrp="1"/>
-          </p:cNvSpPr>
-          <p:nvPr>
-            <p:ph type="dt" idx="22"/>
+          <p:cNvPr id="35" name="PlaceHolder 2"/>
+          <p:cNvSpPr>
+            <a:spLocks noGrp="1"/>
+          </p:cNvSpPr>
+          <p:nvPr>
+            <p:ph type="ftr" idx="22"/>
           </p:nvPr>
         </p:nvSpPr>
         <p:spPr>
           <a:xfrm>
-            <a:off x="755640" y="9906120"/>
-            <a:ext cx="3526920" cy="569520"/>
+            <a:off x="5164200" y="9906120"/>
+            <a:ext cx="4785120" cy="568800"/>
           </a:xfrm>
           <a:prstGeom prst="rect">
             <a:avLst/>
@@ -5846,40 +4320,42 @@
             <a:noAutofit/>
           </a:bodyPr>
           <a:lstStyle>
-            <a:lvl1pPr indent="0" defTabSz="1474200">
+            <a:lvl1pPr indent="0" algn="ctr">
               <a:lnSpc>
                 <a:spcPct val="100000"/>
               </a:lnSpc>
               <a:buNone/>
-              <a:defRPr b="0" lang="en-US" sz="2000" spc="-1" strike="noStrike">
-                <a:solidFill>
-                  <a:schemeClr val="dk1">
-                    <a:tint val="75000"/>
-                  </a:schemeClr>
-                </a:solidFill>
-                <a:latin typeface="Calibri"/>
+              <a:tabLst>
+                <a:tab algn="l" pos="0"/>
+              </a:tabLst>
+              <a:defRPr b="0" lang="en-US" sz="1400" spc="-1" strike="noStrike">
+                <a:solidFill>
+                  <a:srgbClr val="000000"/>
+                </a:solidFill>
+                <a:latin typeface="Times New Roman"/>
               </a:defRPr>
             </a:lvl1pPr>
           </a:lstStyle>
           <a:p>
-            <a:pPr indent="0" defTabSz="1474200">
+            <a:pPr indent="0" algn="ctr">
               <a:lnSpc>
                 <a:spcPct val="100000"/>
               </a:lnSpc>
               <a:buNone/>
+              <a:tabLst>
+                <a:tab algn="l" pos="0"/>
+              </a:tabLst>
             </a:pPr>
             <a:r>
-              <a:rPr b="0" lang="en-US" sz="2000" spc="-1" strike="noStrike">
-                <a:solidFill>
-                  <a:schemeClr val="dk1">
-                    <a:tint val="75000"/>
-                  </a:schemeClr>
-                </a:solidFill>
-                <a:latin typeface="Calibri"/>
+              <a:rPr b="0" lang="en-US" sz="1400" spc="-1" strike="noStrike">
+                <a:solidFill>
+                  <a:srgbClr val="000000"/>
+                </a:solidFill>
+                <a:latin typeface="Times New Roman"/>
               </a:rPr>
-              <a:t>&lt;date/time&gt;</a:t>
-            </a:r>
-            <a:endParaRPr b="0" lang="en-US" sz="2000" spc="-1" strike="noStrike">
+              <a:t>&lt;footer&gt;</a:t>
+            </a:r>
+            <a:endParaRPr b="0" lang="en-US" sz="1400" spc="-1" strike="noStrike">
               <a:solidFill>
                 <a:srgbClr val="000000"/>
               </a:solidFill>
@@ -5890,18 +4366,18 @@
       </p:sp>
       <p:sp>
         <p:nvSpPr>
-          <p:cNvPr id="47" name="PlaceHolder 3"/>
-          <p:cNvSpPr>
-            <a:spLocks noGrp="1"/>
-          </p:cNvSpPr>
-          <p:nvPr>
-            <p:ph type="ftr" idx="23"/>
+          <p:cNvPr id="36" name="PlaceHolder 3"/>
+          <p:cNvSpPr>
+            <a:spLocks noGrp="1"/>
+          </p:cNvSpPr>
+          <p:nvPr>
+            <p:ph type="sldNum" idx="23"/>
           </p:nvPr>
         </p:nvSpPr>
         <p:spPr>
           <a:xfrm>
-            <a:off x="5164200" y="9906120"/>
-            <a:ext cx="4785840" cy="569520"/>
+            <a:off x="10831680" y="9906120"/>
+            <a:ext cx="3526200" cy="568800"/>
           </a:xfrm>
           <a:prstGeom prst="rect">
             <a:avLst/>
@@ -5912,34 +4388,46 @@
           </a:ln>
         </p:spPr>
         <p:txBody>
-          <a:bodyPr lIns="147600" rIns="147600" tIns="73800" bIns="73800" anchor="ctr">
+          <a:bodyPr numCol="1" spcCol="0" lIns="147600" rIns="147600" tIns="73800" bIns="73800" anchor="ctr">
             <a:noAutofit/>
           </a:bodyPr>
           <a:lstStyle>
-            <a:lvl1pPr indent="0" algn="ctr">
-              <a:buNone/>
-              <a:defRPr b="0" lang="en-US" sz="1400" spc="-1" strike="noStrike">
-                <a:solidFill>
-                  <a:srgbClr val="000000"/>
-                </a:solidFill>
-                <a:latin typeface="Times New Roman"/>
+            <a:lvl1pPr indent="0" algn="r" defTabSz="1473120">
+              <a:lnSpc>
+                <a:spcPct val="100000"/>
+              </a:lnSpc>
+              <a:buNone/>
+              <a:tabLst>
+                <a:tab algn="l" pos="0"/>
+              </a:tabLst>
+              <a:defRPr b="0" lang="en-US" sz="2000" spc="-1" strike="noStrike">
+                <a:solidFill>
+                  <a:srgbClr val="898989"/>
+                </a:solidFill>
+                <a:latin typeface="Calibri"/>
               </a:defRPr>
             </a:lvl1pPr>
           </a:lstStyle>
           <a:p>
-            <a:pPr indent="0" algn="ctr">
-              <a:buNone/>
+            <a:pPr indent="0" algn="r" defTabSz="1473120">
+              <a:lnSpc>
+                <a:spcPct val="100000"/>
+              </a:lnSpc>
+              <a:buNone/>
+              <a:tabLst>
+                <a:tab algn="l" pos="0"/>
+              </a:tabLst>
             </a:pPr>
-            <a:r>
-              <a:rPr b="0" lang="en-US" sz="1400" spc="-1" strike="noStrike">
-                <a:solidFill>
-                  <a:srgbClr val="000000"/>
-                </a:solidFill>
-                <a:latin typeface="Times New Roman"/>
+            <a:fld id="{31E15712-069B-4C28-BA84-2AB1042AF0CF}" type="slidenum">
+              <a:rPr b="0" lang="en-US" sz="2000" spc="-1" strike="noStrike">
+                <a:solidFill>
+                  <a:srgbClr val="898989"/>
+                </a:solidFill>
+                <a:latin typeface="Calibri"/>
               </a:rPr>
-              <a:t>&lt;footer&gt;</a:t>
-            </a:r>
-            <a:endParaRPr b="0" lang="en-US" sz="1400" spc="-1" strike="noStrike">
+              <a:t>&lt;number&gt;</a:t>
+            </a:fld>
+            <a:endParaRPr b="0" lang="en-US" sz="2000" spc="-1" strike="noStrike">
               <a:solidFill>
                 <a:srgbClr val="000000"/>
               </a:solidFill>
@@ -5950,18 +4438,18 @@
       </p:sp>
       <p:sp>
         <p:nvSpPr>
-          <p:cNvPr id="48" name="PlaceHolder 4"/>
-          <p:cNvSpPr>
-            <a:spLocks noGrp="1"/>
-          </p:cNvSpPr>
-          <p:nvPr>
-            <p:ph type="sldNum" idx="24"/>
+          <p:cNvPr id="37" name="PlaceHolder 4"/>
+          <p:cNvSpPr>
+            <a:spLocks noGrp="1"/>
+          </p:cNvSpPr>
+          <p:nvPr>
+            <p:ph type="dt" idx="24"/>
           </p:nvPr>
         </p:nvSpPr>
         <p:spPr>
           <a:xfrm>
-            <a:off x="10831680" y="9906120"/>
-            <a:ext cx="3526920" cy="569520"/>
+            <a:off x="755640" y="9906120"/>
+            <a:ext cx="3526200" cy="568800"/>
           </a:xfrm>
           <a:prstGeom prst="rect">
             <a:avLst/>
@@ -5972,40 +4460,34 @@
           </a:ln>
         </p:spPr>
         <p:txBody>
-          <a:bodyPr numCol="1" spcCol="0" lIns="147600" rIns="147600" tIns="73800" bIns="73800" anchor="ctr">
+          <a:bodyPr lIns="147600" rIns="147600" tIns="73800" bIns="73800" anchor="ctr">
             <a:noAutofit/>
           </a:bodyPr>
           <a:lstStyle>
-            <a:lvl1pPr indent="0" algn="r" defTabSz="1473120">
-              <a:lnSpc>
-                <a:spcPct val="100000"/>
-              </a:lnSpc>
-              <a:buNone/>
-              <a:defRPr b="0" lang="en-US" sz="2000" spc="-1" strike="noStrike">
-                <a:solidFill>
-                  <a:srgbClr val="898989"/>
-                </a:solidFill>
-                <a:latin typeface="Calibri"/>
+            <a:lvl1pPr indent="0">
+              <a:buNone/>
+              <a:defRPr b="0" lang="en-US" sz="1400" spc="-1" strike="noStrike">
+                <a:solidFill>
+                  <a:srgbClr val="000000"/>
+                </a:solidFill>
+                <a:latin typeface="Times New Roman"/>
               </a:defRPr>
             </a:lvl1pPr>
           </a:lstStyle>
           <a:p>
-            <a:pPr indent="0" algn="r" defTabSz="1473120">
-              <a:lnSpc>
-                <a:spcPct val="100000"/>
-              </a:lnSpc>
+            <a:pPr indent="0">
               <a:buNone/>
             </a:pPr>
-            <a:fld id="{1A896FEA-9BB6-4DA0-B98B-4410298469BE}" type="slidenum">
-              <a:rPr b="0" lang="en-US" sz="2000" spc="-1" strike="noStrike">
-                <a:solidFill>
-                  <a:srgbClr val="898989"/>
-                </a:solidFill>
-                <a:latin typeface="Calibri"/>
+            <a:r>
+              <a:rPr b="0" lang="en-US" sz="1400" spc="-1" strike="noStrike">
+                <a:solidFill>
+                  <a:srgbClr val="000000"/>
+                </a:solidFill>
+                <a:latin typeface="Times New Roman"/>
               </a:rPr>
-              <a:t>&lt;number&gt;</a:t>
-            </a:fld>
-            <a:endParaRPr b="0" lang="en-US" sz="2000" spc="-1" strike="noStrike">
+              <a:t>&lt;date/time&gt;</a:t>
+            </a:r>
+            <a:endParaRPr b="0" lang="en-US" sz="1400" spc="-1" strike="noStrike">
               <a:solidFill>
                 <a:srgbClr val="000000"/>
               </a:solidFill>
@@ -6049,18 +4531,18 @@
       </p:grpSpPr>
       <p:sp>
         <p:nvSpPr>
-          <p:cNvPr id="50" name="PlaceHolder 1"/>
-          <p:cNvSpPr>
-            <a:spLocks noGrp="1"/>
-          </p:cNvSpPr>
-          <p:nvPr>
-            <p:ph type="dt" idx="25"/>
+          <p:cNvPr id="39" name="PlaceHolder 1"/>
+          <p:cNvSpPr>
+            <a:spLocks noGrp="1"/>
+          </p:cNvSpPr>
+          <p:nvPr>
+            <p:ph type="ftr" idx="25"/>
           </p:nvPr>
         </p:nvSpPr>
         <p:spPr>
           <a:xfrm>
-            <a:off x="755640" y="9906120"/>
-            <a:ext cx="3526920" cy="569520"/>
+            <a:off x="5164200" y="9906120"/>
+            <a:ext cx="4785120" cy="568800"/>
           </a:xfrm>
           <a:prstGeom prst="rect">
             <a:avLst/>
@@ -6075,40 +4557,42 @@
             <a:noAutofit/>
           </a:bodyPr>
           <a:lstStyle>
-            <a:lvl1pPr indent="0" defTabSz="1474200">
+            <a:lvl1pPr indent="0" algn="ctr">
               <a:lnSpc>
                 <a:spcPct val="100000"/>
               </a:lnSpc>
               <a:buNone/>
-              <a:defRPr b="0" lang="en-US" sz="2000" spc="-1" strike="noStrike">
-                <a:solidFill>
-                  <a:schemeClr val="dk1">
-                    <a:tint val="75000"/>
-                  </a:schemeClr>
-                </a:solidFill>
-                <a:latin typeface="Calibri"/>
+              <a:tabLst>
+                <a:tab algn="l" pos="0"/>
+              </a:tabLst>
+              <a:defRPr b="0" lang="en-US" sz="1400" spc="-1" strike="noStrike">
+                <a:solidFill>
+                  <a:srgbClr val="000000"/>
+                </a:solidFill>
+                <a:latin typeface="Times New Roman"/>
               </a:defRPr>
             </a:lvl1pPr>
           </a:lstStyle>
           <a:p>
-            <a:pPr indent="0" defTabSz="1474200">
+            <a:pPr indent="0" algn="ctr">
               <a:lnSpc>
                 <a:spcPct val="100000"/>
               </a:lnSpc>
               <a:buNone/>
+              <a:tabLst>
+                <a:tab algn="l" pos="0"/>
+              </a:tabLst>
             </a:pPr>
             <a:r>
-              <a:rPr b="0" lang="en-US" sz="2000" spc="-1" strike="noStrike">
-                <a:solidFill>
-                  <a:schemeClr val="dk1">
-                    <a:tint val="75000"/>
-                  </a:schemeClr>
-                </a:solidFill>
-                <a:latin typeface="Calibri"/>
+              <a:rPr b="0" lang="en-US" sz="1400" spc="-1" strike="noStrike">
+                <a:solidFill>
+                  <a:srgbClr val="000000"/>
+                </a:solidFill>
+                <a:latin typeface="Times New Roman"/>
               </a:rPr>
-              <a:t>&lt;date/time&gt;</a:t>
-            </a:r>
-            <a:endParaRPr b="0" lang="en-US" sz="2000" spc="-1" strike="noStrike">
+              <a:t>&lt;footer&gt;</a:t>
+            </a:r>
+            <a:endParaRPr b="0" lang="en-US" sz="1400" spc="-1" strike="noStrike">
               <a:solidFill>
                 <a:srgbClr val="000000"/>
               </a:solidFill>
@@ -6119,18 +4603,18 @@
       </p:sp>
       <p:sp>
         <p:nvSpPr>
-          <p:cNvPr id="51" name="PlaceHolder 2"/>
-          <p:cNvSpPr>
-            <a:spLocks noGrp="1"/>
-          </p:cNvSpPr>
-          <p:nvPr>
-            <p:ph type="ftr" idx="26"/>
+          <p:cNvPr id="40" name="PlaceHolder 2"/>
+          <p:cNvSpPr>
+            <a:spLocks noGrp="1"/>
+          </p:cNvSpPr>
+          <p:nvPr>
+            <p:ph type="sldNum" idx="26"/>
           </p:nvPr>
         </p:nvSpPr>
         <p:spPr>
           <a:xfrm>
-            <a:off x="5164200" y="9906120"/>
-            <a:ext cx="4785840" cy="569520"/>
+            <a:off x="10831680" y="9906120"/>
+            <a:ext cx="3526200" cy="568800"/>
           </a:xfrm>
           <a:prstGeom prst="rect">
             <a:avLst/>
@@ -6141,34 +4625,46 @@
           </a:ln>
         </p:spPr>
         <p:txBody>
-          <a:bodyPr lIns="147600" rIns="147600" tIns="73800" bIns="73800" anchor="ctr">
+          <a:bodyPr numCol="1" spcCol="0" lIns="147600" rIns="147600" tIns="73800" bIns="73800" anchor="ctr">
             <a:noAutofit/>
           </a:bodyPr>
           <a:lstStyle>
-            <a:lvl1pPr indent="0" algn="ctr">
-              <a:buNone/>
-              <a:defRPr b="0" lang="en-US" sz="1400" spc="-1" strike="noStrike">
-                <a:solidFill>
-                  <a:srgbClr val="000000"/>
-                </a:solidFill>
-                <a:latin typeface="Times New Roman"/>
+            <a:lvl1pPr indent="0" algn="r" defTabSz="1473120">
+              <a:lnSpc>
+                <a:spcPct val="100000"/>
+              </a:lnSpc>
+              <a:buNone/>
+              <a:tabLst>
+                <a:tab algn="l" pos="0"/>
+              </a:tabLst>
+              <a:defRPr b="0" lang="en-US" sz="2000" spc="-1" strike="noStrike">
+                <a:solidFill>
+                  <a:srgbClr val="898989"/>
+                </a:solidFill>
+                <a:latin typeface="Calibri"/>
               </a:defRPr>
             </a:lvl1pPr>
           </a:lstStyle>
           <a:p>
-            <a:pPr indent="0" algn="ctr">
-              <a:buNone/>
+            <a:pPr indent="0" algn="r" defTabSz="1473120">
+              <a:lnSpc>
+                <a:spcPct val="100000"/>
+              </a:lnSpc>
+              <a:buNone/>
+              <a:tabLst>
+                <a:tab algn="l" pos="0"/>
+              </a:tabLst>
             </a:pPr>
-            <a:r>
-              <a:rPr b="0" lang="en-US" sz="1400" spc="-1" strike="noStrike">
-                <a:solidFill>
-                  <a:srgbClr val="000000"/>
-                </a:solidFill>
-                <a:latin typeface="Times New Roman"/>
+            <a:fld id="{CD1A0FC0-E261-4213-8B1D-0CB7C1BE293F}" type="slidenum">
+              <a:rPr b="0" lang="en-US" sz="2000" spc="-1" strike="noStrike">
+                <a:solidFill>
+                  <a:srgbClr val="898989"/>
+                </a:solidFill>
+                <a:latin typeface="Calibri"/>
               </a:rPr>
-              <a:t>&lt;footer&gt;</a:t>
-            </a:r>
-            <a:endParaRPr b="0" lang="en-US" sz="1400" spc="-1" strike="noStrike">
+              <a:t>&lt;number&gt;</a:t>
+            </a:fld>
+            <a:endParaRPr b="0" lang="en-US" sz="2000" spc="-1" strike="noStrike">
               <a:solidFill>
                 <a:srgbClr val="000000"/>
               </a:solidFill>
@@ -6179,18 +4675,18 @@
       </p:sp>
       <p:sp>
         <p:nvSpPr>
-          <p:cNvPr id="52" name="PlaceHolder 3"/>
-          <p:cNvSpPr>
-            <a:spLocks noGrp="1"/>
-          </p:cNvSpPr>
-          <p:nvPr>
-            <p:ph type="sldNum" idx="27"/>
+          <p:cNvPr id="41" name="PlaceHolder 3"/>
+          <p:cNvSpPr>
+            <a:spLocks noGrp="1"/>
+          </p:cNvSpPr>
+          <p:nvPr>
+            <p:ph type="dt" idx="27"/>
           </p:nvPr>
         </p:nvSpPr>
         <p:spPr>
           <a:xfrm>
-            <a:off x="10831680" y="9906120"/>
-            <a:ext cx="3526920" cy="569520"/>
+            <a:off x="755640" y="9906120"/>
+            <a:ext cx="3526200" cy="568800"/>
           </a:xfrm>
           <a:prstGeom prst="rect">
             <a:avLst/>
@@ -6201,40 +4697,34 @@
           </a:ln>
         </p:spPr>
         <p:txBody>
-          <a:bodyPr numCol="1" spcCol="0" lIns="147600" rIns="147600" tIns="73800" bIns="73800" anchor="ctr">
+          <a:bodyPr lIns="147600" rIns="147600" tIns="73800" bIns="73800" anchor="ctr">
             <a:noAutofit/>
           </a:bodyPr>
           <a:lstStyle>
-            <a:lvl1pPr indent="0" algn="r" defTabSz="1473120">
-              <a:lnSpc>
-                <a:spcPct val="100000"/>
-              </a:lnSpc>
-              <a:buNone/>
-              <a:defRPr b="0" lang="en-US" sz="2000" spc="-1" strike="noStrike">
-                <a:solidFill>
-                  <a:srgbClr val="898989"/>
-                </a:solidFill>
-                <a:latin typeface="Calibri"/>
+            <a:lvl1pPr indent="0">
+              <a:buNone/>
+              <a:defRPr b="0" lang="en-US" sz="1400" spc="-1" strike="noStrike">
+                <a:solidFill>
+                  <a:srgbClr val="000000"/>
+                </a:solidFill>
+                <a:latin typeface="Times New Roman"/>
               </a:defRPr>
             </a:lvl1pPr>
           </a:lstStyle>
           <a:p>
-            <a:pPr indent="0" algn="r" defTabSz="1473120">
-              <a:lnSpc>
-                <a:spcPct val="100000"/>
-              </a:lnSpc>
+            <a:pPr indent="0">
               <a:buNone/>
             </a:pPr>
-            <a:fld id="{463284CC-BF49-4F14-8385-9F1A8BCF4215}" type="slidenum">
-              <a:rPr b="0" lang="en-US" sz="2000" spc="-1" strike="noStrike">
-                <a:solidFill>
-                  <a:srgbClr val="898989"/>
-                </a:solidFill>
-                <a:latin typeface="Calibri"/>
+            <a:r>
+              <a:rPr b="0" lang="en-US" sz="1400" spc="-1" strike="noStrike">
+                <a:solidFill>
+                  <a:srgbClr val="000000"/>
+                </a:solidFill>
+                <a:latin typeface="Times New Roman"/>
               </a:rPr>
-              <a:t>&lt;number&gt;</a:t>
-            </a:fld>
-            <a:endParaRPr b="0" lang="en-US" sz="2000" spc="-1" strike="noStrike">
+              <a:t>&lt;date/time&gt;</a:t>
+            </a:r>
+            <a:endParaRPr b="0" lang="en-US" sz="1400" spc="-1" strike="noStrike">
               <a:solidFill>
                 <a:srgbClr val="000000"/>
               </a:solidFill>
@@ -6271,7 +4761,7 @@
       </p:grpSpPr>
       <p:pic>
         <p:nvPicPr>
-          <p:cNvPr id="65" name="Picture 2" descr=""/>
+          <p:cNvPr id="48" name="ttn:map_image" descr=""/>
           <p:cNvPicPr/>
           <p:nvPr/>
         </p:nvPicPr>
@@ -6282,7 +4772,7 @@
         <p:spPr>
           <a:xfrm>
             <a:off x="2160" y="14040"/>
-            <a:ext cx="15107760" cy="10693080"/>
+            <a:ext cx="15107040" cy="10692360"/>
           </a:xfrm>
           <a:prstGeom prst="rect">
             <a:avLst/>
@@ -6294,14 +4784,14 @@
       </p:pic>
       <p:sp>
         <p:nvSpPr>
-          <p:cNvPr id="66" name="TextBox 6"/>
+          <p:cNvPr id="49" name="ttn:title"/>
           <p:cNvSpPr/>
           <p:nvPr/>
         </p:nvSpPr>
         <p:spPr>
           <a:xfrm>
             <a:off x="1111320" y="135720"/>
-            <a:ext cx="13836960" cy="443880"/>
+            <a:ext cx="13836240" cy="443880"/>
           </a:xfrm>
           <a:prstGeom prst="rect">
             <a:avLst/>
@@ -6396,14 +4886,14 @@
       </p:sp>
       <p:sp>
         <p:nvSpPr>
-          <p:cNvPr id="67" name="Rectangle 13"/>
+          <p:cNvPr id="50" name="ttn:time"/>
           <p:cNvSpPr/>
           <p:nvPr/>
         </p:nvSpPr>
         <p:spPr>
           <a:xfrm>
             <a:off x="7756200" y="966240"/>
-            <a:ext cx="546840" cy="303120"/>
+            <a:ext cx="546120" cy="303120"/>
           </a:xfrm>
           <a:prstGeom prst="rect">
             <a:avLst/>
@@ -6451,14 +4941,14 @@
       </p:sp>
       <p:sp>
         <p:nvSpPr>
-          <p:cNvPr id="68" name="TextBox 1"/>
+          <p:cNvPr id="51" name="ttn:comment"/>
           <p:cNvSpPr/>
           <p:nvPr/>
         </p:nvSpPr>
         <p:spPr>
           <a:xfrm>
             <a:off x="5591160" y="9875160"/>
-            <a:ext cx="5333760" cy="303120"/>
+            <a:ext cx="5333040" cy="303120"/>
           </a:xfrm>
           <a:prstGeom prst="rect">
             <a:avLst/>
@@ -6506,7 +4996,7 @@
       </p:sp>
       <p:pic>
         <p:nvPicPr>
-          <p:cNvPr id="69" name="Picture 8" descr=""/>
+          <p:cNvPr id="52" name="Picture 8" descr=""/>
           <p:cNvPicPr/>
           <p:nvPr/>
         </p:nvPicPr>
@@ -6519,7 +5009,7 @@
         <p:spPr>
           <a:xfrm>
             <a:off x="14241960" y="1059120"/>
-            <a:ext cx="296640" cy="693720"/>
+            <a:ext cx="295920" cy="693000"/>
           </a:xfrm>
           <a:prstGeom prst="rect">
             <a:avLst/>
@@ -6529,128 +5019,6 @@
           </a:ln>
         </p:spPr>
       </p:pic>
-      <p:sp>
-        <p:nvSpPr>
-          <p:cNvPr id="70" name="TextBox 7"/>
-          <p:cNvSpPr/>
-          <p:nvPr/>
-        </p:nvSpPr>
-        <p:spPr>
-          <a:xfrm>
-            <a:off x="5423760" y="6868440"/>
-            <a:ext cx="1478880" cy="448200"/>
-          </a:xfrm>
-          <a:prstGeom prst="rect">
-            <a:avLst/>
-          </a:prstGeom>
-          <a:noFill/>
-          <a:ln>
-            <a:noFill/>
-          </a:ln>
-        </p:spPr>
-        <p:style>
-          <a:lnRef idx="2">
-            <a:schemeClr val="accent1">
-              <a:shade val="50000"/>
-            </a:schemeClr>
-          </a:lnRef>
-          <a:fillRef idx="1">
-            <a:schemeClr val="accent1"/>
-          </a:fillRef>
-          <a:effectRef idx="0">
-            <a:schemeClr val="accent1"/>
-          </a:effectRef>
-          <a:fontRef idx="minor"/>
-        </p:style>
-        <p:txBody>
-          <a:bodyPr wrap="none" lIns="79200" rIns="79200" tIns="39600" bIns="39600" anchor="ctr">
-            <a:noAutofit/>
-          </a:bodyPr>
-          <a:p>
-            <a:pPr algn="ctr" defTabSz="1473120">
-              <a:lnSpc>
-                <a:spcPct val="100000"/>
-              </a:lnSpc>
-            </a:pPr>
-            <a:r>
-              <a:rPr b="1" lang="en-US" sz="1400" spc="-1" strike="noStrike">
-                <a:solidFill>
-                  <a:srgbClr val="ffff00"/>
-                </a:solidFill>
-                <a:latin typeface="Arial"/>
-              </a:rPr>
-              <a:t>ABC</a:t>
-            </a:r>
-            <a:endParaRPr b="0" lang="en-US" sz="1400" spc="-1" strike="noStrike">
-              <a:solidFill>
-                <a:srgbClr val="000000"/>
-              </a:solidFill>
-              <a:latin typeface="Arial"/>
-            </a:endParaRPr>
-          </a:p>
-        </p:txBody>
-      </p:sp>
-      <p:sp>
-        <p:nvSpPr>
-          <p:cNvPr id="71" name="TextBox 9"/>
-          <p:cNvSpPr/>
-          <p:nvPr/>
-        </p:nvSpPr>
-        <p:spPr>
-          <a:xfrm>
-            <a:off x="6539040" y="7977240"/>
-            <a:ext cx="1478880" cy="448200"/>
-          </a:xfrm>
-          <a:prstGeom prst="rect">
-            <a:avLst/>
-          </a:prstGeom>
-          <a:noFill/>
-          <a:ln>
-            <a:noFill/>
-          </a:ln>
-        </p:spPr>
-        <p:style>
-          <a:lnRef idx="2">
-            <a:schemeClr val="accent1">
-              <a:shade val="50000"/>
-            </a:schemeClr>
-          </a:lnRef>
-          <a:fillRef idx="1">
-            <a:schemeClr val="accent1"/>
-          </a:fillRef>
-          <a:effectRef idx="0">
-            <a:schemeClr val="accent1"/>
-          </a:effectRef>
-          <a:fontRef idx="minor"/>
-        </p:style>
-        <p:txBody>
-          <a:bodyPr wrap="none" lIns="79200" rIns="79200" tIns="39600" bIns="39600" anchor="ctr">
-            <a:noAutofit/>
-          </a:bodyPr>
-          <a:p>
-            <a:pPr algn="ctr" defTabSz="1473120">
-              <a:lnSpc>
-                <a:spcPct val="100000"/>
-              </a:lnSpc>
-            </a:pPr>
-            <a:r>
-              <a:rPr b="1" lang="en-US" sz="1400" spc="-1" strike="noStrike">
-                <a:solidFill>
-                  <a:srgbClr val="ffff00"/>
-                </a:solidFill>
-                <a:latin typeface="Arial"/>
-              </a:rPr>
-              <a:t>XYZ</a:t>
-            </a:r>
-            <a:endParaRPr b="0" lang="en-US" sz="1400" spc="-1" strike="noStrike">
-              <a:solidFill>
-                <a:srgbClr val="000000"/>
-              </a:solidFill>
-              <a:latin typeface="Arial"/>
-            </a:endParaRPr>
-          </a:p>
-        </p:txBody>
-      </p:sp>
     </p:spTree>
   </p:cSld>
   <mc:AlternateContent>
